--- a/CylDist_Platform_Presentation.pptx
+++ b/CylDist_Platform_Presentation.pptx
@@ -2,7 +2,7 @@
 <file path=ppt/presentation.xml><?xml version="1.0" encoding="utf-8"?>
 <p:presentation xmlns:a="http://schemas.openxmlformats.org/drawingml/2006/main" xmlns:r="http://schemas.openxmlformats.org/officeDocument/2006/relationships" xmlns:p="http://schemas.openxmlformats.org/presentationml/2006/main">
   <p:sldMasterIdLst>
-    <p:sldMasterId id="2147483648" r:id="rId11"/>
+    <p:sldMasterId id="2147483648" r:id="rId12"/>
   </p:sldMasterIdLst>
   <p:sldIdLst>
     <p:sldId id="256" r:id="rId1"/>
@@ -15,6 +15,7 @@
     <p:sldId id="263" r:id="rId8"/>
     <p:sldId id="264" r:id="rId9"/>
     <p:sldId id="265" r:id="rId10"/>
+    <p:sldId id="266" r:id="rId11"/>
   </p:sldIdLst>
   <p:sldSz cx="12192000" cy="6858000" type="screen16x9"/>
   <p:notesSz cx="6858000" cy="12192000"/>
@@ -1358,7 +1359,7 @@
       </p:grpSpPr>
       <p:sp>
         <p:nvSpPr>
-          <p:cNvPr id="795" name="r"/>
+          <p:cNvPr id="808" name="r"/>
           <p:cNvSpPr/>
           <p:nvPr/>
         </p:nvSpPr>
@@ -1385,7 +1386,7 @@
       </p:sp>
       <p:sp>
         <p:nvSpPr>
-          <p:cNvPr id="796" name="c"/>
+          <p:cNvPr id="809" name="c"/>
           <p:cNvSpPr/>
           <p:nvPr/>
         </p:nvSpPr>
@@ -1412,7 +1413,7 @@
       </p:sp>
       <p:sp>
         <p:nvSpPr>
-          <p:cNvPr id="797" name="c"/>
+          <p:cNvPr id="810" name="c"/>
           <p:cNvSpPr/>
           <p:nvPr/>
         </p:nvSpPr>
@@ -1439,7 +1440,7 @@
       </p:sp>
       <p:sp>
         <p:nvSpPr>
-          <p:cNvPr id="798" name="c"/>
+          <p:cNvPr id="811" name="c"/>
           <p:cNvSpPr/>
           <p:nvPr/>
         </p:nvSpPr>
@@ -1466,7 +1467,7 @@
       </p:sp>
       <p:sp>
         <p:nvSpPr>
-          <p:cNvPr id="799" name="c"/>
+          <p:cNvPr id="812" name="c"/>
           <p:cNvSpPr/>
           <p:nvPr/>
         </p:nvSpPr>
@@ -1493,7 +1494,7 @@
       </p:sp>
       <p:sp>
         <p:nvSpPr>
-          <p:cNvPr id="800" name="c"/>
+          <p:cNvPr id="813" name="c"/>
           <p:cNvSpPr/>
           <p:nvPr/>
         </p:nvSpPr>
@@ -1520,7 +1521,7 @@
       </p:sp>
       <p:sp>
         <p:nvSpPr>
-          <p:cNvPr id="801" name="r"/>
+          <p:cNvPr id="814" name="r"/>
           <p:cNvSpPr/>
           <p:nvPr/>
         </p:nvSpPr>
@@ -1547,7 +1548,7 @@
       </p:sp>
       <p:sp>
         <p:nvSpPr>
-          <p:cNvPr id="802" name="t"/>
+          <p:cNvPr id="815" name="t"/>
           <p:cNvSpPr txBox="1"/>
           <p:nvPr/>
         </p:nvSpPr>
@@ -1582,7 +1583,7 @@
       </p:sp>
       <p:sp>
         <p:nvSpPr>
-          <p:cNvPr id="803" name="t"/>
+          <p:cNvPr id="816" name="t"/>
           <p:cNvSpPr txBox="1"/>
           <p:nvPr/>
         </p:nvSpPr>
@@ -1617,7 +1618,7 @@
       </p:sp>
       <p:sp>
         <p:nvSpPr>
-          <p:cNvPr id="804" name="t"/>
+          <p:cNvPr id="817" name="t"/>
           <p:cNvSpPr txBox="1"/>
           <p:nvPr/>
         </p:nvSpPr>
@@ -1652,7 +1653,7 @@
       </p:sp>
       <p:sp>
         <p:nvSpPr>
-          <p:cNvPr id="805" name="s"/>
+          <p:cNvPr id="818" name="s"/>
           <p:cNvSpPr/>
           <p:nvPr/>
         </p:nvSpPr>
@@ -1681,7 +1682,7 @@
       </p:sp>
       <p:sp>
         <p:nvSpPr>
-          <p:cNvPr id="806" name="r"/>
+          <p:cNvPr id="819" name="r"/>
           <p:cNvSpPr/>
           <p:nvPr/>
         </p:nvSpPr>
@@ -1708,7 +1709,7 @@
       </p:sp>
       <p:sp>
         <p:nvSpPr>
-          <p:cNvPr id="807" name="t"/>
+          <p:cNvPr id="820" name="t"/>
           <p:cNvSpPr txBox="1"/>
           <p:nvPr/>
         </p:nvSpPr>
@@ -1743,7 +1744,7 @@
       </p:sp>
       <p:sp>
         <p:nvSpPr>
-          <p:cNvPr id="808" name="c"/>
+          <p:cNvPr id="821" name="c"/>
           <p:cNvSpPr/>
           <p:nvPr/>
         </p:nvSpPr>
@@ -1770,7 +1771,7 @@
       </p:sp>
       <p:sp>
         <p:nvSpPr>
-          <p:cNvPr id="809" name="t"/>
+          <p:cNvPr id="822" name="t"/>
           <p:cNvSpPr txBox="1"/>
           <p:nvPr/>
         </p:nvSpPr>
@@ -1805,7 +1806,7 @@
       </p:sp>
       <p:sp>
         <p:nvSpPr>
-          <p:cNvPr id="810" name="t"/>
+          <p:cNvPr id="823" name="t"/>
           <p:cNvSpPr txBox="1"/>
           <p:nvPr/>
         </p:nvSpPr>
@@ -1840,7 +1841,7 @@
       </p:sp>
       <p:sp>
         <p:nvSpPr>
-          <p:cNvPr id="811" name="c"/>
+          <p:cNvPr id="824" name="c"/>
           <p:cNvSpPr/>
           <p:nvPr/>
         </p:nvSpPr>
@@ -1867,7 +1868,7 @@
       </p:sp>
       <p:sp>
         <p:nvSpPr>
-          <p:cNvPr id="812" name="t"/>
+          <p:cNvPr id="825" name="t"/>
           <p:cNvSpPr txBox="1"/>
           <p:nvPr/>
         </p:nvSpPr>
@@ -1902,7 +1903,7 @@
       </p:sp>
       <p:sp>
         <p:nvSpPr>
-          <p:cNvPr id="813" name="t"/>
+          <p:cNvPr id="826" name="t"/>
           <p:cNvSpPr txBox="1"/>
           <p:nvPr/>
         </p:nvSpPr>
@@ -1937,7 +1938,7 @@
       </p:sp>
       <p:sp>
         <p:nvSpPr>
-          <p:cNvPr id="814" name="c"/>
+          <p:cNvPr id="827" name="c"/>
           <p:cNvSpPr/>
           <p:nvPr/>
         </p:nvSpPr>
@@ -1964,7 +1965,7 @@
       </p:sp>
       <p:sp>
         <p:nvSpPr>
-          <p:cNvPr id="815" name="t"/>
+          <p:cNvPr id="828" name="t"/>
           <p:cNvSpPr txBox="1"/>
           <p:nvPr/>
         </p:nvSpPr>
@@ -1999,7 +2000,7 @@
       </p:sp>
       <p:sp>
         <p:nvSpPr>
-          <p:cNvPr id="816" name="t"/>
+          <p:cNvPr id="829" name="t"/>
           <p:cNvSpPr txBox="1"/>
           <p:nvPr/>
         </p:nvSpPr>
@@ -2034,7 +2035,7 @@
       </p:sp>
       <p:sp>
         <p:nvSpPr>
-          <p:cNvPr id="817" name="c"/>
+          <p:cNvPr id="830" name="c"/>
           <p:cNvSpPr/>
           <p:nvPr/>
         </p:nvSpPr>
@@ -2061,7 +2062,7 @@
       </p:sp>
       <p:sp>
         <p:nvSpPr>
-          <p:cNvPr id="818" name="t"/>
+          <p:cNvPr id="831" name="t"/>
           <p:cNvSpPr txBox="1"/>
           <p:nvPr/>
         </p:nvSpPr>
@@ -2096,7 +2097,7 @@
       </p:sp>
       <p:sp>
         <p:nvSpPr>
-          <p:cNvPr id="819" name="t"/>
+          <p:cNvPr id="832" name="t"/>
           <p:cNvSpPr txBox="1"/>
           <p:nvPr/>
         </p:nvSpPr>
@@ -2131,7 +2132,7 @@
       </p:sp>
       <p:sp>
         <p:nvSpPr>
-          <p:cNvPr id="820" name="c"/>
+          <p:cNvPr id="833" name="c"/>
           <p:cNvSpPr/>
           <p:nvPr/>
         </p:nvSpPr>
@@ -2158,7 +2159,7 @@
       </p:sp>
       <p:sp>
         <p:nvSpPr>
-          <p:cNvPr id="821" name="t"/>
+          <p:cNvPr id="834" name="t"/>
           <p:cNvSpPr txBox="1"/>
           <p:nvPr/>
         </p:nvSpPr>
@@ -2193,7 +2194,7 @@
       </p:sp>
       <p:sp>
         <p:nvSpPr>
-          <p:cNvPr id="822" name="t"/>
+          <p:cNvPr id="835" name="t"/>
           <p:cNvSpPr txBox="1"/>
           <p:nvPr/>
         </p:nvSpPr>
@@ -2228,7 +2229,7 @@
       </p:sp>
       <p:sp>
         <p:nvSpPr>
-          <p:cNvPr id="823" name="c"/>
+          <p:cNvPr id="836" name="c"/>
           <p:cNvSpPr/>
           <p:nvPr/>
         </p:nvSpPr>
@@ -2255,7 +2256,7 @@
       </p:sp>
       <p:sp>
         <p:nvSpPr>
-          <p:cNvPr id="824" name="t"/>
+          <p:cNvPr id="837" name="t"/>
           <p:cNvSpPr txBox="1"/>
           <p:nvPr/>
         </p:nvSpPr>
@@ -2290,7 +2291,7 @@
       </p:sp>
       <p:sp>
         <p:nvSpPr>
-          <p:cNvPr id="825" name="t"/>
+          <p:cNvPr id="838" name="t"/>
           <p:cNvSpPr txBox="1"/>
           <p:nvPr/>
         </p:nvSpPr>
@@ -2325,7 +2326,7 @@
       </p:sp>
       <p:sp>
         <p:nvSpPr>
-          <p:cNvPr id="826" name="c"/>
+          <p:cNvPr id="839" name="c"/>
           <p:cNvSpPr/>
           <p:nvPr/>
         </p:nvSpPr>
@@ -2352,7 +2353,7 @@
       </p:sp>
       <p:sp>
         <p:nvSpPr>
-          <p:cNvPr id="827" name="t"/>
+          <p:cNvPr id="840" name="t"/>
           <p:cNvSpPr txBox="1"/>
           <p:nvPr/>
         </p:nvSpPr>
@@ -2387,7 +2388,7 @@
       </p:sp>
       <p:sp>
         <p:nvSpPr>
-          <p:cNvPr id="828" name="t"/>
+          <p:cNvPr id="841" name="t"/>
           <p:cNvSpPr txBox="1"/>
           <p:nvPr/>
         </p:nvSpPr>
@@ -2422,7 +2423,7 @@
       </p:sp>
       <p:sp>
         <p:nvSpPr>
-          <p:cNvPr id="829" name="c"/>
+          <p:cNvPr id="842" name="c"/>
           <p:cNvSpPr/>
           <p:nvPr/>
         </p:nvSpPr>
@@ -2449,7 +2450,7 @@
       </p:sp>
       <p:sp>
         <p:nvSpPr>
-          <p:cNvPr id="830" name="t"/>
+          <p:cNvPr id="843" name="t"/>
           <p:cNvSpPr txBox="1"/>
           <p:nvPr/>
         </p:nvSpPr>
@@ -2484,7 +2485,7 @@
       </p:sp>
       <p:sp>
         <p:nvSpPr>
-          <p:cNvPr id="831" name="t"/>
+          <p:cNvPr id="844" name="t"/>
           <p:cNvSpPr txBox="1"/>
           <p:nvPr/>
         </p:nvSpPr>
@@ -2519,7 +2520,7 @@
       </p:sp>
       <p:sp>
         <p:nvSpPr>
-          <p:cNvPr id="832" name="c"/>
+          <p:cNvPr id="845" name="c"/>
           <p:cNvSpPr/>
           <p:nvPr/>
         </p:nvSpPr>
@@ -2546,7 +2547,7 @@
       </p:sp>
       <p:sp>
         <p:nvSpPr>
-          <p:cNvPr id="833" name="t"/>
+          <p:cNvPr id="846" name="t"/>
           <p:cNvSpPr txBox="1"/>
           <p:nvPr/>
         </p:nvSpPr>
@@ -2581,7 +2582,7 @@
       </p:sp>
       <p:sp>
         <p:nvSpPr>
-          <p:cNvPr id="834" name="t"/>
+          <p:cNvPr id="847" name="t"/>
           <p:cNvSpPr txBox="1"/>
           <p:nvPr/>
         </p:nvSpPr>
@@ -2616,7 +2617,7 @@
       </p:sp>
       <p:sp>
         <p:nvSpPr>
-          <p:cNvPr id="835" name="c"/>
+          <p:cNvPr id="848" name="c"/>
           <p:cNvSpPr/>
           <p:nvPr/>
         </p:nvSpPr>
@@ -2643,7 +2644,7 @@
       </p:sp>
       <p:sp>
         <p:nvSpPr>
-          <p:cNvPr id="836" name="t"/>
+          <p:cNvPr id="849" name="t"/>
           <p:cNvSpPr txBox="1"/>
           <p:nvPr/>
         </p:nvSpPr>
@@ -2678,7 +2679,7 @@
       </p:sp>
       <p:sp>
         <p:nvSpPr>
-          <p:cNvPr id="837" name="t"/>
+          <p:cNvPr id="850" name="t"/>
           <p:cNvSpPr txBox="1"/>
           <p:nvPr/>
         </p:nvSpPr>
@@ -2713,7 +2714,7 @@
       </p:sp>
       <p:sp>
         <p:nvSpPr>
-          <p:cNvPr id="838" name="s"/>
+          <p:cNvPr id="851" name="s"/>
           <p:cNvSpPr/>
           <p:nvPr/>
         </p:nvSpPr>
@@ -2742,7 +2743,7 @@
       </p:sp>
       <p:sp>
         <p:nvSpPr>
-          <p:cNvPr id="839" name="r"/>
+          <p:cNvPr id="852" name="r"/>
           <p:cNvSpPr/>
           <p:nvPr/>
         </p:nvSpPr>
@@ -2769,7 +2770,7 @@
       </p:sp>
       <p:sp>
         <p:nvSpPr>
-          <p:cNvPr id="840" name="t"/>
+          <p:cNvPr id="853" name="t"/>
           <p:cNvSpPr txBox="1"/>
           <p:nvPr/>
         </p:nvSpPr>
@@ -2804,7 +2805,7 @@
       </p:sp>
       <p:sp>
         <p:nvSpPr>
-          <p:cNvPr id="841" name="c"/>
+          <p:cNvPr id="854" name="c"/>
           <p:cNvSpPr/>
           <p:nvPr/>
         </p:nvSpPr>
@@ -2831,7 +2832,7 @@
       </p:sp>
       <p:sp>
         <p:nvSpPr>
-          <p:cNvPr id="842" name="t"/>
+          <p:cNvPr id="855" name="t"/>
           <p:cNvSpPr txBox="1"/>
           <p:nvPr/>
         </p:nvSpPr>
@@ -2866,7 +2867,7 @@
       </p:sp>
       <p:sp>
         <p:nvSpPr>
-          <p:cNvPr id="843" name="t"/>
+          <p:cNvPr id="856" name="t"/>
           <p:cNvSpPr txBox="1"/>
           <p:nvPr/>
         </p:nvSpPr>
@@ -2901,7 +2902,7 @@
       </p:sp>
       <p:sp>
         <p:nvSpPr>
-          <p:cNvPr id="844" name="t"/>
+          <p:cNvPr id="857" name="t"/>
           <p:cNvSpPr txBox="1"/>
           <p:nvPr/>
         </p:nvSpPr>
@@ -2936,7 +2937,7 @@
       </p:sp>
       <p:sp>
         <p:nvSpPr>
-          <p:cNvPr id="845" name="c"/>
+          <p:cNvPr id="858" name="c"/>
           <p:cNvSpPr/>
           <p:nvPr/>
         </p:nvSpPr>
@@ -2963,7 +2964,7 @@
       </p:sp>
       <p:sp>
         <p:nvSpPr>
-          <p:cNvPr id="846" name="t"/>
+          <p:cNvPr id="859" name="t"/>
           <p:cNvSpPr txBox="1"/>
           <p:nvPr/>
         </p:nvSpPr>
@@ -2998,7 +2999,7 @@
       </p:sp>
       <p:sp>
         <p:nvSpPr>
-          <p:cNvPr id="847" name="t"/>
+          <p:cNvPr id="860" name="t"/>
           <p:cNvSpPr txBox="1"/>
           <p:nvPr/>
         </p:nvSpPr>
@@ -3033,7 +3034,7 @@
       </p:sp>
       <p:sp>
         <p:nvSpPr>
-          <p:cNvPr id="848" name="t"/>
+          <p:cNvPr id="861" name="t"/>
           <p:cNvSpPr txBox="1"/>
           <p:nvPr/>
         </p:nvSpPr>
@@ -3068,7 +3069,7 @@
       </p:sp>
       <p:sp>
         <p:nvSpPr>
-          <p:cNvPr id="849" name="c"/>
+          <p:cNvPr id="862" name="c"/>
           <p:cNvSpPr/>
           <p:nvPr/>
         </p:nvSpPr>
@@ -3095,7 +3096,7 @@
       </p:sp>
       <p:sp>
         <p:nvSpPr>
-          <p:cNvPr id="850" name="t"/>
+          <p:cNvPr id="863" name="t"/>
           <p:cNvSpPr txBox="1"/>
           <p:nvPr/>
         </p:nvSpPr>
@@ -3130,7 +3131,7 @@
       </p:sp>
       <p:sp>
         <p:nvSpPr>
-          <p:cNvPr id="851" name="t"/>
+          <p:cNvPr id="864" name="t"/>
           <p:cNvSpPr txBox="1"/>
           <p:nvPr/>
         </p:nvSpPr>
@@ -3165,7 +3166,7 @@
       </p:sp>
       <p:sp>
         <p:nvSpPr>
-          <p:cNvPr id="852" name="t"/>
+          <p:cNvPr id="865" name="t"/>
           <p:cNvSpPr txBox="1"/>
           <p:nvPr/>
         </p:nvSpPr>
@@ -3200,7 +3201,7 @@
       </p:sp>
       <p:sp>
         <p:nvSpPr>
-          <p:cNvPr id="853" name="c"/>
+          <p:cNvPr id="866" name="c"/>
           <p:cNvSpPr/>
           <p:nvPr/>
         </p:nvSpPr>
@@ -3227,7 +3228,7 @@
       </p:sp>
       <p:sp>
         <p:nvSpPr>
-          <p:cNvPr id="854" name="t"/>
+          <p:cNvPr id="867" name="t"/>
           <p:cNvSpPr txBox="1"/>
           <p:nvPr/>
         </p:nvSpPr>
@@ -3262,7 +3263,7 @@
       </p:sp>
       <p:sp>
         <p:nvSpPr>
-          <p:cNvPr id="855" name="t"/>
+          <p:cNvPr id="868" name="t"/>
           <p:cNvSpPr txBox="1"/>
           <p:nvPr/>
         </p:nvSpPr>
@@ -3297,7 +3298,7 @@
       </p:sp>
       <p:sp>
         <p:nvSpPr>
-          <p:cNvPr id="856" name="t"/>
+          <p:cNvPr id="869" name="t"/>
           <p:cNvSpPr txBox="1"/>
           <p:nvPr/>
         </p:nvSpPr>
@@ -3332,7 +3333,7 @@
       </p:sp>
       <p:sp>
         <p:nvSpPr>
-          <p:cNvPr id="857" name="c"/>
+          <p:cNvPr id="870" name="c"/>
           <p:cNvSpPr/>
           <p:nvPr/>
         </p:nvSpPr>
@@ -3359,7 +3360,7 @@
       </p:sp>
       <p:sp>
         <p:nvSpPr>
-          <p:cNvPr id="858" name="t"/>
+          <p:cNvPr id="871" name="t"/>
           <p:cNvSpPr txBox="1"/>
           <p:nvPr/>
         </p:nvSpPr>
@@ -3394,7 +3395,7 @@
       </p:sp>
       <p:sp>
         <p:nvSpPr>
-          <p:cNvPr id="859" name="t"/>
+          <p:cNvPr id="872" name="t"/>
           <p:cNvSpPr txBox="1"/>
           <p:nvPr/>
         </p:nvSpPr>
@@ -3429,7 +3430,7 @@
       </p:sp>
       <p:sp>
         <p:nvSpPr>
-          <p:cNvPr id="860" name="t"/>
+          <p:cNvPr id="873" name="t"/>
           <p:cNvSpPr txBox="1"/>
           <p:nvPr/>
         </p:nvSpPr>
@@ -3464,7 +3465,7 @@
       </p:sp>
       <p:sp>
         <p:nvSpPr>
-          <p:cNvPr id="861" name="s"/>
+          <p:cNvPr id="874" name="s"/>
           <p:cNvSpPr/>
           <p:nvPr/>
         </p:nvSpPr>
@@ -3500,7 +3501,7 @@
       </p:sp>
       <p:sp>
         <p:nvSpPr>
-          <p:cNvPr id="862" name="r"/>
+          <p:cNvPr id="875" name="r"/>
           <p:cNvSpPr/>
           <p:nvPr/>
         </p:nvSpPr>
@@ -3527,7 +3528,7 @@
       </p:sp>
       <p:sp>
         <p:nvSpPr>
-          <p:cNvPr id="863" name="ps"/>
+          <p:cNvPr id="876" name="ps"/>
           <p:cNvSpPr/>
           <p:nvPr/>
         </p:nvSpPr>
@@ -3561,7 +3562,7 @@
       </p:sp>
       <p:sp>
         <p:nvSpPr>
-          <p:cNvPr id="864" name="ps"/>
+          <p:cNvPr id="877" name="ps"/>
           <p:cNvSpPr/>
           <p:nvPr/>
         </p:nvSpPr>
@@ -3588,7 +3589,7 @@
       </p:sp>
       <p:sp>
         <p:nvSpPr>
-          <p:cNvPr id="865" name="ps"/>
+          <p:cNvPr id="878" name="ps"/>
           <p:cNvSpPr/>
           <p:nvPr/>
         </p:nvSpPr>
@@ -3615,7 +3616,7 @@
       </p:sp>
       <p:sp>
         <p:nvSpPr>
-          <p:cNvPr id="866" name="ps"/>
+          <p:cNvPr id="879" name="ps"/>
           <p:cNvSpPr/>
           <p:nvPr/>
         </p:nvSpPr>
@@ -3642,7 +3643,7 @@
       </p:sp>
       <p:sp>
         <p:nvSpPr>
-          <p:cNvPr id="867" name="ps"/>
+          <p:cNvPr id="880" name="ps"/>
           <p:cNvSpPr/>
           <p:nvPr/>
         </p:nvSpPr>
@@ -3669,7 +3670,7 @@
       </p:sp>
       <p:sp>
         <p:nvSpPr>
-          <p:cNvPr id="868" name="fin"/>
+          <p:cNvPr id="881" name="fin"/>
           <p:cNvSpPr/>
           <p:nvPr/>
         </p:nvSpPr>
@@ -3696,7 +3697,7 @@
       </p:sp>
       <p:sp>
         <p:nvSpPr>
-          <p:cNvPr id="869" name="flm"/>
+          <p:cNvPr id="882" name="flm"/>
           <p:cNvSpPr/>
           <p:nvPr/>
         </p:nvSpPr>
@@ -3731,7 +3732,7 @@
       </p:sp>
       <p:sp>
         <p:nvSpPr>
-          <p:cNvPr id="870" name="ps"/>
+          <p:cNvPr id="883" name="ps"/>
           <p:cNvSpPr/>
           <p:nvPr/>
         </p:nvSpPr>
@@ -3758,7 +3759,7 @@
       </p:sp>
       <p:sp>
         <p:nvSpPr>
-          <p:cNvPr id="871" name="ps"/>
+          <p:cNvPr id="884" name="ps"/>
           <p:cNvSpPr/>
           <p:nvPr/>
         </p:nvSpPr>
@@ -3785,7 +3786,7 @@
       </p:sp>
       <p:sp>
         <p:nvSpPr>
-          <p:cNvPr id="872" name="ps"/>
+          <p:cNvPr id="885" name="ps"/>
           <p:cNvSpPr/>
           <p:nvPr/>
         </p:nvSpPr>
@@ -3812,7 +3813,7 @@
       </p:sp>
       <p:sp>
         <p:nvSpPr>
-          <p:cNvPr id="873" name="t"/>
+          <p:cNvPr id="886" name="t"/>
           <p:cNvSpPr txBox="1"/>
           <p:nvPr/>
         </p:nvSpPr>
@@ -3847,7 +3848,7 @@
       </p:sp>
       <p:sp>
         <p:nvSpPr>
-          <p:cNvPr id="874" name="t"/>
+          <p:cNvPr id="887" name="t"/>
           <p:cNvSpPr txBox="1"/>
           <p:nvPr/>
         </p:nvSpPr>
@@ -3882,7 +3883,7 @@
       </p:sp>
       <p:sp>
         <p:nvSpPr>
-          <p:cNvPr id="875" name="t"/>
+          <p:cNvPr id="888" name="t"/>
           <p:cNvSpPr txBox="1"/>
           <p:nvPr/>
         </p:nvSpPr>
@@ -3917,7 +3918,7 @@
       </p:sp>
       <p:sp>
         <p:nvSpPr>
-          <p:cNvPr id="876" name="r"/>
+          <p:cNvPr id="889" name="r"/>
           <p:cNvSpPr/>
           <p:nvPr/>
         </p:nvSpPr>
@@ -3946,6 +3947,2570 @@
   </p:cSld>
   <p:transition spd="med">
     <p:fade/>
+  </p:transition>
+  <p:clrMapOvr>
+    <a:masterClrMapping/>
+  </p:clrMapOvr>
+</p:sld>
+</file>
+
+<file path=ppt/slides/slide11.xml><?xml version="1.0" encoding="utf-8"?>
+<p:sld xmlns:a="http://schemas.openxmlformats.org/drawingml/2006/main" xmlns:r="http://schemas.openxmlformats.org/officeDocument/2006/relationships" xmlns:p="http://schemas.openxmlformats.org/presentationml/2006/main">
+  <p:cSld>
+    <p:spTree>
+      <p:nvGrpSpPr>
+        <p:cNvPr id="1" name=""/>
+        <p:cNvGrpSpPr/>
+        <p:nvPr/>
+      </p:nvGrpSpPr>
+      <p:grpSpPr>
+        <a:xfrm>
+          <a:off x="0" y="0"/>
+          <a:ext cx="0" cy="0"/>
+          <a:chOff x="0" y="0"/>
+          <a:chExt cx="0" cy="0"/>
+        </a:xfrm>
+      </p:grpSpPr>
+      <p:sp>
+        <p:nvSpPr>
+          <p:cNvPr id="890" name="r"/>
+          <p:cNvSpPr/>
+          <p:nvPr/>
+        </p:nvSpPr>
+        <p:spPr>
+          <a:xfrm>
+            <a:off x="0" y="0"/>
+            <a:ext cx="12192000" cy="6858000"/>
+          </a:xfrm>
+          <a:prstGeom prst="rect">
+            <a:avLst/>
+          </a:prstGeom>
+          <a:solidFill>
+            <a:srgbClr val="F8FAFC"/>
+          </a:solidFill>
+          <a:ln>
+            <a:noFill/>
+          </a:ln>
+        </p:spPr>
+        <p:txBody>
+          <a:bodyPr/>
+          <a:lstStyle/>
+          <a:p/>
+        </p:txBody>
+      </p:sp>
+      <p:sp>
+        <p:nvSpPr>
+          <p:cNvPr id="891" name="r"/>
+          <p:cNvSpPr/>
+          <p:nvPr/>
+        </p:nvSpPr>
+        <p:spPr>
+          <a:xfrm>
+            <a:off x="0" y="0"/>
+            <a:ext cx="12192000" cy="868680"/>
+          </a:xfrm>
+          <a:prstGeom prst="rect">
+            <a:avLst/>
+          </a:prstGeom>
+          <a:solidFill>
+            <a:srgbClr val="0B1739"/>
+          </a:solidFill>
+          <a:ln>
+            <a:noFill/>
+          </a:ln>
+        </p:spPr>
+        <p:txBody>
+          <a:bodyPr/>
+          <a:lstStyle/>
+          <a:p/>
+        </p:txBody>
+      </p:sp>
+      <p:sp>
+        <p:nvSpPr>
+          <p:cNvPr id="892" name="r"/>
+          <p:cNvSpPr/>
+          <p:nvPr/>
+        </p:nvSpPr>
+        <p:spPr>
+          <a:xfrm>
+            <a:off x="0" y="868680"/>
+            <a:ext cx="12192000" cy="36576"/>
+          </a:xfrm>
+          <a:prstGeom prst="rect">
+            <a:avLst/>
+          </a:prstGeom>
+          <a:solidFill>
+            <a:srgbClr val="F97316"/>
+          </a:solidFill>
+          <a:ln>
+            <a:noFill/>
+          </a:ln>
+        </p:spPr>
+        <p:txBody>
+          <a:bodyPr/>
+          <a:lstStyle/>
+          <a:p/>
+        </p:txBody>
+      </p:sp>
+      <p:sp>
+        <p:nvSpPr>
+          <p:cNvPr id="893" name="t"/>
+          <p:cNvSpPr txBox="1"/>
+          <p:nvPr/>
+        </p:nvSpPr>
+        <p:spPr>
+          <a:xfrm>
+            <a:off x="365760" y="164592"/>
+            <a:ext cx="1828800" cy="640080"/>
+          </a:xfrm>
+          <a:prstGeom prst="rect">
+            <a:avLst/>
+          </a:prstGeom>
+          <a:noFill/>
+        </p:spPr>
+        <p:txBody>
+          <a:bodyPr wrap="square" anchor="t" rtlCol="0"/>
+          <a:lstStyle/>
+          <a:p>
+            <a:pPr algn="l">
+              <a:buNone/>
+            </a:pPr>
+            <a:r>
+              <a:rPr lang="en-US" sz="3600" b="1" dirty="0">
+                <a:solidFill>
+                  <a:srgbClr val="F97316"/>
+                </a:solidFill>
+                <a:latin typeface="Calibri"/>
+              </a:rPr>
+              <a:t>11</a:t>
+            </a:r>
+          </a:p>
+        </p:txBody>
+      </p:sp>
+      <p:sp>
+        <p:nvSpPr>
+          <p:cNvPr id="894" name="t"/>
+          <p:cNvSpPr txBox="1"/>
+          <p:nvPr/>
+        </p:nvSpPr>
+        <p:spPr>
+          <a:xfrm>
+            <a:off x="1188720" y="164592"/>
+            <a:ext cx="10058400" cy="292608"/>
+          </a:xfrm>
+          <a:prstGeom prst="rect">
+            <a:avLst/>
+          </a:prstGeom>
+          <a:noFill/>
+        </p:spPr>
+        <p:txBody>
+          <a:bodyPr wrap="square" anchor="t" rtlCol="0"/>
+          <a:lstStyle/>
+          <a:p>
+            <a:pPr algn="l">
+              <a:buNone/>
+            </a:pPr>
+            <a:r>
+              <a:rPr lang="en-US" sz="1000" b="1" dirty="0">
+                <a:solidFill>
+                  <a:srgbClr val="FBBF24"/>
+                </a:solidFill>
+                <a:latin typeface="Calibri"/>
+              </a:rPr>
+              <a:t>DEEP DIVE  |  HEURISTIC ALLOCATION REFERENCE</a:t>
+            </a:r>
+          </a:p>
+        </p:txBody>
+      </p:sp>
+      <p:sp>
+        <p:nvSpPr>
+          <p:cNvPr id="895" name="t"/>
+          <p:cNvSpPr txBox="1"/>
+          <p:nvPr/>
+        </p:nvSpPr>
+        <p:spPr>
+          <a:xfrm>
+            <a:off x="1188720" y="457200"/>
+            <a:ext cx="10515600" cy="411480"/>
+          </a:xfrm>
+          <a:prstGeom prst="rect">
+            <a:avLst/>
+          </a:prstGeom>
+          <a:noFill/>
+        </p:spPr>
+        <p:txBody>
+          <a:bodyPr wrap="square" anchor="t" rtlCol="0"/>
+          <a:lstStyle/>
+          <a:p>
+            <a:pPr algn="l">
+              <a:buNone/>
+            </a:pPr>
+            <a:r>
+              <a:rPr lang="en-US" sz="1700" b="1" dirty="0">
+                <a:solidFill>
+                  <a:srgbClr val="FFFFFF"/>
+                </a:solidFill>
+                <a:latin typeface="Calibri"/>
+              </a:rPr>
+              <a:t>Zonal Crisis Prioritization &amp; Heuristic Allocation Engine</a:t>
+            </a:r>
+          </a:p>
+        </p:txBody>
+      </p:sp>
+      <p:sp>
+        <p:nvSpPr>
+          <p:cNvPr id="896" name="t"/>
+          <p:cNvSpPr txBox="1"/>
+          <p:nvPr/>
+        </p:nvSpPr>
+        <p:spPr>
+          <a:xfrm>
+            <a:off x="457200" y="960120"/>
+            <a:ext cx="11430000" cy="274320"/>
+          </a:xfrm>
+          <a:prstGeom prst="rect">
+            <a:avLst/>
+          </a:prstGeom>
+          <a:noFill/>
+        </p:spPr>
+        <p:txBody>
+          <a:bodyPr wrap="square" anchor="t" rtlCol="0"/>
+          <a:lstStyle/>
+          <a:p>
+            <a:pPr algn="l">
+              <a:buNone/>
+            </a:pPr>
+            <a:r>
+              <a:rPr lang="en-US" sz="1000" dirty="0">
+                <a:solidFill>
+                  <a:srgbClr val="475569"/>
+                </a:solidFill>
+                <a:latin typeface="Calibri"/>
+              </a:rPr>
+              <a:t>Objective: Allocate LPG fairly during severe shortages by replacing FCFS with a priority-based heuristic system</a:t>
+            </a:r>
+          </a:p>
+        </p:txBody>
+      </p:sp>
+      <p:sp>
+        <p:nvSpPr>
+          <p:cNvPr id="897" name="s"/>
+          <p:cNvSpPr/>
+          <p:nvPr/>
+        </p:nvSpPr>
+        <p:spPr>
+          <a:xfrm>
+            <a:off x="365760" y="1325880"/>
+            <a:ext cx="5760720" cy="1508760"/>
+          </a:xfrm>
+          <a:prstGeom prst="roundRect">
+            <a:avLst>
+              <a:gd name="adj" fmla="val 6000"/>
+            </a:avLst>
+          </a:prstGeom>
+          <a:solidFill>
+            <a:srgbClr val="FFFFFF"/>
+          </a:solidFill>
+          <a:ln>
+            <a:noFill/>
+          </a:ln>
+          <a:effectLst>
+            <a:outerShdw blurRad="50800" dist="38100" dir="2700000" rotWithShape="0">
+              <a:srgbClr val="000000">
+                <a:alpha val="35000"/>
+              </a:srgbClr>
+            </a:outerShdw>
+          </a:effectLst>
+        </p:spPr>
+        <p:txBody>
+          <a:bodyPr wrap="square" anchor="ctr" rtlCol="0" lIns="91440" tIns="91440" rIns="91440" bIns="91440"/>
+          <a:lstStyle/>
+          <a:p/>
+        </p:txBody>
+      </p:sp>
+      <p:sp>
+        <p:nvSpPr>
+          <p:cNvPr id="898" name="r"/>
+          <p:cNvSpPr/>
+          <p:nvPr/>
+        </p:nvSpPr>
+        <p:spPr>
+          <a:xfrm>
+            <a:off x="365760" y="1325880"/>
+            <a:ext cx="5760720" cy="54864"/>
+          </a:xfrm>
+          <a:prstGeom prst="rect">
+            <a:avLst/>
+          </a:prstGeom>
+          <a:solidFill>
+            <a:srgbClr val="EF4444"/>
+          </a:solidFill>
+          <a:ln>
+            <a:noFill/>
+          </a:ln>
+        </p:spPr>
+        <p:txBody>
+          <a:bodyPr/>
+          <a:lstStyle/>
+          <a:p/>
+        </p:txBody>
+      </p:sp>
+      <p:sp>
+        <p:nvSpPr>
+          <p:cNvPr id="899" name="t"/>
+          <p:cNvSpPr txBox="1"/>
+          <p:nvPr/>
+        </p:nvSpPr>
+        <p:spPr>
+          <a:xfrm>
+            <a:off x="548640" y="1417320"/>
+            <a:ext cx="5486400" cy="292608"/>
+          </a:xfrm>
+          <a:prstGeom prst="rect">
+            <a:avLst/>
+          </a:prstGeom>
+          <a:noFill/>
+        </p:spPr>
+        <p:txBody>
+          <a:bodyPr wrap="square" anchor="t" rtlCol="0"/>
+          <a:lstStyle/>
+          <a:p>
+            <a:pPr algn="l">
+              <a:buNone/>
+            </a:pPr>
+            <a:r>
+              <a:rPr lang="en-US" sz="1200" b="1" dirty="0">
+                <a:solidFill>
+                  <a:srgbClr val="EF4444"/>
+                </a:solidFill>
+                <a:latin typeface="Calibri"/>
+              </a:rPr>
+              <a:t>[1]  CRISIS MODE ACTIVATION</a:t>
+            </a:r>
+          </a:p>
+        </p:txBody>
+      </p:sp>
+      <p:sp>
+        <p:nvSpPr>
+          <p:cNvPr id="900" name="c"/>
+          <p:cNvSpPr/>
+          <p:nvPr/>
+        </p:nvSpPr>
+        <p:spPr>
+          <a:xfrm>
+            <a:off x="640080" y="1801368"/>
+            <a:ext cx="91440" cy="91440"/>
+          </a:xfrm>
+          <a:prstGeom prst="ellipse">
+            <a:avLst/>
+          </a:prstGeom>
+          <a:solidFill>
+            <a:srgbClr val="EF4444"/>
+          </a:solidFill>
+          <a:ln>
+            <a:noFill/>
+          </a:ln>
+        </p:spPr>
+        <p:txBody>
+          <a:bodyPr/>
+          <a:lstStyle/>
+          <a:p/>
+        </p:txBody>
+      </p:sp>
+      <p:sp>
+        <p:nvSpPr>
+          <p:cNvPr id="901" name="t"/>
+          <p:cNvSpPr txBox="1"/>
+          <p:nvPr/>
+        </p:nvSpPr>
+        <p:spPr>
+          <a:xfrm>
+            <a:off x="868680" y="1746504"/>
+            <a:ext cx="5120640" cy="256032"/>
+          </a:xfrm>
+          <a:prstGeom prst="rect">
+            <a:avLst/>
+          </a:prstGeom>
+          <a:noFill/>
+        </p:spPr>
+        <p:txBody>
+          <a:bodyPr wrap="square" anchor="t" rtlCol="0"/>
+          <a:lstStyle/>
+          <a:p>
+            <a:pPr algn="l">
+              <a:buNone/>
+            </a:pPr>
+            <a:r>
+              <a:rPr lang="en-US" sz="1000" dirty="0">
+                <a:solidFill>
+                  <a:srgbClr val="475569"/>
+                </a:solidFill>
+                <a:latin typeface="Calibri"/>
+              </a:rPr>
+              <a:t>FCFS allocation is suspended during shortages</a:t>
+            </a:r>
+          </a:p>
+        </p:txBody>
+      </p:sp>
+      <p:sp>
+        <p:nvSpPr>
+          <p:cNvPr id="902" name="c"/>
+          <p:cNvSpPr/>
+          <p:nvPr/>
+        </p:nvSpPr>
+        <p:spPr>
+          <a:xfrm>
+            <a:off x="640080" y="2029968"/>
+            <a:ext cx="91440" cy="91440"/>
+          </a:xfrm>
+          <a:prstGeom prst="ellipse">
+            <a:avLst/>
+          </a:prstGeom>
+          <a:solidFill>
+            <a:srgbClr val="EF4444"/>
+          </a:solidFill>
+          <a:ln>
+            <a:noFill/>
+          </a:ln>
+        </p:spPr>
+        <p:txBody>
+          <a:bodyPr/>
+          <a:lstStyle/>
+          <a:p/>
+        </p:txBody>
+      </p:sp>
+      <p:sp>
+        <p:nvSpPr>
+          <p:cNvPr id="903" name="t"/>
+          <p:cNvSpPr txBox="1"/>
+          <p:nvPr/>
+        </p:nvSpPr>
+        <p:spPr>
+          <a:xfrm>
+            <a:off x="868680" y="1975104"/>
+            <a:ext cx="5120640" cy="256032"/>
+          </a:xfrm>
+          <a:prstGeom prst="rect">
+            <a:avLst/>
+          </a:prstGeom>
+          <a:noFill/>
+        </p:spPr>
+        <p:txBody>
+          <a:bodyPr wrap="square" anchor="t" rtlCol="0"/>
+          <a:lstStyle/>
+          <a:p>
+            <a:pPr algn="l">
+              <a:buNone/>
+            </a:pPr>
+            <a:r>
+              <a:rPr lang="en-US" sz="1000" dirty="0">
+                <a:solidFill>
+                  <a:srgbClr val="475569"/>
+                </a:solidFill>
+                <a:latin typeface="Calibri"/>
+              </a:rPr>
+              <a:t>Incoming orders enter a Zonal Holding Pool</a:t>
+            </a:r>
+          </a:p>
+        </p:txBody>
+      </p:sp>
+      <p:sp>
+        <p:nvSpPr>
+          <p:cNvPr id="904" name="c"/>
+          <p:cNvSpPr/>
+          <p:nvPr/>
+        </p:nvSpPr>
+        <p:spPr>
+          <a:xfrm>
+            <a:off x="640080" y="2258568"/>
+            <a:ext cx="91440" cy="91440"/>
+          </a:xfrm>
+          <a:prstGeom prst="ellipse">
+            <a:avLst/>
+          </a:prstGeom>
+          <a:solidFill>
+            <a:srgbClr val="EF4444"/>
+          </a:solidFill>
+          <a:ln>
+            <a:noFill/>
+          </a:ln>
+        </p:spPr>
+        <p:txBody>
+          <a:bodyPr/>
+          <a:lstStyle/>
+          <a:p/>
+        </p:txBody>
+      </p:sp>
+      <p:sp>
+        <p:nvSpPr>
+          <p:cNvPr id="905" name="t"/>
+          <p:cNvSpPr txBox="1"/>
+          <p:nvPr/>
+        </p:nvSpPr>
+        <p:spPr>
+          <a:xfrm>
+            <a:off x="868680" y="2203704"/>
+            <a:ext cx="5120640" cy="256032"/>
+          </a:xfrm>
+          <a:prstGeom prst="rect">
+            <a:avLst/>
+          </a:prstGeom>
+          <a:noFill/>
+        </p:spPr>
+        <p:txBody>
+          <a:bodyPr wrap="square" anchor="t" rtlCol="0"/>
+          <a:lstStyle/>
+          <a:p>
+            <a:pPr algn="l">
+              <a:buNone/>
+            </a:pPr>
+            <a:r>
+              <a:rPr lang="en-US" sz="1000" dirty="0">
+                <a:solidFill>
+                  <a:srgbClr val="475569"/>
+                </a:solidFill>
+                <a:latin typeface="Calibri"/>
+              </a:rPr>
+              <a:t>Orders periodically ranked by Priority Score (P)</a:t>
+            </a:r>
+          </a:p>
+        </p:txBody>
+      </p:sp>
+      <p:sp>
+        <p:nvSpPr>
+          <p:cNvPr id="906" name="c"/>
+          <p:cNvSpPr/>
+          <p:nvPr/>
+        </p:nvSpPr>
+        <p:spPr>
+          <a:xfrm>
+            <a:off x="640080" y="2487168"/>
+            <a:ext cx="91440" cy="91440"/>
+          </a:xfrm>
+          <a:prstGeom prst="ellipse">
+            <a:avLst/>
+          </a:prstGeom>
+          <a:solidFill>
+            <a:srgbClr val="EF4444"/>
+          </a:solidFill>
+          <a:ln>
+            <a:noFill/>
+          </a:ln>
+        </p:spPr>
+        <p:txBody>
+          <a:bodyPr/>
+          <a:lstStyle/>
+          <a:p/>
+        </p:txBody>
+      </p:sp>
+      <p:sp>
+        <p:nvSpPr>
+          <p:cNvPr id="907" name="t"/>
+          <p:cNvSpPr txBox="1"/>
+          <p:nvPr/>
+        </p:nvSpPr>
+        <p:spPr>
+          <a:xfrm>
+            <a:off x="868680" y="2432304"/>
+            <a:ext cx="5120640" cy="256032"/>
+          </a:xfrm>
+          <a:prstGeom prst="rect">
+            <a:avLst/>
+          </a:prstGeom>
+          <a:noFill/>
+        </p:spPr>
+        <p:txBody>
+          <a:bodyPr wrap="square" anchor="t" rtlCol="0"/>
+          <a:lstStyle/>
+          <a:p>
+            <a:pPr algn="l">
+              <a:buNone/>
+            </a:pPr>
+            <a:r>
+              <a:rPr lang="en-US" sz="1000" dirty="0">
+                <a:solidFill>
+                  <a:srgbClr val="475569"/>
+                </a:solidFill>
+                <a:latin typeface="Calibri"/>
+              </a:rPr>
+              <a:t>Allocation runs in batches via Max-Heap engine</a:t>
+            </a:r>
+          </a:p>
+        </p:txBody>
+      </p:sp>
+      <p:sp>
+        <p:nvSpPr>
+          <p:cNvPr id="908" name="s"/>
+          <p:cNvSpPr/>
+          <p:nvPr/>
+        </p:nvSpPr>
+        <p:spPr>
+          <a:xfrm>
+            <a:off x="6309360" y="1325880"/>
+            <a:ext cx="5486400" cy="1508760"/>
+          </a:xfrm>
+          <a:prstGeom prst="roundRect">
+            <a:avLst>
+              <a:gd name="adj" fmla="val 6000"/>
+            </a:avLst>
+          </a:prstGeom>
+          <a:solidFill>
+            <a:srgbClr val="0B1739"/>
+          </a:solidFill>
+          <a:ln>
+            <a:noFill/>
+          </a:ln>
+          <a:effectLst>
+            <a:outerShdw blurRad="50800" dist="38100" dir="2700000" rotWithShape="0">
+              <a:srgbClr val="000000">
+                <a:alpha val="35000"/>
+              </a:srgbClr>
+            </a:outerShdw>
+          </a:effectLst>
+        </p:spPr>
+        <p:txBody>
+          <a:bodyPr wrap="square" anchor="ctr" rtlCol="0" lIns="91440" tIns="91440" rIns="91440" bIns="91440"/>
+          <a:lstStyle/>
+          <a:p/>
+        </p:txBody>
+      </p:sp>
+      <p:sp>
+        <p:nvSpPr>
+          <p:cNvPr id="909" name="r"/>
+          <p:cNvSpPr/>
+          <p:nvPr/>
+        </p:nvSpPr>
+        <p:spPr>
+          <a:xfrm>
+            <a:off x="6309360" y="1325880"/>
+            <a:ext cx="5486400" cy="54864"/>
+          </a:xfrm>
+          <a:prstGeom prst="rect">
+            <a:avLst/>
+          </a:prstGeom>
+          <a:solidFill>
+            <a:srgbClr val="FBBF24"/>
+          </a:solidFill>
+          <a:ln>
+            <a:noFill/>
+          </a:ln>
+        </p:spPr>
+        <p:txBody>
+          <a:bodyPr/>
+          <a:lstStyle/>
+          <a:p/>
+        </p:txBody>
+      </p:sp>
+      <p:sp>
+        <p:nvSpPr>
+          <p:cNvPr id="910" name="t"/>
+          <p:cNvSpPr txBox="1"/>
+          <p:nvPr/>
+        </p:nvSpPr>
+        <p:spPr>
+          <a:xfrm>
+            <a:off x="6492240" y="1417320"/>
+            <a:ext cx="5029200" cy="292608"/>
+          </a:xfrm>
+          <a:prstGeom prst="rect">
+            <a:avLst/>
+          </a:prstGeom>
+          <a:noFill/>
+        </p:spPr>
+        <p:txBody>
+          <a:bodyPr wrap="square" anchor="t" rtlCol="0"/>
+          <a:lstStyle/>
+          <a:p>
+            <a:pPr algn="l">
+              <a:buNone/>
+            </a:pPr>
+            <a:r>
+              <a:rPr lang="en-US" sz="1200" b="1" dirty="0">
+                <a:solidFill>
+                  <a:srgbClr val="FBBF24"/>
+                </a:solidFill>
+                <a:latin typeface="Calibri"/>
+              </a:rPr>
+              <a:t>[2]  ALLOCATION WORKFLOW</a:t>
+            </a:r>
+          </a:p>
+        </p:txBody>
+      </p:sp>
+      <p:sp>
+        <p:nvSpPr>
+          <p:cNvPr id="911" name="s"/>
+          <p:cNvSpPr/>
+          <p:nvPr/>
+        </p:nvSpPr>
+        <p:spPr>
+          <a:xfrm>
+            <a:off x="6492240" y="1828800"/>
+            <a:ext cx="1078992" cy="457200"/>
+          </a:xfrm>
+          <a:prstGeom prst="roundRect">
+            <a:avLst>
+              <a:gd name="adj" fmla="val 6000"/>
+            </a:avLst>
+          </a:prstGeom>
+          <a:solidFill>
+            <a:srgbClr val="3B82F6"/>
+          </a:solidFill>
+          <a:ln>
+            <a:noFill/>
+          </a:ln>
+        </p:spPr>
+        <p:txBody>
+          <a:bodyPr wrap="square" anchor="ctr" rtlCol="0" lIns="91440" tIns="91440" rIns="91440" bIns="91440"/>
+          <a:lstStyle/>
+          <a:p>
+            <a:pPr algn="ctr">
+              <a:buNone/>
+            </a:pPr>
+            <a:r>
+              <a:rPr lang="en-US" sz="900" b="1" dirty="0">
+                <a:solidFill>
+                  <a:srgbClr val="FFFFFF"/>
+                </a:solidFill>
+                <a:latin typeface="Calibri"/>
+              </a:rPr>
+              <a:t>Order</a:t>
+            </a:r>
+          </a:p>
+        </p:txBody>
+      </p:sp>
+      <p:sp>
+        <p:nvSpPr>
+          <p:cNvPr id="912" name="t"/>
+          <p:cNvSpPr txBox="1"/>
+          <p:nvPr/>
+        </p:nvSpPr>
+        <p:spPr>
+          <a:xfrm>
+            <a:off x="7534656" y="1874520"/>
+            <a:ext cx="182880" cy="365760"/>
+          </a:xfrm>
+          <a:prstGeom prst="rect">
+            <a:avLst/>
+          </a:prstGeom>
+          <a:noFill/>
+        </p:spPr>
+        <p:txBody>
+          <a:bodyPr wrap="square" anchor="t" rtlCol="0"/>
+          <a:lstStyle/>
+          <a:p>
+            <a:pPr algn="ctr">
+              <a:buNone/>
+            </a:pPr>
+            <a:r>
+              <a:rPr lang="en-US" sz="1400" b="1" dirty="0">
+                <a:solidFill>
+                  <a:srgbClr val="FBBF24"/>
+                </a:solidFill>
+                <a:latin typeface="Calibri"/>
+              </a:rPr>
+              <a:t>&gt;</a:t>
+            </a:r>
+          </a:p>
+        </p:txBody>
+      </p:sp>
+      <p:sp>
+        <p:nvSpPr>
+          <p:cNvPr id="913" name="s"/>
+          <p:cNvSpPr/>
+          <p:nvPr/>
+        </p:nvSpPr>
+        <p:spPr>
+          <a:xfrm>
+            <a:off x="7690104" y="1828800"/>
+            <a:ext cx="1078992" cy="457200"/>
+          </a:xfrm>
+          <a:prstGeom prst="roundRect">
+            <a:avLst>
+              <a:gd name="adj" fmla="val 6000"/>
+            </a:avLst>
+          </a:prstGeom>
+          <a:solidFill>
+            <a:srgbClr val="F97316"/>
+          </a:solidFill>
+          <a:ln>
+            <a:noFill/>
+          </a:ln>
+        </p:spPr>
+        <p:txBody>
+          <a:bodyPr wrap="square" anchor="ctr" rtlCol="0" lIns="91440" tIns="91440" rIns="91440" bIns="91440"/>
+          <a:lstStyle/>
+          <a:p>
+            <a:pPr algn="ctr">
+              <a:buNone/>
+            </a:pPr>
+            <a:r>
+              <a:rPr lang="en-US" sz="900" b="1" dirty="0">
+                <a:solidFill>
+                  <a:srgbClr val="FFFFFF"/>
+                </a:solidFill>
+                <a:latin typeface="Calibri"/>
+              </a:rPr>
+              <a:t>Score Calc</a:t>
+            </a:r>
+          </a:p>
+        </p:txBody>
+      </p:sp>
+      <p:sp>
+        <p:nvSpPr>
+          <p:cNvPr id="914" name="t"/>
+          <p:cNvSpPr txBox="1"/>
+          <p:nvPr/>
+        </p:nvSpPr>
+        <p:spPr>
+          <a:xfrm>
+            <a:off x="8732520" y="1874520"/>
+            <a:ext cx="182880" cy="365760"/>
+          </a:xfrm>
+          <a:prstGeom prst="rect">
+            <a:avLst/>
+          </a:prstGeom>
+          <a:noFill/>
+        </p:spPr>
+        <p:txBody>
+          <a:bodyPr wrap="square" anchor="t" rtlCol="0"/>
+          <a:lstStyle/>
+          <a:p>
+            <a:pPr algn="ctr">
+              <a:buNone/>
+            </a:pPr>
+            <a:r>
+              <a:rPr lang="en-US" sz="1400" b="1" dirty="0">
+                <a:solidFill>
+                  <a:srgbClr val="FBBF24"/>
+                </a:solidFill>
+                <a:latin typeface="Calibri"/>
+              </a:rPr>
+              <a:t>&gt;</a:t>
+            </a:r>
+          </a:p>
+        </p:txBody>
+      </p:sp>
+      <p:sp>
+        <p:nvSpPr>
+          <p:cNvPr id="915" name="s"/>
+          <p:cNvSpPr/>
+          <p:nvPr/>
+        </p:nvSpPr>
+        <p:spPr>
+          <a:xfrm>
+            <a:off x="8887968" y="1828800"/>
+            <a:ext cx="1078992" cy="457200"/>
+          </a:xfrm>
+          <a:prstGeom prst="roundRect">
+            <a:avLst>
+              <a:gd name="adj" fmla="val 6000"/>
+            </a:avLst>
+          </a:prstGeom>
+          <a:solidFill>
+            <a:srgbClr val="8B5CF6"/>
+          </a:solidFill>
+          <a:ln>
+            <a:noFill/>
+          </a:ln>
+        </p:spPr>
+        <p:txBody>
+          <a:bodyPr wrap="square" anchor="ctr" rtlCol="0" lIns="91440" tIns="91440" rIns="91440" bIns="91440"/>
+          <a:lstStyle/>
+          <a:p>
+            <a:pPr algn="ctr">
+              <a:buNone/>
+            </a:pPr>
+            <a:r>
+              <a:rPr lang="en-US" sz="900" b="1" dirty="0">
+                <a:solidFill>
+                  <a:srgbClr val="FFFFFF"/>
+                </a:solidFill>
+                <a:latin typeface="Calibri"/>
+              </a:rPr>
+              <a:t>Max-Heap</a:t>
+            </a:r>
+          </a:p>
+        </p:txBody>
+      </p:sp>
+      <p:sp>
+        <p:nvSpPr>
+          <p:cNvPr id="916" name="t"/>
+          <p:cNvSpPr txBox="1"/>
+          <p:nvPr/>
+        </p:nvSpPr>
+        <p:spPr>
+          <a:xfrm>
+            <a:off x="9930384" y="1874520"/>
+            <a:ext cx="182880" cy="365760"/>
+          </a:xfrm>
+          <a:prstGeom prst="rect">
+            <a:avLst/>
+          </a:prstGeom>
+          <a:noFill/>
+        </p:spPr>
+        <p:txBody>
+          <a:bodyPr wrap="square" anchor="t" rtlCol="0"/>
+          <a:lstStyle/>
+          <a:p>
+            <a:pPr algn="ctr">
+              <a:buNone/>
+            </a:pPr>
+            <a:r>
+              <a:rPr lang="en-US" sz="1400" b="1" dirty="0">
+                <a:solidFill>
+                  <a:srgbClr val="FBBF24"/>
+                </a:solidFill>
+                <a:latin typeface="Calibri"/>
+              </a:rPr>
+              <a:t>&gt;</a:t>
+            </a:r>
+          </a:p>
+        </p:txBody>
+      </p:sp>
+      <p:sp>
+        <p:nvSpPr>
+          <p:cNvPr id="917" name="s"/>
+          <p:cNvSpPr/>
+          <p:nvPr/>
+        </p:nvSpPr>
+        <p:spPr>
+          <a:xfrm>
+            <a:off x="10085832" y="1828800"/>
+            <a:ext cx="1078992" cy="457200"/>
+          </a:xfrm>
+          <a:prstGeom prst="roundRect">
+            <a:avLst>
+              <a:gd name="adj" fmla="val 6000"/>
+            </a:avLst>
+          </a:prstGeom>
+          <a:solidFill>
+            <a:srgbClr val="10B981"/>
+          </a:solidFill>
+          <a:ln>
+            <a:noFill/>
+          </a:ln>
+        </p:spPr>
+        <p:txBody>
+          <a:bodyPr wrap="square" anchor="ctr" rtlCol="0" lIns="91440" tIns="91440" rIns="91440" bIns="91440"/>
+          <a:lstStyle/>
+          <a:p>
+            <a:pPr algn="ctr">
+              <a:buNone/>
+            </a:pPr>
+            <a:r>
+              <a:rPr lang="en-US" sz="900" b="1" dirty="0">
+                <a:solidFill>
+                  <a:srgbClr val="FFFFFF"/>
+                </a:solidFill>
+                <a:latin typeface="Calibri"/>
+              </a:rPr>
+              <a:t>Allocate</a:t>
+            </a:r>
+          </a:p>
+        </p:txBody>
+      </p:sp>
+      <p:sp>
+        <p:nvSpPr>
+          <p:cNvPr id="918" name="t"/>
+          <p:cNvSpPr txBox="1"/>
+          <p:nvPr/>
+        </p:nvSpPr>
+        <p:spPr>
+          <a:xfrm>
+            <a:off x="6492240" y="2377440"/>
+            <a:ext cx="5212080" cy="228600"/>
+          </a:xfrm>
+          <a:prstGeom prst="rect">
+            <a:avLst/>
+          </a:prstGeom>
+          <a:noFill/>
+        </p:spPr>
+        <p:txBody>
+          <a:bodyPr wrap="square" anchor="t" rtlCol="0"/>
+          <a:lstStyle/>
+          <a:p>
+            <a:pPr algn="l">
+              <a:buNone/>
+            </a:pPr>
+            <a:r>
+              <a:rPr lang="en-US" sz="900" dirty="0">
+                <a:solidFill>
+                  <a:srgbClr val="C8D2E0"/>
+                </a:solidFill>
+                <a:latin typeface="Calibri"/>
+              </a:rPr>
+              <a:t>Highest Priority Score served first  -  Max-Heap descending order</a:t>
+            </a:r>
+          </a:p>
+        </p:txBody>
+      </p:sp>
+      <p:sp>
+        <p:nvSpPr>
+          <p:cNvPr id="919" name="t"/>
+          <p:cNvSpPr txBox="1"/>
+          <p:nvPr/>
+        </p:nvSpPr>
+        <p:spPr>
+          <a:xfrm>
+            <a:off x="6492240" y="2606040"/>
+            <a:ext cx="5212080" cy="201168"/>
+          </a:xfrm>
+          <a:prstGeom prst="rect">
+            <a:avLst/>
+          </a:prstGeom>
+          <a:noFill/>
+        </p:spPr>
+        <p:txBody>
+          <a:bodyPr wrap="square" anchor="t" rtlCol="0"/>
+          <a:lstStyle/>
+          <a:p>
+            <a:pPr algn="l">
+              <a:buNone/>
+            </a:pPr>
+            <a:r>
+              <a:rPr lang="en-US" sz="800" dirty="0">
+                <a:solidFill>
+                  <a:srgbClr val="94A3B8"/>
+                </a:solidFill>
+                <a:latin typeface="Calibri"/>
+              </a:rPr>
+              <a:t>Periodic batch allocation cycles ensure fairness across the zone</a:t>
+            </a:r>
+          </a:p>
+        </p:txBody>
+      </p:sp>
+      <p:sp>
+        <p:nvSpPr>
+          <p:cNvPr id="920" name="s"/>
+          <p:cNvSpPr/>
+          <p:nvPr/>
+        </p:nvSpPr>
+        <p:spPr>
+          <a:xfrm>
+            <a:off x="365760" y="2926080"/>
+            <a:ext cx="11430000" cy="1005840"/>
+          </a:xfrm>
+          <a:prstGeom prst="roundRect">
+            <a:avLst>
+              <a:gd name="adj" fmla="val 8000"/>
+            </a:avLst>
+          </a:prstGeom>
+          <a:solidFill>
+            <a:srgbClr val="060E26"/>
+          </a:solidFill>
+          <a:ln>
+            <a:noFill/>
+          </a:ln>
+          <a:effectLst>
+            <a:outerShdw blurRad="50800" dist="38100" dir="2700000" rotWithShape="0">
+              <a:srgbClr val="000000">
+                <a:alpha val="35000"/>
+              </a:srgbClr>
+            </a:outerShdw>
+          </a:effectLst>
+        </p:spPr>
+        <p:txBody>
+          <a:bodyPr wrap="square" anchor="ctr" rtlCol="0" lIns="91440" tIns="91440" rIns="91440" bIns="91440"/>
+          <a:lstStyle/>
+          <a:p/>
+        </p:txBody>
+      </p:sp>
+      <p:sp>
+        <p:nvSpPr>
+          <p:cNvPr id="921" name="r"/>
+          <p:cNvSpPr/>
+          <p:nvPr/>
+        </p:nvSpPr>
+        <p:spPr>
+          <a:xfrm>
+            <a:off x="365760" y="2926080"/>
+            <a:ext cx="91440" cy="1005840"/>
+          </a:xfrm>
+          <a:prstGeom prst="rect">
+            <a:avLst/>
+          </a:prstGeom>
+          <a:solidFill>
+            <a:srgbClr val="F97316"/>
+          </a:solidFill>
+          <a:ln>
+            <a:noFill/>
+          </a:ln>
+        </p:spPr>
+        <p:txBody>
+          <a:bodyPr/>
+          <a:lstStyle/>
+          <a:p/>
+        </p:txBody>
+      </p:sp>
+      <p:sp>
+        <p:nvSpPr>
+          <p:cNvPr id="922" name="t"/>
+          <p:cNvSpPr txBox="1"/>
+          <p:nvPr/>
+        </p:nvSpPr>
+        <p:spPr>
+          <a:xfrm>
+            <a:off x="640080" y="2999232"/>
+            <a:ext cx="4572000" cy="274320"/>
+          </a:xfrm>
+          <a:prstGeom prst="rect">
+            <a:avLst/>
+          </a:prstGeom>
+          <a:noFill/>
+        </p:spPr>
+        <p:txBody>
+          <a:bodyPr wrap="square" anchor="t" rtlCol="0"/>
+          <a:lstStyle/>
+          <a:p>
+            <a:pPr algn="l">
+              <a:buNone/>
+            </a:pPr>
+            <a:r>
+              <a:rPr lang="en-US" sz="1100" b="1" dirty="0">
+                <a:solidFill>
+                  <a:srgbClr val="FBBF24"/>
+                </a:solidFill>
+                <a:latin typeface="Calibri"/>
+              </a:rPr>
+              <a:t>[3]  PRIORITY SCORE FORMULA</a:t>
+            </a:r>
+          </a:p>
+        </p:txBody>
+      </p:sp>
+      <p:sp>
+        <p:nvSpPr>
+          <p:cNvPr id="923" name="t"/>
+          <p:cNvSpPr txBox="1"/>
+          <p:nvPr/>
+        </p:nvSpPr>
+        <p:spPr>
+          <a:xfrm>
+            <a:off x="640080" y="3255264"/>
+            <a:ext cx="10515600" cy="457200"/>
+          </a:xfrm>
+          <a:prstGeom prst="rect">
+            <a:avLst/>
+          </a:prstGeom>
+          <a:noFill/>
+        </p:spPr>
+        <p:txBody>
+          <a:bodyPr wrap="square" anchor="t" rtlCol="0"/>
+          <a:lstStyle/>
+          <a:p>
+            <a:pPr algn="l">
+              <a:buNone/>
+            </a:pPr>
+            <a:r>
+              <a:rPr lang="en-US" sz="2000" b="1" dirty="0">
+                <a:solidFill>
+                  <a:srgbClr val="FFFFFF"/>
+                </a:solidFill>
+                <a:latin typeface="Calibri"/>
+              </a:rPr>
+              <a:t>P  =  (1.5 x S_sector)  +  (1.0 x S_urgency)  -  (1.0 x S_hoarding)</a:t>
+            </a:r>
+          </a:p>
+        </p:txBody>
+      </p:sp>
+      <p:sp>
+        <p:nvSpPr>
+          <p:cNvPr id="924" name="t"/>
+          <p:cNvSpPr txBox="1"/>
+          <p:nvPr/>
+        </p:nvSpPr>
+        <p:spPr>
+          <a:xfrm>
+            <a:off x="640080" y="3639312"/>
+            <a:ext cx="10515600" cy="228600"/>
+          </a:xfrm>
+          <a:prstGeom prst="rect">
+            <a:avLst/>
+          </a:prstGeom>
+          <a:noFill/>
+        </p:spPr>
+        <p:txBody>
+          <a:bodyPr wrap="square" anchor="t" rtlCol="0"/>
+          <a:lstStyle/>
+          <a:p>
+            <a:pPr algn="l">
+              <a:buNone/>
+            </a:pPr>
+            <a:r>
+              <a:rPr lang="en-US" sz="700" dirty="0">
+                <a:solidFill>
+                  <a:srgbClr val="94A3B8"/>
+                </a:solidFill>
+                <a:latin typeface="Calibri"/>
+              </a:rPr>
+              <a:t>S_sector: Hospital 100 / Domestic 50 / Hostel 30 / Commercial 10   |   S_urgency: (DaysSinceRefill / AvgCycle) x 100, max 200   |   S_hoarding: -200 if refill &lt;21d (Hospitals exempt)</a:t>
+            </a:r>
+          </a:p>
+        </p:txBody>
+      </p:sp>
+      <p:sp>
+        <p:nvSpPr>
+          <p:cNvPr id="925" name="s"/>
+          <p:cNvSpPr/>
+          <p:nvPr/>
+        </p:nvSpPr>
+        <p:spPr>
+          <a:xfrm>
+            <a:off x="365760" y="4069080"/>
+            <a:ext cx="3703320" cy="1463040"/>
+          </a:xfrm>
+          <a:prstGeom prst="roundRect">
+            <a:avLst>
+              <a:gd name="adj" fmla="val 6000"/>
+            </a:avLst>
+          </a:prstGeom>
+          <a:solidFill>
+            <a:srgbClr val="EF4444"/>
+          </a:solidFill>
+          <a:ln>
+            <a:noFill/>
+          </a:ln>
+          <a:effectLst>
+            <a:outerShdw blurRad="50800" dist="38100" dir="2700000" rotWithShape="0">
+              <a:srgbClr val="000000">
+                <a:alpha val="35000"/>
+              </a:srgbClr>
+            </a:outerShdw>
+          </a:effectLst>
+        </p:spPr>
+        <p:txBody>
+          <a:bodyPr wrap="square" anchor="ctr" rtlCol="0" lIns="91440" tIns="91440" rIns="91440" bIns="91440"/>
+          <a:lstStyle/>
+          <a:p/>
+        </p:txBody>
+      </p:sp>
+      <p:sp>
+        <p:nvSpPr>
+          <p:cNvPr id="926" name="t"/>
+          <p:cNvSpPr txBox="1"/>
+          <p:nvPr/>
+        </p:nvSpPr>
+        <p:spPr>
+          <a:xfrm>
+            <a:off x="548640" y="4160520"/>
+            <a:ext cx="3337560" cy="274320"/>
+          </a:xfrm>
+          <a:prstGeom prst="rect">
+            <a:avLst/>
+          </a:prstGeom>
+          <a:noFill/>
+        </p:spPr>
+        <p:txBody>
+          <a:bodyPr wrap="square" anchor="t" rtlCol="0"/>
+          <a:lstStyle/>
+          <a:p>
+            <a:pPr algn="l">
+              <a:buNone/>
+            </a:pPr>
+            <a:r>
+              <a:rPr lang="en-US" sz="1100" b="1" dirty="0">
+                <a:solidFill>
+                  <a:srgbClr val="FFFFFF"/>
+                </a:solidFill>
+                <a:latin typeface="Calibri"/>
+              </a:rPr>
+              <a:t>[4]  HOSPITAL &amp; EMERGENCY</a:t>
+            </a:r>
+          </a:p>
+        </p:txBody>
+      </p:sp>
+      <p:sp>
+        <p:nvSpPr>
+          <p:cNvPr id="927" name="t"/>
+          <p:cNvSpPr txBox="1"/>
+          <p:nvPr/>
+        </p:nvSpPr>
+        <p:spPr>
+          <a:xfrm>
+            <a:off x="548640" y="4434840"/>
+            <a:ext cx="3337560" cy="256032"/>
+          </a:xfrm>
+          <a:prstGeom prst="rect">
+            <a:avLst/>
+          </a:prstGeom>
+          <a:noFill/>
+        </p:spPr>
+        <p:txBody>
+          <a:bodyPr wrap="square" anchor="t" rtlCol="0"/>
+          <a:lstStyle/>
+          <a:p>
+            <a:pPr algn="l">
+              <a:buNone/>
+            </a:pPr>
+            <a:r>
+              <a:rPr lang="en-US" sz="1100" b="1" dirty="0">
+                <a:solidFill>
+                  <a:srgbClr val="FFFFFF"/>
+                </a:solidFill>
+                <a:latin typeface="Calibri"/>
+              </a:rPr>
+              <a:t>Highest Priority</a:t>
+            </a:r>
+          </a:p>
+        </p:txBody>
+      </p:sp>
+      <p:sp>
+        <p:nvSpPr>
+          <p:cNvPr id="928" name="r"/>
+          <p:cNvSpPr/>
+          <p:nvPr/>
+        </p:nvSpPr>
+        <p:spPr>
+          <a:xfrm>
+            <a:off x="548640" y="4727448"/>
+            <a:ext cx="457200" cy="27432"/>
+          </a:xfrm>
+          <a:prstGeom prst="rect">
+            <a:avLst/>
+          </a:prstGeom>
+          <a:solidFill>
+            <a:srgbClr val="FBBF24"/>
+          </a:solidFill>
+          <a:ln>
+            <a:noFill/>
+          </a:ln>
+        </p:spPr>
+        <p:txBody>
+          <a:bodyPr/>
+          <a:lstStyle/>
+          <a:p/>
+        </p:txBody>
+      </p:sp>
+      <p:sp>
+        <p:nvSpPr>
+          <p:cNvPr id="929" name="t"/>
+          <p:cNvSpPr txBox="1"/>
+          <p:nvPr/>
+        </p:nvSpPr>
+        <p:spPr>
+          <a:xfrm>
+            <a:off x="594360" y="4818888"/>
+            <a:ext cx="3337560" cy="201168"/>
+          </a:xfrm>
+          <a:prstGeom prst="rect">
+            <a:avLst/>
+          </a:prstGeom>
+          <a:noFill/>
+        </p:spPr>
+        <p:txBody>
+          <a:bodyPr wrap="square" anchor="t" rtlCol="0"/>
+          <a:lstStyle/>
+          <a:p>
+            <a:pPr algn="l">
+              <a:buNone/>
+            </a:pPr>
+            <a:r>
+              <a:rPr lang="en-US" sz="900" dirty="0">
+                <a:solidFill>
+                  <a:srgbClr val="FFFFFF"/>
+                </a:solidFill>
+                <a:latin typeface="Calibri"/>
+              </a:rPr>
+              <a:t>-  Dedicated emergency reserve</a:t>
+            </a:r>
+          </a:p>
+        </p:txBody>
+      </p:sp>
+      <p:sp>
+        <p:nvSpPr>
+          <p:cNvPr id="930" name="t"/>
+          <p:cNvSpPr txBox="1"/>
+          <p:nvPr/>
+        </p:nvSpPr>
+        <p:spPr>
+          <a:xfrm>
+            <a:off x="594360" y="5020056"/>
+            <a:ext cx="3337560" cy="201168"/>
+          </a:xfrm>
+          <a:prstGeom prst="rect">
+            <a:avLst/>
+          </a:prstGeom>
+          <a:noFill/>
+        </p:spPr>
+        <p:txBody>
+          <a:bodyPr wrap="square" anchor="t" rtlCol="0"/>
+          <a:lstStyle/>
+          <a:p>
+            <a:pPr algn="l">
+              <a:buNone/>
+            </a:pPr>
+            <a:r>
+              <a:rPr lang="en-US" sz="900" dirty="0">
+                <a:solidFill>
+                  <a:srgbClr val="FFFFFF"/>
+                </a:solidFill>
+                <a:latin typeface="Calibri"/>
+              </a:rPr>
+              <a:t>-  No cooldown restrictions</a:t>
+            </a:r>
+          </a:p>
+        </p:txBody>
+      </p:sp>
+      <p:sp>
+        <p:nvSpPr>
+          <p:cNvPr id="931" name="t"/>
+          <p:cNvSpPr txBox="1"/>
+          <p:nvPr/>
+        </p:nvSpPr>
+        <p:spPr>
+          <a:xfrm>
+            <a:off x="594360" y="5221224"/>
+            <a:ext cx="3337560" cy="201168"/>
+          </a:xfrm>
+          <a:prstGeom prst="rect">
+            <a:avLst/>
+          </a:prstGeom>
+          <a:noFill/>
+        </p:spPr>
+        <p:txBody>
+          <a:bodyPr wrap="square" anchor="t" rtlCol="0"/>
+          <a:lstStyle/>
+          <a:p>
+            <a:pPr algn="l">
+              <a:buNone/>
+            </a:pPr>
+            <a:r>
+              <a:rPr lang="en-US" sz="900" dirty="0">
+                <a:solidFill>
+                  <a:srgbClr val="FFFFFF"/>
+                </a:solidFill>
+                <a:latin typeface="Calibri"/>
+              </a:rPr>
+              <a:t>-  Exempt from hoarding shield</a:t>
+            </a:r>
+          </a:p>
+        </p:txBody>
+      </p:sp>
+      <p:sp>
+        <p:nvSpPr>
+          <p:cNvPr id="932" name="s"/>
+          <p:cNvSpPr/>
+          <p:nvPr/>
+        </p:nvSpPr>
+        <p:spPr>
+          <a:xfrm>
+            <a:off x="4160520" y="4069080"/>
+            <a:ext cx="3703320" cy="1463040"/>
+          </a:xfrm>
+          <a:prstGeom prst="roundRect">
+            <a:avLst>
+              <a:gd name="adj" fmla="val 6000"/>
+            </a:avLst>
+          </a:prstGeom>
+          <a:solidFill>
+            <a:srgbClr val="3B82F6"/>
+          </a:solidFill>
+          <a:ln>
+            <a:noFill/>
+          </a:ln>
+          <a:effectLst>
+            <a:outerShdw blurRad="50800" dist="38100" dir="2700000" rotWithShape="0">
+              <a:srgbClr val="000000">
+                <a:alpha val="35000"/>
+              </a:srgbClr>
+            </a:outerShdw>
+          </a:effectLst>
+        </p:spPr>
+        <p:txBody>
+          <a:bodyPr wrap="square" anchor="ctr" rtlCol="0" lIns="91440" tIns="91440" rIns="91440" bIns="91440"/>
+          <a:lstStyle/>
+          <a:p/>
+        </p:txBody>
+      </p:sp>
+      <p:sp>
+        <p:nvSpPr>
+          <p:cNvPr id="933" name="t"/>
+          <p:cNvSpPr txBox="1"/>
+          <p:nvPr/>
+        </p:nvSpPr>
+        <p:spPr>
+          <a:xfrm>
+            <a:off x="4343400" y="4160520"/>
+            <a:ext cx="3337560" cy="274320"/>
+          </a:xfrm>
+          <a:prstGeom prst="rect">
+            <a:avLst/>
+          </a:prstGeom>
+          <a:noFill/>
+        </p:spPr>
+        <p:txBody>
+          <a:bodyPr wrap="square" anchor="t" rtlCol="0"/>
+          <a:lstStyle/>
+          <a:p>
+            <a:pPr algn="l">
+              <a:buNone/>
+            </a:pPr>
+            <a:r>
+              <a:rPr lang="en-US" sz="1100" b="1" dirty="0">
+                <a:solidFill>
+                  <a:srgbClr val="FFFFFF"/>
+                </a:solidFill>
+                <a:latin typeface="Calibri"/>
+              </a:rPr>
+              <a:t>[4]  DOMESTIC HOUSEHOLD</a:t>
+            </a:r>
+          </a:p>
+        </p:txBody>
+      </p:sp>
+      <p:sp>
+        <p:nvSpPr>
+          <p:cNvPr id="934" name="t"/>
+          <p:cNvSpPr txBox="1"/>
+          <p:nvPr/>
+        </p:nvSpPr>
+        <p:spPr>
+          <a:xfrm>
+            <a:off x="4343400" y="4434840"/>
+            <a:ext cx="3337560" cy="256032"/>
+          </a:xfrm>
+          <a:prstGeom prst="rect">
+            <a:avLst/>
+          </a:prstGeom>
+          <a:noFill/>
+        </p:spPr>
+        <p:txBody>
+          <a:bodyPr wrap="square" anchor="t" rtlCol="0"/>
+          <a:lstStyle/>
+          <a:p>
+            <a:pPr algn="l">
+              <a:buNone/>
+            </a:pPr>
+            <a:r>
+              <a:rPr lang="en-US" sz="1100" b="1" dirty="0">
+                <a:solidFill>
+                  <a:srgbClr val="FFFFFF"/>
+                </a:solidFill>
+                <a:latin typeface="Calibri"/>
+              </a:rPr>
+              <a:t>30-day Cooldown</a:t>
+            </a:r>
+          </a:p>
+        </p:txBody>
+      </p:sp>
+      <p:sp>
+        <p:nvSpPr>
+          <p:cNvPr id="935" name="r"/>
+          <p:cNvSpPr/>
+          <p:nvPr/>
+        </p:nvSpPr>
+        <p:spPr>
+          <a:xfrm>
+            <a:off x="4343400" y="4727448"/>
+            <a:ext cx="457200" cy="27432"/>
+          </a:xfrm>
+          <a:prstGeom prst="rect">
+            <a:avLst/>
+          </a:prstGeom>
+          <a:solidFill>
+            <a:srgbClr val="FBBF24"/>
+          </a:solidFill>
+          <a:ln>
+            <a:noFill/>
+          </a:ln>
+        </p:spPr>
+        <p:txBody>
+          <a:bodyPr/>
+          <a:lstStyle/>
+          <a:p/>
+        </p:txBody>
+      </p:sp>
+      <p:sp>
+        <p:nvSpPr>
+          <p:cNvPr id="936" name="t"/>
+          <p:cNvSpPr txBox="1"/>
+          <p:nvPr/>
+        </p:nvSpPr>
+        <p:spPr>
+          <a:xfrm>
+            <a:off x="4389120" y="4818888"/>
+            <a:ext cx="3337560" cy="201168"/>
+          </a:xfrm>
+          <a:prstGeom prst="rect">
+            <a:avLst/>
+          </a:prstGeom>
+          <a:noFill/>
+        </p:spPr>
+        <p:txBody>
+          <a:bodyPr wrap="square" anchor="t" rtlCol="0"/>
+          <a:lstStyle/>
+          <a:p>
+            <a:pPr algn="l">
+              <a:buNone/>
+            </a:pPr>
+            <a:r>
+              <a:rPr lang="en-US" sz="900" dirty="0">
+                <a:solidFill>
+                  <a:srgbClr val="FFFFFF"/>
+                </a:solidFill>
+                <a:latin typeface="Calibri"/>
+              </a:rPr>
+              <a:t>-  Hard reject within 30 days</a:t>
+            </a:r>
+          </a:p>
+        </p:txBody>
+      </p:sp>
+      <p:sp>
+        <p:nvSpPr>
+          <p:cNvPr id="937" name="t"/>
+          <p:cNvSpPr txBox="1"/>
+          <p:nvPr/>
+        </p:nvSpPr>
+        <p:spPr>
+          <a:xfrm>
+            <a:off x="4389120" y="5020056"/>
+            <a:ext cx="3337560" cy="201168"/>
+          </a:xfrm>
+          <a:prstGeom prst="rect">
+            <a:avLst/>
+          </a:prstGeom>
+          <a:noFill/>
+        </p:spPr>
+        <p:txBody>
+          <a:bodyPr wrap="square" anchor="t" rtlCol="0"/>
+          <a:lstStyle/>
+          <a:p>
+            <a:pPr algn="l">
+              <a:buNone/>
+            </a:pPr>
+            <a:r>
+              <a:rPr lang="en-US" sz="900" dirty="0">
+                <a:solidFill>
+                  <a:srgbClr val="FFFFFF"/>
+                </a:solidFill>
+                <a:latin typeface="Calibri"/>
+              </a:rPr>
+              <a:t>-  Anti-hoarding lock active</a:t>
+            </a:r>
+          </a:p>
+        </p:txBody>
+      </p:sp>
+      <p:sp>
+        <p:nvSpPr>
+          <p:cNvPr id="938" name="t"/>
+          <p:cNvSpPr txBox="1"/>
+          <p:nvPr/>
+        </p:nvSpPr>
+        <p:spPr>
+          <a:xfrm>
+            <a:off x="4389120" y="5221224"/>
+            <a:ext cx="3337560" cy="201168"/>
+          </a:xfrm>
+          <a:prstGeom prst="rect">
+            <a:avLst/>
+          </a:prstGeom>
+          <a:noFill/>
+        </p:spPr>
+        <p:txBody>
+          <a:bodyPr wrap="square" anchor="t" rtlCol="0"/>
+          <a:lstStyle/>
+          <a:p>
+            <a:pPr algn="l">
+              <a:buNone/>
+            </a:pPr>
+            <a:r>
+              <a:rPr lang="en-US" sz="900" dirty="0">
+                <a:solidFill>
+                  <a:srgbClr val="FFFFFF"/>
+                </a:solidFill>
+                <a:latin typeface="Calibri"/>
+              </a:rPr>
+              <a:t>-  Standard priority weight</a:t>
+            </a:r>
+          </a:p>
+        </p:txBody>
+      </p:sp>
+      <p:sp>
+        <p:nvSpPr>
+          <p:cNvPr id="939" name="s"/>
+          <p:cNvSpPr/>
+          <p:nvPr/>
+        </p:nvSpPr>
+        <p:spPr>
+          <a:xfrm>
+            <a:off x="7955280" y="4069080"/>
+            <a:ext cx="3703320" cy="1463040"/>
+          </a:xfrm>
+          <a:prstGeom prst="roundRect">
+            <a:avLst>
+              <a:gd name="adj" fmla="val 6000"/>
+            </a:avLst>
+          </a:prstGeom>
+          <a:solidFill>
+            <a:srgbClr val="F97316"/>
+          </a:solidFill>
+          <a:ln>
+            <a:noFill/>
+          </a:ln>
+          <a:effectLst>
+            <a:outerShdw blurRad="50800" dist="38100" dir="2700000" rotWithShape="0">
+              <a:srgbClr val="000000">
+                <a:alpha val="35000"/>
+              </a:srgbClr>
+            </a:outerShdw>
+          </a:effectLst>
+        </p:spPr>
+        <p:txBody>
+          <a:bodyPr wrap="square" anchor="ctr" rtlCol="0" lIns="91440" tIns="91440" rIns="91440" bIns="91440"/>
+          <a:lstStyle/>
+          <a:p/>
+        </p:txBody>
+      </p:sp>
+      <p:sp>
+        <p:nvSpPr>
+          <p:cNvPr id="940" name="t"/>
+          <p:cNvSpPr txBox="1"/>
+          <p:nvPr/>
+        </p:nvSpPr>
+        <p:spPr>
+          <a:xfrm>
+            <a:off x="8138160" y="4160520"/>
+            <a:ext cx="3337560" cy="274320"/>
+          </a:xfrm>
+          <a:prstGeom prst="rect">
+            <a:avLst/>
+          </a:prstGeom>
+          <a:noFill/>
+        </p:spPr>
+        <p:txBody>
+          <a:bodyPr wrap="square" anchor="t" rtlCol="0"/>
+          <a:lstStyle/>
+          <a:p>
+            <a:pPr algn="l">
+              <a:buNone/>
+            </a:pPr>
+            <a:r>
+              <a:rPr lang="en-US" sz="1100" b="1" dirty="0">
+                <a:solidFill>
+                  <a:srgbClr val="FFFFFF"/>
+                </a:solidFill>
+                <a:latin typeface="Calibri"/>
+              </a:rPr>
+              <a:t>[4]  COMMERCIAL / HOTELS</a:t>
+            </a:r>
+          </a:p>
+        </p:txBody>
+      </p:sp>
+      <p:sp>
+        <p:nvSpPr>
+          <p:cNvPr id="941" name="t"/>
+          <p:cNvSpPr txBox="1"/>
+          <p:nvPr/>
+        </p:nvSpPr>
+        <p:spPr>
+          <a:xfrm>
+            <a:off x="8138160" y="4434840"/>
+            <a:ext cx="3337560" cy="256032"/>
+          </a:xfrm>
+          <a:prstGeom prst="rect">
+            <a:avLst/>
+          </a:prstGeom>
+          <a:noFill/>
+        </p:spPr>
+        <p:txBody>
+          <a:bodyPr wrap="square" anchor="t" rtlCol="0"/>
+          <a:lstStyle/>
+          <a:p>
+            <a:pPr algn="l">
+              <a:buNone/>
+            </a:pPr>
+            <a:r>
+              <a:rPr lang="en-US" sz="1100" b="1" dirty="0">
+                <a:solidFill>
+                  <a:srgbClr val="FFFFFF"/>
+                </a:solidFill>
+                <a:latin typeface="Calibri"/>
+              </a:rPr>
+              <a:t>7-day + 70% Cap</a:t>
+            </a:r>
+          </a:p>
+        </p:txBody>
+      </p:sp>
+      <p:sp>
+        <p:nvSpPr>
+          <p:cNvPr id="942" name="r"/>
+          <p:cNvSpPr/>
+          <p:nvPr/>
+        </p:nvSpPr>
+        <p:spPr>
+          <a:xfrm>
+            <a:off x="8138160" y="4727448"/>
+            <a:ext cx="457200" cy="27432"/>
+          </a:xfrm>
+          <a:prstGeom prst="rect">
+            <a:avLst/>
+          </a:prstGeom>
+          <a:solidFill>
+            <a:srgbClr val="FBBF24"/>
+          </a:solidFill>
+          <a:ln>
+            <a:noFill/>
+          </a:ln>
+        </p:spPr>
+        <p:txBody>
+          <a:bodyPr/>
+          <a:lstStyle/>
+          <a:p/>
+        </p:txBody>
+      </p:sp>
+      <p:sp>
+        <p:nvSpPr>
+          <p:cNvPr id="943" name="t"/>
+          <p:cNvSpPr txBox="1"/>
+          <p:nvPr/>
+        </p:nvSpPr>
+        <p:spPr>
+          <a:xfrm>
+            <a:off x="8183880" y="4818888"/>
+            <a:ext cx="3337560" cy="201168"/>
+          </a:xfrm>
+          <a:prstGeom prst="rect">
+            <a:avLst/>
+          </a:prstGeom>
+          <a:noFill/>
+        </p:spPr>
+        <p:txBody>
+          <a:bodyPr wrap="square" anchor="t" rtlCol="0"/>
+          <a:lstStyle/>
+          <a:p>
+            <a:pPr algn="l">
+              <a:buNone/>
+            </a:pPr>
+            <a:r>
+              <a:rPr lang="en-US" sz="900" dirty="0">
+                <a:solidFill>
+                  <a:srgbClr val="FFFFFF"/>
+                </a:solidFill>
+                <a:latin typeface="Calibri"/>
+              </a:rPr>
+              <a:t>-  7-day booking cooldown</a:t>
+            </a:r>
+          </a:p>
+        </p:txBody>
+      </p:sp>
+      <p:sp>
+        <p:nvSpPr>
+          <p:cNvPr id="944" name="t"/>
+          <p:cNvSpPr txBox="1"/>
+          <p:nvPr/>
+        </p:nvSpPr>
+        <p:spPr>
+          <a:xfrm>
+            <a:off x="8183880" y="5020056"/>
+            <a:ext cx="3337560" cy="201168"/>
+          </a:xfrm>
+          <a:prstGeom prst="rect">
+            <a:avLst/>
+          </a:prstGeom>
+          <a:noFill/>
+        </p:spPr>
+        <p:txBody>
+          <a:bodyPr wrap="square" anchor="t" rtlCol="0"/>
+          <a:lstStyle/>
+          <a:p>
+            <a:pPr algn="l">
+              <a:buNone/>
+            </a:pPr>
+            <a:r>
+              <a:rPr lang="en-US" sz="900" dirty="0">
+                <a:solidFill>
+                  <a:srgbClr val="FFFFFF"/>
+                </a:solidFill>
+                <a:latin typeface="Calibri"/>
+              </a:rPr>
+              <a:t>-  70% quantity reduction cap</a:t>
+            </a:r>
+          </a:p>
+        </p:txBody>
+      </p:sp>
+      <p:sp>
+        <p:nvSpPr>
+          <p:cNvPr id="945" name="t"/>
+          <p:cNvSpPr txBox="1"/>
+          <p:nvPr/>
+        </p:nvSpPr>
+        <p:spPr>
+          <a:xfrm>
+            <a:off x="8183880" y="5221224"/>
+            <a:ext cx="3337560" cy="201168"/>
+          </a:xfrm>
+          <a:prstGeom prst="rect">
+            <a:avLst/>
+          </a:prstGeom>
+          <a:noFill/>
+        </p:spPr>
+        <p:txBody>
+          <a:bodyPr wrap="square" anchor="t" rtlCol="0"/>
+          <a:lstStyle/>
+          <a:p>
+            <a:pPr algn="l">
+              <a:buNone/>
+            </a:pPr>
+            <a:r>
+              <a:rPr lang="en-US" sz="900" dirty="0">
+                <a:solidFill>
+                  <a:srgbClr val="FFFFFF"/>
+                </a:solidFill>
+                <a:latin typeface="Calibri"/>
+              </a:rPr>
+              <a:t>-  Lowest priority weight</a:t>
+            </a:r>
+          </a:p>
+        </p:txBody>
+      </p:sp>
+      <p:sp>
+        <p:nvSpPr>
+          <p:cNvPr id="946" name="s"/>
+          <p:cNvSpPr/>
+          <p:nvPr/>
+        </p:nvSpPr>
+        <p:spPr>
+          <a:xfrm>
+            <a:off x="365760" y="5669280"/>
+            <a:ext cx="11430000" cy="822960"/>
+          </a:xfrm>
+          <a:prstGeom prst="roundRect">
+            <a:avLst>
+              <a:gd name="adj" fmla="val 6000"/>
+            </a:avLst>
+          </a:prstGeom>
+          <a:solidFill>
+            <a:srgbClr val="0B1739"/>
+          </a:solidFill>
+          <a:ln>
+            <a:noFill/>
+          </a:ln>
+        </p:spPr>
+        <p:txBody>
+          <a:bodyPr wrap="square" anchor="ctr" rtlCol="0" lIns="91440" tIns="91440" rIns="91440" bIns="91440"/>
+          <a:lstStyle/>
+          <a:p/>
+        </p:txBody>
+      </p:sp>
+      <p:sp>
+        <p:nvSpPr>
+          <p:cNvPr id="947" name="r"/>
+          <p:cNvSpPr/>
+          <p:nvPr/>
+        </p:nvSpPr>
+        <p:spPr>
+          <a:xfrm>
+            <a:off x="365760" y="5669280"/>
+            <a:ext cx="11430000" cy="45720"/>
+          </a:xfrm>
+          <a:prstGeom prst="rect">
+            <a:avLst/>
+          </a:prstGeom>
+          <a:solidFill>
+            <a:srgbClr val="10B981"/>
+          </a:solidFill>
+          <a:ln>
+            <a:noFill/>
+          </a:ln>
+        </p:spPr>
+        <p:txBody>
+          <a:bodyPr/>
+          <a:lstStyle/>
+          <a:p/>
+        </p:txBody>
+      </p:sp>
+      <p:sp>
+        <p:nvSpPr>
+          <p:cNvPr id="948" name="t"/>
+          <p:cNvSpPr txBox="1"/>
+          <p:nvPr/>
+        </p:nvSpPr>
+        <p:spPr>
+          <a:xfrm>
+            <a:off x="548640" y="5742432"/>
+            <a:ext cx="3657600" cy="274320"/>
+          </a:xfrm>
+          <a:prstGeom prst="rect">
+            <a:avLst/>
+          </a:prstGeom>
+          <a:noFill/>
+        </p:spPr>
+        <p:txBody>
+          <a:bodyPr wrap="square" anchor="t" rtlCol="0"/>
+          <a:lstStyle/>
+          <a:p>
+            <a:pPr algn="l">
+              <a:buNone/>
+            </a:pPr>
+            <a:r>
+              <a:rPr lang="en-US" sz="1100" b="1" dirty="0">
+                <a:solidFill>
+                  <a:srgbClr val="10B981"/>
+                </a:solidFill>
+                <a:latin typeface="Calibri"/>
+              </a:rPr>
+              <a:t>[5]  KEY BENEFITS</a:t>
+            </a:r>
+          </a:p>
+        </p:txBody>
+      </p:sp>
+      <p:sp>
+        <p:nvSpPr>
+          <p:cNvPr id="949" name="c"/>
+          <p:cNvSpPr/>
+          <p:nvPr/>
+        </p:nvSpPr>
+        <p:spPr>
+          <a:xfrm>
+            <a:off x="548640" y="6126480"/>
+            <a:ext cx="146304" cy="146304"/>
+          </a:xfrm>
+          <a:prstGeom prst="ellipse">
+            <a:avLst/>
+          </a:prstGeom>
+          <a:solidFill>
+            <a:srgbClr val="10B981"/>
+          </a:solidFill>
+          <a:ln>
+            <a:noFill/>
+          </a:ln>
+        </p:spPr>
+        <p:txBody>
+          <a:bodyPr/>
+          <a:lstStyle/>
+          <a:p/>
+        </p:txBody>
+      </p:sp>
+      <p:sp>
+        <p:nvSpPr>
+          <p:cNvPr id="950" name="t"/>
+          <p:cNvSpPr txBox="1"/>
+          <p:nvPr/>
+        </p:nvSpPr>
+        <p:spPr>
+          <a:xfrm>
+            <a:off x="548640" y="6053328"/>
+            <a:ext cx="146304" cy="182880"/>
+          </a:xfrm>
+          <a:prstGeom prst="rect">
+            <a:avLst/>
+          </a:prstGeom>
+          <a:noFill/>
+        </p:spPr>
+        <p:txBody>
+          <a:bodyPr wrap="square" anchor="t" rtlCol="0"/>
+          <a:lstStyle/>
+          <a:p>
+            <a:pPr algn="ctr">
+              <a:buNone/>
+            </a:pPr>
+            <a:r>
+              <a:rPr lang="en-US" sz="900" b="1" dirty="0">
+                <a:solidFill>
+                  <a:srgbClr val="FFFFFF"/>
+                </a:solidFill>
+                <a:latin typeface="Calibri"/>
+              </a:rPr>
+              <a:t>v</a:t>
+            </a:r>
+          </a:p>
+        </p:txBody>
+      </p:sp>
+      <p:sp>
+        <p:nvSpPr>
+          <p:cNvPr id="951" name="t"/>
+          <p:cNvSpPr txBox="1"/>
+          <p:nvPr/>
+        </p:nvSpPr>
+        <p:spPr>
+          <a:xfrm>
+            <a:off x="777240" y="6053328"/>
+            <a:ext cx="2011680" cy="274320"/>
+          </a:xfrm>
+          <a:prstGeom prst="rect">
+            <a:avLst/>
+          </a:prstGeom>
+          <a:noFill/>
+        </p:spPr>
+        <p:txBody>
+          <a:bodyPr wrap="square" anchor="t" rtlCol="0"/>
+          <a:lstStyle/>
+          <a:p>
+            <a:pPr algn="l">
+              <a:buNone/>
+            </a:pPr>
+            <a:r>
+              <a:rPr lang="en-US" sz="1000" b="1" dirty="0">
+                <a:solidFill>
+                  <a:srgbClr val="FFFFFF"/>
+                </a:solidFill>
+                <a:latin typeface="Calibri"/>
+              </a:rPr>
+              <a:t>Prevents hoarding</a:t>
+            </a:r>
+          </a:p>
+        </p:txBody>
+      </p:sp>
+      <p:sp>
+        <p:nvSpPr>
+          <p:cNvPr id="952" name="c"/>
+          <p:cNvSpPr/>
+          <p:nvPr/>
+        </p:nvSpPr>
+        <p:spPr>
+          <a:xfrm>
+            <a:off x="2761488" y="6126480"/>
+            <a:ext cx="146304" cy="146304"/>
+          </a:xfrm>
+          <a:prstGeom prst="ellipse">
+            <a:avLst/>
+          </a:prstGeom>
+          <a:solidFill>
+            <a:srgbClr val="10B981"/>
+          </a:solidFill>
+          <a:ln>
+            <a:noFill/>
+          </a:ln>
+        </p:spPr>
+        <p:txBody>
+          <a:bodyPr/>
+          <a:lstStyle/>
+          <a:p/>
+        </p:txBody>
+      </p:sp>
+      <p:sp>
+        <p:nvSpPr>
+          <p:cNvPr id="953" name="t"/>
+          <p:cNvSpPr txBox="1"/>
+          <p:nvPr/>
+        </p:nvSpPr>
+        <p:spPr>
+          <a:xfrm>
+            <a:off x="2761488" y="6053328"/>
+            <a:ext cx="146304" cy="182880"/>
+          </a:xfrm>
+          <a:prstGeom prst="rect">
+            <a:avLst/>
+          </a:prstGeom>
+          <a:noFill/>
+        </p:spPr>
+        <p:txBody>
+          <a:bodyPr wrap="square" anchor="t" rtlCol="0"/>
+          <a:lstStyle/>
+          <a:p>
+            <a:pPr algn="ctr">
+              <a:buNone/>
+            </a:pPr>
+            <a:r>
+              <a:rPr lang="en-US" sz="900" b="1" dirty="0">
+                <a:solidFill>
+                  <a:srgbClr val="FFFFFF"/>
+                </a:solidFill>
+                <a:latin typeface="Calibri"/>
+              </a:rPr>
+              <a:t>v</a:t>
+            </a:r>
+          </a:p>
+        </p:txBody>
+      </p:sp>
+      <p:sp>
+        <p:nvSpPr>
+          <p:cNvPr id="954" name="t"/>
+          <p:cNvSpPr txBox="1"/>
+          <p:nvPr/>
+        </p:nvSpPr>
+        <p:spPr>
+          <a:xfrm>
+            <a:off x="2990088" y="6053328"/>
+            <a:ext cx="2011680" cy="274320"/>
+          </a:xfrm>
+          <a:prstGeom prst="rect">
+            <a:avLst/>
+          </a:prstGeom>
+          <a:noFill/>
+        </p:spPr>
+        <p:txBody>
+          <a:bodyPr wrap="square" anchor="t" rtlCol="0"/>
+          <a:lstStyle/>
+          <a:p>
+            <a:pPr algn="l">
+              <a:buNone/>
+            </a:pPr>
+            <a:r>
+              <a:rPr lang="en-US" sz="1000" b="1" dirty="0">
+                <a:solidFill>
+                  <a:srgbClr val="FFFFFF"/>
+                </a:solidFill>
+                <a:latin typeface="Calibri"/>
+              </a:rPr>
+              <a:t>Fair distribution</a:t>
+            </a:r>
+          </a:p>
+        </p:txBody>
+      </p:sp>
+      <p:sp>
+        <p:nvSpPr>
+          <p:cNvPr id="955" name="c"/>
+          <p:cNvSpPr/>
+          <p:nvPr/>
+        </p:nvSpPr>
+        <p:spPr>
+          <a:xfrm>
+            <a:off x="4974336" y="6126480"/>
+            <a:ext cx="146304" cy="146304"/>
+          </a:xfrm>
+          <a:prstGeom prst="ellipse">
+            <a:avLst/>
+          </a:prstGeom>
+          <a:solidFill>
+            <a:srgbClr val="10B981"/>
+          </a:solidFill>
+          <a:ln>
+            <a:noFill/>
+          </a:ln>
+        </p:spPr>
+        <p:txBody>
+          <a:bodyPr/>
+          <a:lstStyle/>
+          <a:p/>
+        </p:txBody>
+      </p:sp>
+      <p:sp>
+        <p:nvSpPr>
+          <p:cNvPr id="956" name="t"/>
+          <p:cNvSpPr txBox="1"/>
+          <p:nvPr/>
+        </p:nvSpPr>
+        <p:spPr>
+          <a:xfrm>
+            <a:off x="4974336" y="6053328"/>
+            <a:ext cx="146304" cy="182880"/>
+          </a:xfrm>
+          <a:prstGeom prst="rect">
+            <a:avLst/>
+          </a:prstGeom>
+          <a:noFill/>
+        </p:spPr>
+        <p:txBody>
+          <a:bodyPr wrap="square" anchor="t" rtlCol="0"/>
+          <a:lstStyle/>
+          <a:p>
+            <a:pPr algn="ctr">
+              <a:buNone/>
+            </a:pPr>
+            <a:r>
+              <a:rPr lang="en-US" sz="900" b="1" dirty="0">
+                <a:solidFill>
+                  <a:srgbClr val="FFFFFF"/>
+                </a:solidFill>
+                <a:latin typeface="Calibri"/>
+              </a:rPr>
+              <a:t>v</a:t>
+            </a:r>
+          </a:p>
+        </p:txBody>
+      </p:sp>
+      <p:sp>
+        <p:nvSpPr>
+          <p:cNvPr id="957" name="t"/>
+          <p:cNvSpPr txBox="1"/>
+          <p:nvPr/>
+        </p:nvSpPr>
+        <p:spPr>
+          <a:xfrm>
+            <a:off x="5202936" y="6053328"/>
+            <a:ext cx="2011680" cy="274320"/>
+          </a:xfrm>
+          <a:prstGeom prst="rect">
+            <a:avLst/>
+          </a:prstGeom>
+          <a:noFill/>
+        </p:spPr>
+        <p:txBody>
+          <a:bodyPr wrap="square" anchor="t" rtlCol="0"/>
+          <a:lstStyle/>
+          <a:p>
+            <a:pPr algn="l">
+              <a:buNone/>
+            </a:pPr>
+            <a:r>
+              <a:rPr lang="en-US" sz="1000" b="1" dirty="0">
+                <a:solidFill>
+                  <a:srgbClr val="FFFFFF"/>
+                </a:solidFill>
+                <a:latin typeface="Calibri"/>
+              </a:rPr>
+              <a:t>Emergency-first</a:t>
+            </a:r>
+          </a:p>
+        </p:txBody>
+      </p:sp>
+      <p:sp>
+        <p:nvSpPr>
+          <p:cNvPr id="958" name="c"/>
+          <p:cNvSpPr/>
+          <p:nvPr/>
+        </p:nvSpPr>
+        <p:spPr>
+          <a:xfrm>
+            <a:off x="7187184" y="6126480"/>
+            <a:ext cx="146304" cy="146304"/>
+          </a:xfrm>
+          <a:prstGeom prst="ellipse">
+            <a:avLst/>
+          </a:prstGeom>
+          <a:solidFill>
+            <a:srgbClr val="10B981"/>
+          </a:solidFill>
+          <a:ln>
+            <a:noFill/>
+          </a:ln>
+        </p:spPr>
+        <p:txBody>
+          <a:bodyPr/>
+          <a:lstStyle/>
+          <a:p/>
+        </p:txBody>
+      </p:sp>
+      <p:sp>
+        <p:nvSpPr>
+          <p:cNvPr id="959" name="t"/>
+          <p:cNvSpPr txBox="1"/>
+          <p:nvPr/>
+        </p:nvSpPr>
+        <p:spPr>
+          <a:xfrm>
+            <a:off x="7187184" y="6053328"/>
+            <a:ext cx="146304" cy="182880"/>
+          </a:xfrm>
+          <a:prstGeom prst="rect">
+            <a:avLst/>
+          </a:prstGeom>
+          <a:noFill/>
+        </p:spPr>
+        <p:txBody>
+          <a:bodyPr wrap="square" anchor="t" rtlCol="0"/>
+          <a:lstStyle/>
+          <a:p>
+            <a:pPr algn="ctr">
+              <a:buNone/>
+            </a:pPr>
+            <a:r>
+              <a:rPr lang="en-US" sz="900" b="1" dirty="0">
+                <a:solidFill>
+                  <a:srgbClr val="FFFFFF"/>
+                </a:solidFill>
+                <a:latin typeface="Calibri"/>
+              </a:rPr>
+              <a:t>v</a:t>
+            </a:r>
+          </a:p>
+        </p:txBody>
+      </p:sp>
+      <p:sp>
+        <p:nvSpPr>
+          <p:cNvPr id="960" name="t"/>
+          <p:cNvSpPr txBox="1"/>
+          <p:nvPr/>
+        </p:nvSpPr>
+        <p:spPr>
+          <a:xfrm>
+            <a:off x="7415784" y="6053328"/>
+            <a:ext cx="2011680" cy="274320"/>
+          </a:xfrm>
+          <a:prstGeom prst="rect">
+            <a:avLst/>
+          </a:prstGeom>
+          <a:noFill/>
+        </p:spPr>
+        <p:txBody>
+          <a:bodyPr wrap="square" anchor="t" rtlCol="0"/>
+          <a:lstStyle/>
+          <a:p>
+            <a:pPr algn="l">
+              <a:buNone/>
+            </a:pPr>
+            <a:r>
+              <a:rPr lang="en-US" sz="1000" b="1" dirty="0">
+                <a:solidFill>
+                  <a:srgbClr val="FFFFFF"/>
+                </a:solidFill>
+                <a:latin typeface="Calibri"/>
+              </a:rPr>
+              <a:t>Necessity-based</a:t>
+            </a:r>
+          </a:p>
+        </p:txBody>
+      </p:sp>
+      <p:sp>
+        <p:nvSpPr>
+          <p:cNvPr id="961" name="c"/>
+          <p:cNvSpPr/>
+          <p:nvPr/>
+        </p:nvSpPr>
+        <p:spPr>
+          <a:xfrm>
+            <a:off x="9400032" y="6126480"/>
+            <a:ext cx="146304" cy="146304"/>
+          </a:xfrm>
+          <a:prstGeom prst="ellipse">
+            <a:avLst/>
+          </a:prstGeom>
+          <a:solidFill>
+            <a:srgbClr val="10B981"/>
+          </a:solidFill>
+          <a:ln>
+            <a:noFill/>
+          </a:ln>
+        </p:spPr>
+        <p:txBody>
+          <a:bodyPr/>
+          <a:lstStyle/>
+          <a:p/>
+        </p:txBody>
+      </p:sp>
+      <p:sp>
+        <p:nvSpPr>
+          <p:cNvPr id="962" name="t"/>
+          <p:cNvSpPr txBox="1"/>
+          <p:nvPr/>
+        </p:nvSpPr>
+        <p:spPr>
+          <a:xfrm>
+            <a:off x="9400032" y="6053328"/>
+            <a:ext cx="146304" cy="182880"/>
+          </a:xfrm>
+          <a:prstGeom prst="rect">
+            <a:avLst/>
+          </a:prstGeom>
+          <a:noFill/>
+        </p:spPr>
+        <p:txBody>
+          <a:bodyPr wrap="square" anchor="t" rtlCol="0"/>
+          <a:lstStyle/>
+          <a:p>
+            <a:pPr algn="ctr">
+              <a:buNone/>
+            </a:pPr>
+            <a:r>
+              <a:rPr lang="en-US" sz="900" b="1" dirty="0">
+                <a:solidFill>
+                  <a:srgbClr val="FFFFFF"/>
+                </a:solidFill>
+                <a:latin typeface="Calibri"/>
+              </a:rPr>
+              <a:t>v</a:t>
+            </a:r>
+          </a:p>
+        </p:txBody>
+      </p:sp>
+      <p:sp>
+        <p:nvSpPr>
+          <p:cNvPr id="963" name="t"/>
+          <p:cNvSpPr txBox="1"/>
+          <p:nvPr/>
+        </p:nvSpPr>
+        <p:spPr>
+          <a:xfrm>
+            <a:off x="9628632" y="6053328"/>
+            <a:ext cx="2011680" cy="274320"/>
+          </a:xfrm>
+          <a:prstGeom prst="rect">
+            <a:avLst/>
+          </a:prstGeom>
+          <a:noFill/>
+        </p:spPr>
+        <p:txBody>
+          <a:bodyPr wrap="square" anchor="t" rtlCol="0"/>
+          <a:lstStyle/>
+          <a:p>
+            <a:pPr algn="l">
+              <a:buNone/>
+            </a:pPr>
+            <a:r>
+              <a:rPr lang="en-US" sz="1000" b="1" dirty="0">
+                <a:solidFill>
+                  <a:srgbClr val="FFFFFF"/>
+                </a:solidFill>
+                <a:latin typeface="Calibri"/>
+              </a:rPr>
+              <a:t>Better utilization</a:t>
+            </a:r>
+          </a:p>
+        </p:txBody>
+      </p:sp>
+      <p:sp>
+        <p:nvSpPr>
+          <p:cNvPr id="964" name="t"/>
+          <p:cNvSpPr txBox="1"/>
+          <p:nvPr/>
+        </p:nvSpPr>
+        <p:spPr>
+          <a:xfrm>
+            <a:off x="365760" y="6236208"/>
+            <a:ext cx="11430000" cy="201168"/>
+          </a:xfrm>
+          <a:prstGeom prst="rect">
+            <a:avLst/>
+          </a:prstGeom>
+          <a:noFill/>
+        </p:spPr>
+        <p:txBody>
+          <a:bodyPr wrap="square" anchor="t" rtlCol="0"/>
+          <a:lstStyle/>
+          <a:p>
+            <a:pPr algn="l">
+              <a:buNone/>
+            </a:pPr>
+            <a:r>
+              <a:rPr lang="en-US" sz="800" b="1" dirty="0">
+                <a:solidFill>
+                  <a:srgbClr val="FBBF24"/>
+                </a:solidFill>
+                <a:latin typeface="Calibri"/>
+              </a:rPr>
+              <a:t>Outcome: Data-driven heuristic ensuring equitable &amp; efficient LPG distribution during emergencies</a:t>
+            </a:r>
+          </a:p>
+        </p:txBody>
+      </p:sp>
+      <p:sp>
+        <p:nvSpPr>
+          <p:cNvPr id="965" name="t"/>
+          <p:cNvSpPr txBox="1"/>
+          <p:nvPr/>
+        </p:nvSpPr>
+        <p:spPr>
+          <a:xfrm>
+            <a:off x="11521440" y="6629400"/>
+            <a:ext cx="457200" cy="182880"/>
+          </a:xfrm>
+          <a:prstGeom prst="rect">
+            <a:avLst/>
+          </a:prstGeom>
+          <a:noFill/>
+        </p:spPr>
+        <p:txBody>
+          <a:bodyPr wrap="square" anchor="t" rtlCol="0"/>
+          <a:lstStyle/>
+          <a:p>
+            <a:pPr algn="r">
+              <a:buNone/>
+            </a:pPr>
+            <a:r>
+              <a:rPr lang="en-US" sz="1200" b="1" dirty="0">
+                <a:solidFill>
+                  <a:srgbClr val="94A3B8"/>
+                </a:solidFill>
+                <a:latin typeface="Calibri"/>
+              </a:rPr>
+              <a:t>11</a:t>
+            </a:r>
+          </a:p>
+        </p:txBody>
+      </p:sp>
+    </p:spTree>
+  </p:cSld>
+  <p:transition spd="med">
+    <p:zoom/>
   </p:transition>
   <p:clrMapOvr>
     <a:masterClrMapping/>
@@ -16635,7 +19200,7 @@
         <p:spPr>
           <a:xfrm>
             <a:off x="365760" y="1371600"/>
-            <a:ext cx="2194560" cy="2468880"/>
+            <a:ext cx="2194560" cy="1828800"/>
           </a:xfrm>
           <a:prstGeom prst="roundRect">
             <a:avLst>
@@ -16858,7 +19423,7 @@
         </p:nvSpPr>
         <p:spPr>
           <a:xfrm>
-            <a:off x="548640" y="2743200"/>
+            <a:off x="548640" y="2651760"/>
             <a:ext cx="1828800" cy="457200"/>
           </a:xfrm>
           <a:prstGeom prst="rect">
@@ -16893,7 +19458,7 @@
         </p:nvSpPr>
         <p:spPr>
           <a:xfrm>
-            <a:off x="365760" y="3785616"/>
+            <a:off x="365760" y="3145536"/>
             <a:ext cx="2194560" cy="54864"/>
           </a:xfrm>
           <a:prstGeom prst="rect">
@@ -16921,7 +19486,7 @@
         <p:spPr>
           <a:xfrm>
             <a:off x="2679192" y="1371600"/>
-            <a:ext cx="2194560" cy="2468880"/>
+            <a:ext cx="2194560" cy="1828800"/>
           </a:xfrm>
           <a:prstGeom prst="roundRect">
             <a:avLst>
@@ -17144,7 +19709,7 @@
         </p:nvSpPr>
         <p:spPr>
           <a:xfrm>
-            <a:off x="2862072" y="2743200"/>
+            <a:off x="2862072" y="2651760"/>
             <a:ext cx="1828800" cy="457200"/>
           </a:xfrm>
           <a:prstGeom prst="rect">
@@ -17179,7 +19744,7 @@
         </p:nvSpPr>
         <p:spPr>
           <a:xfrm>
-            <a:off x="2679192" y="3785616"/>
+            <a:off x="2679192" y="3145536"/>
             <a:ext cx="2194560" cy="54864"/>
           </a:xfrm>
           <a:prstGeom prst="rect">
@@ -17207,7 +19772,7 @@
         <p:spPr>
           <a:xfrm>
             <a:off x="4992624" y="1371600"/>
-            <a:ext cx="2194560" cy="2468880"/>
+            <a:ext cx="2194560" cy="1828800"/>
           </a:xfrm>
           <a:prstGeom prst="roundRect">
             <a:avLst>
@@ -17430,7 +19995,7 @@
         </p:nvSpPr>
         <p:spPr>
           <a:xfrm>
-            <a:off x="5175504" y="2743200"/>
+            <a:off x="5175504" y="2651760"/>
             <a:ext cx="1828800" cy="457200"/>
           </a:xfrm>
           <a:prstGeom prst="rect">
@@ -17465,7 +20030,7 @@
         </p:nvSpPr>
         <p:spPr>
           <a:xfrm>
-            <a:off x="4992624" y="3785616"/>
+            <a:off x="4992624" y="3145536"/>
             <a:ext cx="2194560" cy="54864"/>
           </a:xfrm>
           <a:prstGeom prst="rect">
@@ -17493,7 +20058,7 @@
         <p:spPr>
           <a:xfrm>
             <a:off x="7306056" y="1371600"/>
-            <a:ext cx="2194560" cy="2468880"/>
+            <a:ext cx="2194560" cy="1828800"/>
           </a:xfrm>
           <a:prstGeom prst="roundRect">
             <a:avLst>
@@ -17716,7 +20281,7 @@
         </p:nvSpPr>
         <p:spPr>
           <a:xfrm>
-            <a:off x="7488936" y="2743200"/>
+            <a:off x="7488936" y="2651760"/>
             <a:ext cx="1828800" cy="457200"/>
           </a:xfrm>
           <a:prstGeom prst="rect">
@@ -17751,7 +20316,7 @@
         </p:nvSpPr>
         <p:spPr>
           <a:xfrm>
-            <a:off x="7306056" y="3785616"/>
+            <a:off x="7306056" y="3145536"/>
             <a:ext cx="2194560" cy="54864"/>
           </a:xfrm>
           <a:prstGeom prst="rect">
@@ -17779,7 +20344,7 @@
         <p:spPr>
           <a:xfrm>
             <a:off x="9619488" y="1371600"/>
-            <a:ext cx="2194560" cy="2468880"/>
+            <a:ext cx="2194560" cy="1828800"/>
           </a:xfrm>
           <a:prstGeom prst="roundRect">
             <a:avLst>
@@ -18002,7 +20567,7 @@
         </p:nvSpPr>
         <p:spPr>
           <a:xfrm>
-            <a:off x="9802368" y="2743200"/>
+            <a:off x="9802368" y="2651760"/>
             <a:ext cx="1828800" cy="457200"/>
           </a:xfrm>
           <a:prstGeom prst="rect">
@@ -18037,7 +20602,7 @@
         </p:nvSpPr>
         <p:spPr>
           <a:xfrm>
-            <a:off x="9619488" y="3785616"/>
+            <a:off x="9619488" y="3145536"/>
             <a:ext cx="2194560" cy="54864"/>
           </a:xfrm>
           <a:prstGeom prst="rect">
@@ -18064,8 +20629,8 @@
         </p:nvSpPr>
         <p:spPr>
           <a:xfrm>
-            <a:off x="365760" y="4114800"/>
-            <a:ext cx="2194560" cy="2468880"/>
+            <a:off x="365760" y="3429000"/>
+            <a:ext cx="2194560" cy="1828800"/>
           </a:xfrm>
           <a:prstGeom prst="roundRect">
             <a:avLst>
@@ -18100,7 +20665,7 @@
         </p:nvSpPr>
         <p:spPr>
           <a:xfrm>
-            <a:off x="365760" y="4114800"/>
+            <a:off x="365760" y="3429000"/>
             <a:ext cx="2194560" cy="1097280"/>
           </a:xfrm>
           <a:prstGeom prst="roundRect">
@@ -18129,7 +20694,7 @@
         </p:nvSpPr>
         <p:spPr>
           <a:xfrm>
-            <a:off x="365760" y="4663440"/>
+            <a:off x="365760" y="3977640"/>
             <a:ext cx="2194560" cy="548640"/>
           </a:xfrm>
           <a:prstGeom prst="rect">
@@ -18156,7 +20721,7 @@
         </p:nvSpPr>
         <p:spPr>
           <a:xfrm>
-            <a:off x="594360" y="4434840"/>
+            <a:off x="594360" y="3749040"/>
             <a:ext cx="502920" cy="502920"/>
           </a:xfrm>
           <a:prstGeom prst="ellipse">
@@ -18183,7 +20748,7 @@
         </p:nvSpPr>
         <p:spPr>
           <a:xfrm>
-            <a:off x="594360" y="4526280"/>
+            <a:off x="594360" y="3840480"/>
             <a:ext cx="502920" cy="365760"/>
           </a:xfrm>
           <a:prstGeom prst="rect">
@@ -18218,7 +20783,7 @@
         </p:nvSpPr>
         <p:spPr>
           <a:xfrm>
-            <a:off x="1234440" y="4389120"/>
+            <a:off x="1234440" y="3703320"/>
             <a:ext cx="1371600" cy="365760"/>
           </a:xfrm>
           <a:prstGeom prst="rect">
@@ -18253,7 +20818,7 @@
         </p:nvSpPr>
         <p:spPr>
           <a:xfrm>
-            <a:off x="1234440" y="4709160"/>
+            <a:off x="1234440" y="4023360"/>
             <a:ext cx="1371600" cy="365760"/>
           </a:xfrm>
           <a:prstGeom prst="rect">
@@ -18288,7 +20853,7 @@
         </p:nvSpPr>
         <p:spPr>
           <a:xfrm>
-            <a:off x="548640" y="5486400"/>
+            <a:off x="548640" y="4709160"/>
             <a:ext cx="1828800" cy="457200"/>
           </a:xfrm>
           <a:prstGeom prst="rect">
@@ -18323,7 +20888,7 @@
         </p:nvSpPr>
         <p:spPr>
           <a:xfrm>
-            <a:off x="365760" y="6528816"/>
+            <a:off x="365760" y="5202936"/>
             <a:ext cx="2194560" cy="54864"/>
           </a:xfrm>
           <a:prstGeom prst="rect">
@@ -18350,8 +20915,8 @@
         </p:nvSpPr>
         <p:spPr>
           <a:xfrm>
-            <a:off x="2679192" y="4114800"/>
-            <a:ext cx="2194560" cy="2468880"/>
+            <a:off x="2679192" y="3429000"/>
+            <a:ext cx="2194560" cy="1828800"/>
           </a:xfrm>
           <a:prstGeom prst="roundRect">
             <a:avLst>
@@ -18386,7 +20951,7 @@
         </p:nvSpPr>
         <p:spPr>
           <a:xfrm>
-            <a:off x="2679192" y="4114800"/>
+            <a:off x="2679192" y="3429000"/>
             <a:ext cx="2194560" cy="1097280"/>
           </a:xfrm>
           <a:prstGeom prst="roundRect">
@@ -18415,7 +20980,7 @@
         </p:nvSpPr>
         <p:spPr>
           <a:xfrm>
-            <a:off x="2679192" y="4663440"/>
+            <a:off x="2679192" y="3977640"/>
             <a:ext cx="2194560" cy="548640"/>
           </a:xfrm>
           <a:prstGeom prst="rect">
@@ -18442,7 +21007,7 @@
         </p:nvSpPr>
         <p:spPr>
           <a:xfrm>
-            <a:off x="2907792" y="4434840"/>
+            <a:off x="2907792" y="3749040"/>
             <a:ext cx="502920" cy="502920"/>
           </a:xfrm>
           <a:prstGeom prst="ellipse">
@@ -18469,7 +21034,7 @@
         </p:nvSpPr>
         <p:spPr>
           <a:xfrm>
-            <a:off x="2907792" y="4526280"/>
+            <a:off x="2907792" y="3840480"/>
             <a:ext cx="502920" cy="365760"/>
           </a:xfrm>
           <a:prstGeom prst="rect">
@@ -18504,7 +21069,7 @@
         </p:nvSpPr>
         <p:spPr>
           <a:xfrm>
-            <a:off x="3547872" y="4389120"/>
+            <a:off x="3547872" y="3703320"/>
             <a:ext cx="1371600" cy="365760"/>
           </a:xfrm>
           <a:prstGeom prst="rect">
@@ -18539,7 +21104,7 @@
         </p:nvSpPr>
         <p:spPr>
           <a:xfrm>
-            <a:off x="3547872" y="4709160"/>
+            <a:off x="3547872" y="4023360"/>
             <a:ext cx="1371600" cy="365760"/>
           </a:xfrm>
           <a:prstGeom prst="rect">
@@ -18574,7 +21139,7 @@
         </p:nvSpPr>
         <p:spPr>
           <a:xfrm>
-            <a:off x="2862072" y="5486400"/>
+            <a:off x="2862072" y="4709160"/>
             <a:ext cx="1828800" cy="457200"/>
           </a:xfrm>
           <a:prstGeom prst="rect">
@@ -18609,7 +21174,7 @@
         </p:nvSpPr>
         <p:spPr>
           <a:xfrm>
-            <a:off x="2679192" y="6528816"/>
+            <a:off x="2679192" y="5202936"/>
             <a:ext cx="2194560" cy="54864"/>
           </a:xfrm>
           <a:prstGeom prst="rect">
@@ -18636,8 +21201,8 @@
         </p:nvSpPr>
         <p:spPr>
           <a:xfrm>
-            <a:off x="4992624" y="4114800"/>
-            <a:ext cx="2194560" cy="2468880"/>
+            <a:off x="4992624" y="3429000"/>
+            <a:ext cx="2194560" cy="1828800"/>
           </a:xfrm>
           <a:prstGeom prst="roundRect">
             <a:avLst>
@@ -18672,7 +21237,7 @@
         </p:nvSpPr>
         <p:spPr>
           <a:xfrm>
-            <a:off x="4992624" y="4114800"/>
+            <a:off x="4992624" y="3429000"/>
             <a:ext cx="2194560" cy="1097280"/>
           </a:xfrm>
           <a:prstGeom prst="roundRect">
@@ -18701,7 +21266,7 @@
         </p:nvSpPr>
         <p:spPr>
           <a:xfrm>
-            <a:off x="4992624" y="4663440"/>
+            <a:off x="4992624" y="3977640"/>
             <a:ext cx="2194560" cy="548640"/>
           </a:xfrm>
           <a:prstGeom prst="rect">
@@ -18728,7 +21293,7 @@
         </p:nvSpPr>
         <p:spPr>
           <a:xfrm>
-            <a:off x="5221224" y="4434840"/>
+            <a:off x="5221224" y="3749040"/>
             <a:ext cx="502920" cy="502920"/>
           </a:xfrm>
           <a:prstGeom prst="ellipse">
@@ -18755,7 +21320,7 @@
         </p:nvSpPr>
         <p:spPr>
           <a:xfrm>
-            <a:off x="5221224" y="4526280"/>
+            <a:off x="5221224" y="3840480"/>
             <a:ext cx="502920" cy="365760"/>
           </a:xfrm>
           <a:prstGeom prst="rect">
@@ -18790,7 +21355,7 @@
         </p:nvSpPr>
         <p:spPr>
           <a:xfrm>
-            <a:off x="5861304" y="4389120"/>
+            <a:off x="5861304" y="3703320"/>
             <a:ext cx="1371600" cy="365760"/>
           </a:xfrm>
           <a:prstGeom prst="rect">
@@ -18825,7 +21390,7 @@
         </p:nvSpPr>
         <p:spPr>
           <a:xfrm>
-            <a:off x="5861304" y="4709160"/>
+            <a:off x="5861304" y="4023360"/>
             <a:ext cx="1371600" cy="365760"/>
           </a:xfrm>
           <a:prstGeom prst="rect">
@@ -18860,7 +21425,7 @@
         </p:nvSpPr>
         <p:spPr>
           <a:xfrm>
-            <a:off x="5175504" y="5486400"/>
+            <a:off x="5175504" y="4709160"/>
             <a:ext cx="1828800" cy="457200"/>
           </a:xfrm>
           <a:prstGeom prst="rect">
@@ -18895,7 +21460,7 @@
         </p:nvSpPr>
         <p:spPr>
           <a:xfrm>
-            <a:off x="4992624" y="6528816"/>
+            <a:off x="4992624" y="5202936"/>
             <a:ext cx="2194560" cy="54864"/>
           </a:xfrm>
           <a:prstGeom prst="rect">
@@ -18922,8 +21487,8 @@
         </p:nvSpPr>
         <p:spPr>
           <a:xfrm>
-            <a:off x="7306056" y="4114800"/>
-            <a:ext cx="2194560" cy="2468880"/>
+            <a:off x="7306056" y="3429000"/>
+            <a:ext cx="2194560" cy="1828800"/>
           </a:xfrm>
           <a:prstGeom prst="roundRect">
             <a:avLst>
@@ -18958,7 +21523,7 @@
         </p:nvSpPr>
         <p:spPr>
           <a:xfrm>
-            <a:off x="7306056" y="4114800"/>
+            <a:off x="7306056" y="3429000"/>
             <a:ext cx="2194560" cy="1097280"/>
           </a:xfrm>
           <a:prstGeom prst="roundRect">
@@ -18987,7 +21552,7 @@
         </p:nvSpPr>
         <p:spPr>
           <a:xfrm>
-            <a:off x="7306056" y="4663440"/>
+            <a:off x="7306056" y="3977640"/>
             <a:ext cx="2194560" cy="548640"/>
           </a:xfrm>
           <a:prstGeom prst="rect">
@@ -19014,7 +21579,7 @@
         </p:nvSpPr>
         <p:spPr>
           <a:xfrm>
-            <a:off x="7534656" y="4434840"/>
+            <a:off x="7534656" y="3749040"/>
             <a:ext cx="502920" cy="502920"/>
           </a:xfrm>
           <a:prstGeom prst="ellipse">
@@ -19041,7 +21606,7 @@
         </p:nvSpPr>
         <p:spPr>
           <a:xfrm>
-            <a:off x="7534656" y="4526280"/>
+            <a:off x="7534656" y="3840480"/>
             <a:ext cx="502920" cy="365760"/>
           </a:xfrm>
           <a:prstGeom prst="rect">
@@ -19076,7 +21641,7 @@
         </p:nvSpPr>
         <p:spPr>
           <a:xfrm>
-            <a:off x="8174736" y="4389120"/>
+            <a:off x="8174736" y="3703320"/>
             <a:ext cx="1371600" cy="365760"/>
           </a:xfrm>
           <a:prstGeom prst="rect">
@@ -19111,7 +21676,7 @@
         </p:nvSpPr>
         <p:spPr>
           <a:xfrm>
-            <a:off x="8174736" y="4709160"/>
+            <a:off x="8174736" y="4023360"/>
             <a:ext cx="1371600" cy="365760"/>
           </a:xfrm>
           <a:prstGeom prst="rect">
@@ -19146,7 +21711,7 @@
         </p:nvSpPr>
         <p:spPr>
           <a:xfrm>
-            <a:off x="7488936" y="5486400"/>
+            <a:off x="7488936" y="4709160"/>
             <a:ext cx="1828800" cy="457200"/>
           </a:xfrm>
           <a:prstGeom prst="rect">
@@ -19181,7 +21746,7 @@
         </p:nvSpPr>
         <p:spPr>
           <a:xfrm>
-            <a:off x="7306056" y="6528816"/>
+            <a:off x="7306056" y="5202936"/>
             <a:ext cx="2194560" cy="54864"/>
           </a:xfrm>
           <a:prstGeom prst="rect">
@@ -19208,8 +21773,8 @@
         </p:nvSpPr>
         <p:spPr>
           <a:xfrm>
-            <a:off x="9619488" y="4114800"/>
-            <a:ext cx="2194560" cy="2468880"/>
+            <a:off x="9619488" y="3429000"/>
+            <a:ext cx="2194560" cy="1828800"/>
           </a:xfrm>
           <a:prstGeom prst="roundRect">
             <a:avLst>
@@ -19244,7 +21809,7 @@
         </p:nvSpPr>
         <p:spPr>
           <a:xfrm>
-            <a:off x="9619488" y="4114800"/>
+            <a:off x="9619488" y="3429000"/>
             <a:ext cx="2194560" cy="1097280"/>
           </a:xfrm>
           <a:prstGeom prst="roundRect">
@@ -19273,7 +21838,7 @@
         </p:nvSpPr>
         <p:spPr>
           <a:xfrm>
-            <a:off x="9619488" y="4663440"/>
+            <a:off x="9619488" y="3977640"/>
             <a:ext cx="2194560" cy="548640"/>
           </a:xfrm>
           <a:prstGeom prst="rect">
@@ -19300,7 +21865,7 @@
         </p:nvSpPr>
         <p:spPr>
           <a:xfrm>
-            <a:off x="9848088" y="4434840"/>
+            <a:off x="9848088" y="3749040"/>
             <a:ext cx="502920" cy="502920"/>
           </a:xfrm>
           <a:prstGeom prst="ellipse">
@@ -19327,7 +21892,7 @@
         </p:nvSpPr>
         <p:spPr>
           <a:xfrm>
-            <a:off x="9848088" y="4526280"/>
+            <a:off x="9848088" y="3840480"/>
             <a:ext cx="502920" cy="365760"/>
           </a:xfrm>
           <a:prstGeom prst="rect">
@@ -19362,7 +21927,7 @@
         </p:nvSpPr>
         <p:spPr>
           <a:xfrm>
-            <a:off x="10488168" y="4389120"/>
+            <a:off x="10488168" y="3703320"/>
             <a:ext cx="1371600" cy="365760"/>
           </a:xfrm>
           <a:prstGeom prst="rect">
@@ -19397,7 +21962,7 @@
         </p:nvSpPr>
         <p:spPr>
           <a:xfrm>
-            <a:off x="10488168" y="4709160"/>
+            <a:off x="10488168" y="4023360"/>
             <a:ext cx="1371600" cy="365760"/>
           </a:xfrm>
           <a:prstGeom prst="rect">
@@ -19432,7 +21997,7 @@
         </p:nvSpPr>
         <p:spPr>
           <a:xfrm>
-            <a:off x="9802368" y="5486400"/>
+            <a:off x="9802368" y="4709160"/>
             <a:ext cx="1828800" cy="457200"/>
           </a:xfrm>
           <a:prstGeom prst="rect">
@@ -19467,7 +22032,7 @@
         </p:nvSpPr>
         <p:spPr>
           <a:xfrm>
-            <a:off x="9619488" y="6528816"/>
+            <a:off x="9619488" y="5202936"/>
             <a:ext cx="2194560" cy="54864"/>
           </a:xfrm>
           <a:prstGeom prst="rect">
@@ -19488,7 +22053,482 @@
       </p:sp>
       <p:sp>
         <p:nvSpPr>
-          <p:cNvPr id="619" name="t"/>
+          <p:cNvPr id="619" name="s"/>
+          <p:cNvSpPr/>
+          <p:nvPr/>
+        </p:nvSpPr>
+        <p:spPr>
+          <a:xfrm>
+            <a:off x="365760" y="5577840"/>
+            <a:ext cx="11430000" cy="1143000"/>
+          </a:xfrm>
+          <a:prstGeom prst="roundRect">
+            <a:avLst>
+              <a:gd name="adj" fmla="val 8000"/>
+            </a:avLst>
+          </a:prstGeom>
+          <a:solidFill>
+            <a:srgbClr val="0B1739"/>
+          </a:solidFill>
+          <a:ln>
+            <a:noFill/>
+          </a:ln>
+          <a:effectLst>
+            <a:outerShdw blurRad="50800" dist="38100" dir="2700000" rotWithShape="0">
+              <a:srgbClr val="000000">
+                <a:alpha val="35000"/>
+              </a:srgbClr>
+            </a:outerShdw>
+          </a:effectLst>
+        </p:spPr>
+        <p:txBody>
+          <a:bodyPr wrap="square" anchor="ctr" rtlCol="0" lIns="91440" tIns="91440" rIns="91440" bIns="91440"/>
+          <a:lstStyle/>
+          <a:p/>
+        </p:txBody>
+      </p:sp>
+      <p:sp>
+        <p:nvSpPr>
+          <p:cNvPr id="620" name="r"/>
+          <p:cNvSpPr/>
+          <p:nvPr/>
+        </p:nvSpPr>
+        <p:spPr>
+          <a:xfrm>
+            <a:off x="365760" y="5577840"/>
+            <a:ext cx="11430000" cy="73152"/>
+          </a:xfrm>
+          <a:prstGeom prst="rect">
+            <a:avLst/>
+          </a:prstGeom>
+          <a:solidFill>
+            <a:srgbClr val="F97316"/>
+          </a:solidFill>
+          <a:ln>
+            <a:noFill/>
+          </a:ln>
+        </p:spPr>
+        <p:txBody>
+          <a:bodyPr/>
+          <a:lstStyle/>
+          <a:p/>
+        </p:txBody>
+      </p:sp>
+      <p:sp>
+        <p:nvSpPr>
+          <p:cNvPr id="621" name="c"/>
+          <p:cNvSpPr/>
+          <p:nvPr/>
+        </p:nvSpPr>
+        <p:spPr>
+          <a:xfrm>
+            <a:off x="548640" y="5852160"/>
+            <a:ext cx="548640" cy="548640"/>
+          </a:xfrm>
+          <a:prstGeom prst="ellipse">
+            <a:avLst/>
+          </a:prstGeom>
+          <a:solidFill>
+            <a:srgbClr val="F97316"/>
+          </a:solidFill>
+          <a:ln>
+            <a:noFill/>
+          </a:ln>
+        </p:spPr>
+        <p:txBody>
+          <a:bodyPr/>
+          <a:lstStyle/>
+          <a:p/>
+        </p:txBody>
+      </p:sp>
+      <p:sp>
+        <p:nvSpPr>
+          <p:cNvPr id="622" name="t"/>
+          <p:cNvSpPr txBox="1"/>
+          <p:nvPr/>
+        </p:nvSpPr>
+        <p:spPr>
+          <a:xfrm>
+            <a:off x="548640" y="5943600"/>
+            <a:ext cx="548640" cy="411480"/>
+          </a:xfrm>
+          <a:prstGeom prst="rect">
+            <a:avLst/>
+          </a:prstGeom>
+          <a:noFill/>
+        </p:spPr>
+        <p:txBody>
+          <a:bodyPr wrap="square" anchor="t" rtlCol="0"/>
+          <a:lstStyle/>
+          <a:p>
+            <a:pPr algn="ctr">
+              <a:buNone/>
+            </a:pPr>
+            <a:r>
+              <a:rPr lang="en-US" sz="1800" b="1" dirty="0">
+                <a:solidFill>
+                  <a:srgbClr val="FFFFFF"/>
+                </a:solidFill>
+                <a:latin typeface="Calibri"/>
+              </a:rPr>
+              <a:t>11</a:t>
+            </a:r>
+          </a:p>
+        </p:txBody>
+      </p:sp>
+      <p:sp>
+        <p:nvSpPr>
+          <p:cNvPr id="623" name="t"/>
+          <p:cNvSpPr txBox="1"/>
+          <p:nvPr/>
+        </p:nvSpPr>
+        <p:spPr>
+          <a:xfrm>
+            <a:off x="1280160" y="5742432"/>
+            <a:ext cx="4572000" cy="365760"/>
+          </a:xfrm>
+          <a:prstGeom prst="rect">
+            <a:avLst/>
+          </a:prstGeom>
+          <a:noFill/>
+        </p:spPr>
+        <p:txBody>
+          <a:bodyPr wrap="square" anchor="t" rtlCol="0"/>
+          <a:lstStyle/>
+          <a:p>
+            <a:pPr algn="l">
+              <a:buNone/>
+            </a:pPr>
+            <a:r>
+              <a:rPr lang="en-US" sz="1600" b="1" dirty="0">
+                <a:solidFill>
+                  <a:srgbClr val="FBBF24"/>
+                </a:solidFill>
+                <a:latin typeface="Calibri"/>
+              </a:rPr>
+              <a:t>DELIVERY MANAGEMENT</a:t>
+            </a:r>
+          </a:p>
+        </p:txBody>
+      </p:sp>
+      <p:sp>
+        <p:nvSpPr>
+          <p:cNvPr id="624" name="t"/>
+          <p:cNvSpPr txBox="1"/>
+          <p:nvPr/>
+        </p:nvSpPr>
+        <p:spPr>
+          <a:xfrm>
+            <a:off x="1280160" y="6080760"/>
+            <a:ext cx="5486400" cy="274320"/>
+          </a:xfrm>
+          <a:prstGeom prst="rect">
+            <a:avLst/>
+          </a:prstGeom>
+          <a:noFill/>
+        </p:spPr>
+        <p:txBody>
+          <a:bodyPr wrap="square" anchor="t" rtlCol="0"/>
+          <a:lstStyle/>
+          <a:p>
+            <a:pPr algn="l">
+              <a:buNone/>
+            </a:pPr>
+            <a:r>
+              <a:rPr lang="en-US" sz="900" dirty="0">
+                <a:solidFill>
+                  <a:srgbClr val="C8D2E0"/>
+                </a:solidFill>
+                <a:latin typeface="Calibri"/>
+              </a:rPr>
+              <a:t>End-to-end delivery lifecycle: assignment, tracking, verification &amp; proof</a:t>
+            </a:r>
+          </a:p>
+        </p:txBody>
+      </p:sp>
+      <p:sp>
+        <p:nvSpPr>
+          <p:cNvPr id="625" name="t"/>
+          <p:cNvSpPr txBox="1"/>
+          <p:nvPr/>
+        </p:nvSpPr>
+        <p:spPr>
+          <a:xfrm>
+            <a:off x="1280160" y="6355080"/>
+            <a:ext cx="5486400" cy="274320"/>
+          </a:xfrm>
+          <a:prstGeom prst="rect">
+            <a:avLst/>
+          </a:prstGeom>
+          <a:noFill/>
+        </p:spPr>
+        <p:txBody>
+          <a:bodyPr wrap="square" anchor="t" rtlCol="0"/>
+          <a:lstStyle/>
+          <a:p>
+            <a:pPr algn="l">
+              <a:buNone/>
+            </a:pPr>
+            <a:r>
+              <a:rPr lang="en-US" sz="800" dirty="0">
+                <a:solidFill>
+                  <a:srgbClr val="94A3B8"/>
+                </a:solidFill>
+                <a:latin typeface="Calibri"/>
+              </a:rPr>
+              <a:t>Real-time GPS via Socket.IO  |  /delivery/:orderId/route API  |  OTP verify @ delivery</a:t>
+            </a:r>
+          </a:p>
+        </p:txBody>
+      </p:sp>
+      <p:sp>
+        <p:nvSpPr>
+          <p:cNvPr id="626" name="s"/>
+          <p:cNvSpPr/>
+          <p:nvPr/>
+        </p:nvSpPr>
+        <p:spPr>
+          <a:xfrm>
+            <a:off x="6949440" y="5961888"/>
+            <a:ext cx="868680" cy="292608"/>
+          </a:xfrm>
+          <a:prstGeom prst="roundRect">
+            <a:avLst>
+              <a:gd name="adj" fmla="val 20000"/>
+            </a:avLst>
+          </a:prstGeom>
+          <a:solidFill>
+            <a:srgbClr val="3B82F6"/>
+          </a:solidFill>
+          <a:ln>
+            <a:noFill/>
+          </a:ln>
+        </p:spPr>
+        <p:txBody>
+          <a:bodyPr wrap="square" anchor="ctr" rtlCol="0" lIns="91440" tIns="91440" rIns="91440" bIns="91440"/>
+          <a:lstStyle/>
+          <a:p>
+            <a:pPr algn="ctr">
+              <a:buNone/>
+            </a:pPr>
+            <a:r>
+              <a:rPr lang="en-US" sz="800" b="1" dirty="0">
+                <a:solidFill>
+                  <a:srgbClr val="FFFFFF"/>
+                </a:solidFill>
+                <a:latin typeface="Calibri"/>
+              </a:rPr>
+              <a:t>Agent Assign</a:t>
+            </a:r>
+          </a:p>
+        </p:txBody>
+      </p:sp>
+      <p:sp>
+        <p:nvSpPr>
+          <p:cNvPr id="627" name="s"/>
+          <p:cNvSpPr/>
+          <p:nvPr/>
+        </p:nvSpPr>
+        <p:spPr>
+          <a:xfrm>
+            <a:off x="7863840" y="5961888"/>
+            <a:ext cx="868680" cy="292608"/>
+          </a:xfrm>
+          <a:prstGeom prst="roundRect">
+            <a:avLst>
+              <a:gd name="adj" fmla="val 20000"/>
+            </a:avLst>
+          </a:prstGeom>
+          <a:solidFill>
+            <a:srgbClr val="10B981"/>
+          </a:solidFill>
+          <a:ln>
+            <a:noFill/>
+          </a:ln>
+        </p:spPr>
+        <p:txBody>
+          <a:bodyPr wrap="square" anchor="ctr" rtlCol="0" lIns="91440" tIns="91440" rIns="91440" bIns="91440"/>
+          <a:lstStyle/>
+          <a:p>
+            <a:pPr algn="ctr">
+              <a:buNone/>
+            </a:pPr>
+            <a:r>
+              <a:rPr lang="en-US" sz="800" b="1" dirty="0">
+                <a:solidFill>
+                  <a:srgbClr val="FFFFFF"/>
+                </a:solidFill>
+                <a:latin typeface="Calibri"/>
+              </a:rPr>
+              <a:t>Live GPS</a:t>
+            </a:r>
+          </a:p>
+        </p:txBody>
+      </p:sp>
+      <p:sp>
+        <p:nvSpPr>
+          <p:cNvPr id="628" name="s"/>
+          <p:cNvSpPr/>
+          <p:nvPr/>
+        </p:nvSpPr>
+        <p:spPr>
+          <a:xfrm>
+            <a:off x="8778240" y="5961888"/>
+            <a:ext cx="868680" cy="292608"/>
+          </a:xfrm>
+          <a:prstGeom prst="roundRect">
+            <a:avLst>
+              <a:gd name="adj" fmla="val 20000"/>
+            </a:avLst>
+          </a:prstGeom>
+          <a:solidFill>
+            <a:srgbClr val="FBBF24"/>
+          </a:solidFill>
+          <a:ln>
+            <a:noFill/>
+          </a:ln>
+        </p:spPr>
+        <p:txBody>
+          <a:bodyPr wrap="square" anchor="ctr" rtlCol="0" lIns="91440" tIns="91440" rIns="91440" bIns="91440"/>
+          <a:lstStyle/>
+          <a:p>
+            <a:pPr algn="ctr">
+              <a:buNone/>
+            </a:pPr>
+            <a:r>
+              <a:rPr lang="en-US" sz="800" b="1" dirty="0">
+                <a:solidFill>
+                  <a:srgbClr val="FFFFFF"/>
+                </a:solidFill>
+                <a:latin typeface="Calibri"/>
+              </a:rPr>
+              <a:t>OTP Verify</a:t>
+            </a:r>
+          </a:p>
+        </p:txBody>
+      </p:sp>
+      <p:sp>
+        <p:nvSpPr>
+          <p:cNvPr id="629" name="s"/>
+          <p:cNvSpPr/>
+          <p:nvPr/>
+        </p:nvSpPr>
+        <p:spPr>
+          <a:xfrm>
+            <a:off x="9692640" y="5961888"/>
+            <a:ext cx="868680" cy="292608"/>
+          </a:xfrm>
+          <a:prstGeom prst="roundRect">
+            <a:avLst>
+              <a:gd name="adj" fmla="val 20000"/>
+            </a:avLst>
+          </a:prstGeom>
+          <a:solidFill>
+            <a:srgbClr val="8B5CF6"/>
+          </a:solidFill>
+          <a:ln>
+            <a:noFill/>
+          </a:ln>
+        </p:spPr>
+        <p:txBody>
+          <a:bodyPr wrap="square" anchor="ctr" rtlCol="0" lIns="91440" tIns="91440" rIns="91440" bIns="91440"/>
+          <a:lstStyle/>
+          <a:p>
+            <a:pPr algn="ctr">
+              <a:buNone/>
+            </a:pPr>
+            <a:r>
+              <a:rPr lang="en-US" sz="800" b="1" dirty="0">
+                <a:solidFill>
+                  <a:srgbClr val="FFFFFF"/>
+                </a:solidFill>
+                <a:latin typeface="Calibri"/>
+              </a:rPr>
+              <a:t>Photo Proof</a:t>
+            </a:r>
+          </a:p>
+        </p:txBody>
+      </p:sp>
+      <p:sp>
+        <p:nvSpPr>
+          <p:cNvPr id="630" name="s"/>
+          <p:cNvSpPr/>
+          <p:nvPr/>
+        </p:nvSpPr>
+        <p:spPr>
+          <a:xfrm>
+            <a:off x="10607040" y="5961888"/>
+            <a:ext cx="868680" cy="292608"/>
+          </a:xfrm>
+          <a:prstGeom prst="roundRect">
+            <a:avLst>
+              <a:gd name="adj" fmla="val 20000"/>
+            </a:avLst>
+          </a:prstGeom>
+          <a:solidFill>
+            <a:srgbClr val="14B8A6"/>
+          </a:solidFill>
+          <a:ln>
+            <a:noFill/>
+          </a:ln>
+        </p:spPr>
+        <p:txBody>
+          <a:bodyPr wrap="square" anchor="ctr" rtlCol="0" lIns="91440" tIns="91440" rIns="91440" bIns="91440"/>
+          <a:lstStyle/>
+          <a:p>
+            <a:pPr algn="ctr">
+              <a:buNone/>
+            </a:pPr>
+            <a:r>
+              <a:rPr lang="en-US" sz="800" b="1" dirty="0">
+                <a:solidFill>
+                  <a:srgbClr val="FFFFFF"/>
+                </a:solidFill>
+                <a:latin typeface="Calibri"/>
+              </a:rPr>
+              <a:t>Route + ETA</a:t>
+            </a:r>
+          </a:p>
+        </p:txBody>
+      </p:sp>
+      <p:sp>
+        <p:nvSpPr>
+          <p:cNvPr id="631" name="t"/>
+          <p:cNvSpPr txBox="1"/>
+          <p:nvPr/>
+        </p:nvSpPr>
+        <p:spPr>
+          <a:xfrm>
+            <a:off x="6949440" y="6355080"/>
+            <a:ext cx="4572000" cy="274320"/>
+          </a:xfrm>
+          <a:prstGeom prst="rect">
+            <a:avLst/>
+          </a:prstGeom>
+          <a:noFill/>
+        </p:spPr>
+        <p:txBody>
+          <a:bodyPr wrap="square" anchor="t" rtlCol="0"/>
+          <a:lstStyle/>
+          <a:p>
+            <a:pPr algn="l">
+              <a:buNone/>
+            </a:pPr>
+            <a:r>
+              <a:rPr lang="en-US" sz="800" dirty="0">
+                <a:solidFill>
+                  <a:srgbClr val="94A3B8"/>
+                </a:solidFill>
+                <a:latin typeface="Calibri"/>
+              </a:rPr>
+              <a:t>5-second GPS interval  |  Socket.IO rooms per order  |  Order timeline tracking</a:t>
+            </a:r>
+          </a:p>
+        </p:txBody>
+      </p:sp>
+      <p:sp>
+        <p:nvSpPr>
+          <p:cNvPr id="632" name="t"/>
           <p:cNvSpPr txBox="1"/>
           <p:nvPr/>
         </p:nvSpPr>
@@ -19551,7 +22591,7 @@
       </p:grpSpPr>
       <p:sp>
         <p:nvSpPr>
-          <p:cNvPr id="620" name="r"/>
+          <p:cNvPr id="633" name="r"/>
           <p:cNvSpPr/>
           <p:nvPr/>
         </p:nvSpPr>
@@ -19578,7 +22618,7 @@
       </p:sp>
       <p:sp>
         <p:nvSpPr>
-          <p:cNvPr id="621" name="r"/>
+          <p:cNvPr id="634" name="r"/>
           <p:cNvSpPr/>
           <p:nvPr/>
         </p:nvSpPr>
@@ -19605,7 +22645,7 @@
       </p:sp>
       <p:sp>
         <p:nvSpPr>
-          <p:cNvPr id="622" name="r"/>
+          <p:cNvPr id="635" name="r"/>
           <p:cNvSpPr/>
           <p:nvPr/>
         </p:nvSpPr>
@@ -19632,7 +22672,7 @@
       </p:sp>
       <p:sp>
         <p:nvSpPr>
-          <p:cNvPr id="623" name="t"/>
+          <p:cNvPr id="636" name="t"/>
           <p:cNvSpPr txBox="1"/>
           <p:nvPr/>
         </p:nvSpPr>
@@ -19667,7 +22707,7 @@
       </p:sp>
       <p:sp>
         <p:nvSpPr>
-          <p:cNvPr id="624" name="t"/>
+          <p:cNvPr id="637" name="t"/>
           <p:cNvSpPr txBox="1"/>
           <p:nvPr/>
         </p:nvSpPr>
@@ -19702,7 +22742,7 @@
       </p:sp>
       <p:sp>
         <p:nvSpPr>
-          <p:cNvPr id="625" name="t"/>
+          <p:cNvPr id="638" name="t"/>
           <p:cNvSpPr txBox="1"/>
           <p:nvPr/>
         </p:nvSpPr>
@@ -19737,7 +22777,7 @@
       </p:sp>
       <p:sp>
         <p:nvSpPr>
-          <p:cNvPr id="626" name="ps"/>
+          <p:cNvPr id="639" name="ps"/>
           <p:cNvSpPr/>
           <p:nvPr/>
         </p:nvSpPr>
@@ -19771,7 +22811,7 @@
       </p:sp>
       <p:sp>
         <p:nvSpPr>
-          <p:cNvPr id="627" name="r"/>
+          <p:cNvPr id="640" name="r"/>
           <p:cNvSpPr/>
           <p:nvPr/>
         </p:nvSpPr>
@@ -19800,7 +22840,7 @@
       </p:sp>
       <p:sp>
         <p:nvSpPr>
-          <p:cNvPr id="628" name="t"/>
+          <p:cNvPr id="641" name="t"/>
           <p:cNvSpPr txBox="1"/>
           <p:nvPr/>
         </p:nvSpPr>
@@ -19835,7 +22875,7 @@
       </p:sp>
       <p:sp>
         <p:nvSpPr>
-          <p:cNvPr id="629" name="s"/>
+          <p:cNvPr id="642" name="s"/>
           <p:cNvSpPr/>
           <p:nvPr/>
         </p:nvSpPr>
@@ -19862,7 +22902,7 @@
       </p:sp>
       <p:sp>
         <p:nvSpPr>
-          <p:cNvPr id="630" name="r"/>
+          <p:cNvPr id="643" name="r"/>
           <p:cNvSpPr/>
           <p:nvPr/>
         </p:nvSpPr>
@@ -19889,7 +22929,7 @@
       </p:sp>
       <p:sp>
         <p:nvSpPr>
-          <p:cNvPr id="631" name="t"/>
+          <p:cNvPr id="644" name="t"/>
           <p:cNvSpPr txBox="1"/>
           <p:nvPr/>
         </p:nvSpPr>
@@ -19924,7 +22964,7 @@
       </p:sp>
       <p:sp>
         <p:nvSpPr>
-          <p:cNvPr id="632" name="t"/>
+          <p:cNvPr id="645" name="t"/>
           <p:cNvSpPr txBox="1"/>
           <p:nvPr/>
         </p:nvSpPr>
@@ -19959,7 +22999,7 @@
       </p:sp>
       <p:sp>
         <p:nvSpPr>
-          <p:cNvPr id="633" name="t"/>
+          <p:cNvPr id="646" name="t"/>
           <p:cNvSpPr txBox="1"/>
           <p:nvPr/>
         </p:nvSpPr>
@@ -19994,7 +23034,7 @@
       </p:sp>
       <p:sp>
         <p:nvSpPr>
-          <p:cNvPr id="634" name="t"/>
+          <p:cNvPr id="647" name="t"/>
           <p:cNvSpPr txBox="1"/>
           <p:nvPr/>
         </p:nvSpPr>
@@ -20029,7 +23069,7 @@
       </p:sp>
       <p:sp>
         <p:nvSpPr>
-          <p:cNvPr id="635" name="ps"/>
+          <p:cNvPr id="648" name="ps"/>
           <p:cNvSpPr/>
           <p:nvPr/>
         </p:nvSpPr>
@@ -20063,7 +23103,7 @@
       </p:sp>
       <p:sp>
         <p:nvSpPr>
-          <p:cNvPr id="636" name="r"/>
+          <p:cNvPr id="649" name="r"/>
           <p:cNvSpPr/>
           <p:nvPr/>
         </p:nvSpPr>
@@ -20092,7 +23132,7 @@
       </p:sp>
       <p:sp>
         <p:nvSpPr>
-          <p:cNvPr id="637" name="t"/>
+          <p:cNvPr id="650" name="t"/>
           <p:cNvSpPr txBox="1"/>
           <p:nvPr/>
         </p:nvSpPr>
@@ -20127,7 +23167,7 @@
       </p:sp>
       <p:sp>
         <p:nvSpPr>
-          <p:cNvPr id="638" name="s"/>
+          <p:cNvPr id="651" name="s"/>
           <p:cNvSpPr/>
           <p:nvPr/>
         </p:nvSpPr>
@@ -20154,7 +23194,7 @@
       </p:sp>
       <p:sp>
         <p:nvSpPr>
-          <p:cNvPr id="639" name="r"/>
+          <p:cNvPr id="652" name="r"/>
           <p:cNvSpPr/>
           <p:nvPr/>
         </p:nvSpPr>
@@ -20181,7 +23221,7 @@
       </p:sp>
       <p:sp>
         <p:nvSpPr>
-          <p:cNvPr id="640" name="t"/>
+          <p:cNvPr id="653" name="t"/>
           <p:cNvSpPr txBox="1"/>
           <p:nvPr/>
         </p:nvSpPr>
@@ -20216,7 +23256,7 @@
       </p:sp>
       <p:sp>
         <p:nvSpPr>
-          <p:cNvPr id="641" name="t"/>
+          <p:cNvPr id="654" name="t"/>
           <p:cNvSpPr txBox="1"/>
           <p:nvPr/>
         </p:nvSpPr>
@@ -20251,7 +23291,7 @@
       </p:sp>
       <p:sp>
         <p:nvSpPr>
-          <p:cNvPr id="642" name="t"/>
+          <p:cNvPr id="655" name="t"/>
           <p:cNvSpPr txBox="1"/>
           <p:nvPr/>
         </p:nvSpPr>
@@ -20286,7 +23326,7 @@
       </p:sp>
       <p:sp>
         <p:nvSpPr>
-          <p:cNvPr id="643" name="t"/>
+          <p:cNvPr id="656" name="t"/>
           <p:cNvSpPr txBox="1"/>
           <p:nvPr/>
         </p:nvSpPr>
@@ -20321,7 +23361,7 @@
       </p:sp>
       <p:sp>
         <p:nvSpPr>
-          <p:cNvPr id="644" name="ps"/>
+          <p:cNvPr id="657" name="ps"/>
           <p:cNvSpPr/>
           <p:nvPr/>
         </p:nvSpPr>
@@ -20355,7 +23395,7 @@
       </p:sp>
       <p:sp>
         <p:nvSpPr>
-          <p:cNvPr id="645" name="r"/>
+          <p:cNvPr id="658" name="r"/>
           <p:cNvSpPr/>
           <p:nvPr/>
         </p:nvSpPr>
@@ -20384,7 +23424,7 @@
       </p:sp>
       <p:sp>
         <p:nvSpPr>
-          <p:cNvPr id="646" name="t"/>
+          <p:cNvPr id="659" name="t"/>
           <p:cNvSpPr txBox="1"/>
           <p:nvPr/>
         </p:nvSpPr>
@@ -20419,7 +23459,7 @@
       </p:sp>
       <p:sp>
         <p:nvSpPr>
-          <p:cNvPr id="647" name="s"/>
+          <p:cNvPr id="660" name="s"/>
           <p:cNvSpPr/>
           <p:nvPr/>
         </p:nvSpPr>
@@ -20446,7 +23486,7 @@
       </p:sp>
       <p:sp>
         <p:nvSpPr>
-          <p:cNvPr id="648" name="r"/>
+          <p:cNvPr id="661" name="r"/>
           <p:cNvSpPr/>
           <p:nvPr/>
         </p:nvSpPr>
@@ -20473,7 +23513,7 @@
       </p:sp>
       <p:sp>
         <p:nvSpPr>
-          <p:cNvPr id="649" name="t"/>
+          <p:cNvPr id="662" name="t"/>
           <p:cNvSpPr txBox="1"/>
           <p:nvPr/>
         </p:nvSpPr>
@@ -20508,7 +23548,7 @@
       </p:sp>
       <p:sp>
         <p:nvSpPr>
-          <p:cNvPr id="650" name="t"/>
+          <p:cNvPr id="663" name="t"/>
           <p:cNvSpPr txBox="1"/>
           <p:nvPr/>
         </p:nvSpPr>
@@ -20543,7 +23583,7 @@
       </p:sp>
       <p:sp>
         <p:nvSpPr>
-          <p:cNvPr id="651" name="t"/>
+          <p:cNvPr id="664" name="t"/>
           <p:cNvSpPr txBox="1"/>
           <p:nvPr/>
         </p:nvSpPr>
@@ -20578,7 +23618,7 @@
       </p:sp>
       <p:sp>
         <p:nvSpPr>
-          <p:cNvPr id="652" name="t"/>
+          <p:cNvPr id="665" name="t"/>
           <p:cNvSpPr txBox="1"/>
           <p:nvPr/>
         </p:nvSpPr>
@@ -20613,7 +23653,7 @@
       </p:sp>
       <p:sp>
         <p:nvSpPr>
-          <p:cNvPr id="653" name="ps"/>
+          <p:cNvPr id="666" name="ps"/>
           <p:cNvSpPr/>
           <p:nvPr/>
         </p:nvSpPr>
@@ -20647,7 +23687,7 @@
       </p:sp>
       <p:sp>
         <p:nvSpPr>
-          <p:cNvPr id="654" name="r"/>
+          <p:cNvPr id="667" name="r"/>
           <p:cNvSpPr/>
           <p:nvPr/>
         </p:nvSpPr>
@@ -20676,7 +23716,7 @@
       </p:sp>
       <p:sp>
         <p:nvSpPr>
-          <p:cNvPr id="655" name="t"/>
+          <p:cNvPr id="668" name="t"/>
           <p:cNvSpPr txBox="1"/>
           <p:nvPr/>
         </p:nvSpPr>
@@ -20711,7 +23751,7 @@
       </p:sp>
       <p:sp>
         <p:nvSpPr>
-          <p:cNvPr id="656" name="s"/>
+          <p:cNvPr id="669" name="s"/>
           <p:cNvSpPr/>
           <p:nvPr/>
         </p:nvSpPr>
@@ -20738,7 +23778,7 @@
       </p:sp>
       <p:sp>
         <p:nvSpPr>
-          <p:cNvPr id="657" name="r"/>
+          <p:cNvPr id="670" name="r"/>
           <p:cNvSpPr/>
           <p:nvPr/>
         </p:nvSpPr>
@@ -20765,7 +23805,7 @@
       </p:sp>
       <p:sp>
         <p:nvSpPr>
-          <p:cNvPr id="658" name="t"/>
+          <p:cNvPr id="671" name="t"/>
           <p:cNvSpPr txBox="1"/>
           <p:nvPr/>
         </p:nvSpPr>
@@ -20800,7 +23840,7 @@
       </p:sp>
       <p:sp>
         <p:nvSpPr>
-          <p:cNvPr id="659" name="t"/>
+          <p:cNvPr id="672" name="t"/>
           <p:cNvSpPr txBox="1"/>
           <p:nvPr/>
         </p:nvSpPr>
@@ -20835,7 +23875,7 @@
       </p:sp>
       <p:sp>
         <p:nvSpPr>
-          <p:cNvPr id="660" name="t"/>
+          <p:cNvPr id="673" name="t"/>
           <p:cNvSpPr txBox="1"/>
           <p:nvPr/>
         </p:nvSpPr>
@@ -20870,7 +23910,7 @@
       </p:sp>
       <p:sp>
         <p:nvSpPr>
-          <p:cNvPr id="661" name="t"/>
+          <p:cNvPr id="674" name="t"/>
           <p:cNvSpPr txBox="1"/>
           <p:nvPr/>
         </p:nvSpPr>
@@ -20905,7 +23945,7 @@
       </p:sp>
       <p:sp>
         <p:nvSpPr>
-          <p:cNvPr id="662" name="ps"/>
+          <p:cNvPr id="675" name="ps"/>
           <p:cNvSpPr/>
           <p:nvPr/>
         </p:nvSpPr>
@@ -20939,7 +23979,7 @@
       </p:sp>
       <p:sp>
         <p:nvSpPr>
-          <p:cNvPr id="663" name="r"/>
+          <p:cNvPr id="676" name="r"/>
           <p:cNvSpPr/>
           <p:nvPr/>
         </p:nvSpPr>
@@ -20968,7 +24008,7 @@
       </p:sp>
       <p:sp>
         <p:nvSpPr>
-          <p:cNvPr id="664" name="t"/>
+          <p:cNvPr id="677" name="t"/>
           <p:cNvSpPr txBox="1"/>
           <p:nvPr/>
         </p:nvSpPr>
@@ -21003,7 +24043,7 @@
       </p:sp>
       <p:sp>
         <p:nvSpPr>
-          <p:cNvPr id="665" name="s"/>
+          <p:cNvPr id="678" name="s"/>
           <p:cNvSpPr/>
           <p:nvPr/>
         </p:nvSpPr>
@@ -21030,7 +24070,7 @@
       </p:sp>
       <p:sp>
         <p:nvSpPr>
-          <p:cNvPr id="666" name="r"/>
+          <p:cNvPr id="679" name="r"/>
           <p:cNvSpPr/>
           <p:nvPr/>
         </p:nvSpPr>
@@ -21057,7 +24097,7 @@
       </p:sp>
       <p:sp>
         <p:nvSpPr>
-          <p:cNvPr id="667" name="t"/>
+          <p:cNvPr id="680" name="t"/>
           <p:cNvSpPr txBox="1"/>
           <p:nvPr/>
         </p:nvSpPr>
@@ -21092,7 +24132,7 @@
       </p:sp>
       <p:sp>
         <p:nvSpPr>
-          <p:cNvPr id="668" name="t"/>
+          <p:cNvPr id="681" name="t"/>
           <p:cNvSpPr txBox="1"/>
           <p:nvPr/>
         </p:nvSpPr>
@@ -21127,7 +24167,7 @@
       </p:sp>
       <p:sp>
         <p:nvSpPr>
-          <p:cNvPr id="669" name="t"/>
+          <p:cNvPr id="682" name="t"/>
           <p:cNvSpPr txBox="1"/>
           <p:nvPr/>
         </p:nvSpPr>
@@ -21162,7 +24202,7 @@
       </p:sp>
       <p:sp>
         <p:nvSpPr>
-          <p:cNvPr id="670" name="t"/>
+          <p:cNvPr id="683" name="t"/>
           <p:cNvSpPr txBox="1"/>
           <p:nvPr/>
         </p:nvSpPr>
@@ -21197,7 +24237,7 @@
       </p:sp>
       <p:cxnSp>
         <p:nvCxnSpPr>
-          <p:cNvPr id="671" name="ln"/>
+          <p:cNvPr id="684" name="ln"/>
           <p:cNvCxnSpPr/>
           <p:nvPr/>
         </p:nvCxnSpPr>
@@ -21218,7 +24258,7 @@
       </p:cxnSp>
       <p:sp>
         <p:nvSpPr>
-          <p:cNvPr id="672" name="c"/>
+          <p:cNvPr id="685" name="c"/>
           <p:cNvSpPr/>
           <p:nvPr/>
         </p:nvSpPr>
@@ -21245,7 +24285,7 @@
       </p:sp>
       <p:sp>
         <p:nvSpPr>
-          <p:cNvPr id="673" name="t"/>
+          <p:cNvPr id="686" name="t"/>
           <p:cNvSpPr txBox="1"/>
           <p:nvPr/>
         </p:nvSpPr>
@@ -21280,7 +24320,7 @@
       </p:sp>
       <p:cxnSp>
         <p:nvCxnSpPr>
-          <p:cNvPr id="674" name="ln"/>
+          <p:cNvPr id="687" name="ln"/>
           <p:cNvCxnSpPr/>
           <p:nvPr/>
         </p:nvCxnSpPr>
@@ -21301,7 +24341,7 @@
       </p:cxnSp>
       <p:sp>
         <p:nvSpPr>
-          <p:cNvPr id="675" name="c"/>
+          <p:cNvPr id="688" name="c"/>
           <p:cNvSpPr/>
           <p:nvPr/>
         </p:nvSpPr>
@@ -21328,7 +24368,7 @@
       </p:sp>
       <p:sp>
         <p:nvSpPr>
-          <p:cNvPr id="676" name="t"/>
+          <p:cNvPr id="689" name="t"/>
           <p:cNvSpPr txBox="1"/>
           <p:nvPr/>
         </p:nvSpPr>
@@ -21363,7 +24403,7 @@
       </p:sp>
       <p:cxnSp>
         <p:nvCxnSpPr>
-          <p:cNvPr id="677" name="ln"/>
+          <p:cNvPr id="690" name="ln"/>
           <p:cNvCxnSpPr/>
           <p:nvPr/>
         </p:nvCxnSpPr>
@@ -21384,7 +24424,7 @@
       </p:cxnSp>
       <p:sp>
         <p:nvSpPr>
-          <p:cNvPr id="678" name="c"/>
+          <p:cNvPr id="691" name="c"/>
           <p:cNvSpPr/>
           <p:nvPr/>
         </p:nvSpPr>
@@ -21411,7 +24451,7 @@
       </p:sp>
       <p:sp>
         <p:nvSpPr>
-          <p:cNvPr id="679" name="t"/>
+          <p:cNvPr id="692" name="t"/>
           <p:cNvSpPr txBox="1"/>
           <p:nvPr/>
         </p:nvSpPr>
@@ -21446,7 +24486,7 @@
       </p:sp>
       <p:cxnSp>
         <p:nvCxnSpPr>
-          <p:cNvPr id="680" name="ln"/>
+          <p:cNvPr id="693" name="ln"/>
           <p:cNvCxnSpPr/>
           <p:nvPr/>
         </p:nvCxnSpPr>
@@ -21467,7 +24507,7 @@
       </p:cxnSp>
       <p:sp>
         <p:nvSpPr>
-          <p:cNvPr id="681" name="c"/>
+          <p:cNvPr id="694" name="c"/>
           <p:cNvSpPr/>
           <p:nvPr/>
         </p:nvSpPr>
@@ -21494,7 +24534,7 @@
       </p:sp>
       <p:sp>
         <p:nvSpPr>
-          <p:cNvPr id="682" name="t"/>
+          <p:cNvPr id="695" name="t"/>
           <p:cNvSpPr txBox="1"/>
           <p:nvPr/>
         </p:nvSpPr>
@@ -21529,7 +24569,7 @@
       </p:sp>
       <p:sp>
         <p:nvSpPr>
-          <p:cNvPr id="683" name="s"/>
+          <p:cNvPr id="696" name="s"/>
           <p:cNvSpPr/>
           <p:nvPr/>
         </p:nvSpPr>
@@ -21565,7 +24605,7 @@
       </p:sp>
       <p:sp>
         <p:nvSpPr>
-          <p:cNvPr id="684" name="r"/>
+          <p:cNvPr id="697" name="r"/>
           <p:cNvSpPr/>
           <p:nvPr/>
         </p:nvSpPr>
@@ -21592,7 +24632,7 @@
       </p:sp>
       <p:sp>
         <p:nvSpPr>
-          <p:cNvPr id="685" name="ps"/>
+          <p:cNvPr id="698" name="ps"/>
           <p:cNvSpPr/>
           <p:nvPr/>
         </p:nvSpPr>
@@ -21626,7 +24666,7 @@
       </p:sp>
       <p:sp>
         <p:nvSpPr>
-          <p:cNvPr id="686" name="t"/>
+          <p:cNvPr id="699" name="t"/>
           <p:cNvSpPr txBox="1"/>
           <p:nvPr/>
         </p:nvSpPr>
@@ -21661,7 +24701,7 @@
       </p:sp>
       <p:sp>
         <p:nvSpPr>
-          <p:cNvPr id="687" name="t"/>
+          <p:cNvPr id="700" name="t"/>
           <p:cNvSpPr txBox="1"/>
           <p:nvPr/>
         </p:nvSpPr>
@@ -21696,7 +24736,7 @@
       </p:sp>
       <p:sp>
         <p:nvSpPr>
-          <p:cNvPr id="688" name="t"/>
+          <p:cNvPr id="701" name="t"/>
           <p:cNvSpPr txBox="1"/>
           <p:nvPr/>
         </p:nvSpPr>
@@ -21731,7 +24771,7 @@
       </p:sp>
       <p:sp>
         <p:nvSpPr>
-          <p:cNvPr id="689" name="t"/>
+          <p:cNvPr id="702" name="t"/>
           <p:cNvSpPr txBox="1"/>
           <p:nvPr/>
         </p:nvSpPr>
@@ -21766,7 +24806,7 @@
       </p:sp>
       <p:sp>
         <p:nvSpPr>
-          <p:cNvPr id="690" name="t"/>
+          <p:cNvPr id="703" name="t"/>
           <p:cNvSpPr txBox="1"/>
           <p:nvPr/>
         </p:nvSpPr>
@@ -21801,7 +24841,7 @@
       </p:sp>
       <p:sp>
         <p:nvSpPr>
-          <p:cNvPr id="691" name="t"/>
+          <p:cNvPr id="704" name="t"/>
           <p:cNvSpPr txBox="1"/>
           <p:nvPr/>
         </p:nvSpPr>
@@ -21836,7 +24876,7 @@
       </p:sp>
       <p:sp>
         <p:nvSpPr>
-          <p:cNvPr id="692" name="t"/>
+          <p:cNvPr id="705" name="t"/>
           <p:cNvSpPr txBox="1"/>
           <p:nvPr/>
         </p:nvSpPr>
@@ -21899,7 +24939,7 @@
       </p:grpSpPr>
       <p:sp>
         <p:nvSpPr>
-          <p:cNvPr id="693" name="r"/>
+          <p:cNvPr id="706" name="r"/>
           <p:cNvSpPr/>
           <p:nvPr/>
         </p:nvSpPr>
@@ -21926,7 +24966,7 @@
       </p:sp>
       <p:sp>
         <p:nvSpPr>
-          <p:cNvPr id="694" name="r"/>
+          <p:cNvPr id="707" name="r"/>
           <p:cNvSpPr/>
           <p:nvPr/>
         </p:nvSpPr>
@@ -21953,7 +24993,7 @@
       </p:sp>
       <p:sp>
         <p:nvSpPr>
-          <p:cNvPr id="695" name="r"/>
+          <p:cNvPr id="708" name="r"/>
           <p:cNvSpPr/>
           <p:nvPr/>
         </p:nvSpPr>
@@ -21980,7 +25020,7 @@
       </p:sp>
       <p:sp>
         <p:nvSpPr>
-          <p:cNvPr id="696" name="t"/>
+          <p:cNvPr id="709" name="t"/>
           <p:cNvSpPr txBox="1"/>
           <p:nvPr/>
         </p:nvSpPr>
@@ -22015,7 +25055,7 @@
       </p:sp>
       <p:sp>
         <p:nvSpPr>
-          <p:cNvPr id="697" name="t"/>
+          <p:cNvPr id="710" name="t"/>
           <p:cNvSpPr txBox="1"/>
           <p:nvPr/>
         </p:nvSpPr>
@@ -22050,7 +25090,7 @@
       </p:sp>
       <p:sp>
         <p:nvSpPr>
-          <p:cNvPr id="698" name="t"/>
+          <p:cNvPr id="711" name="t"/>
           <p:cNvSpPr txBox="1"/>
           <p:nvPr/>
         </p:nvSpPr>
@@ -22085,7 +25125,7 @@
       </p:sp>
       <p:sp>
         <p:nvSpPr>
-          <p:cNvPr id="699" name="t"/>
+          <p:cNvPr id="712" name="t"/>
           <p:cNvSpPr txBox="1"/>
           <p:nvPr/>
         </p:nvSpPr>
@@ -22120,7 +25160,7 @@
       </p:sp>
       <p:sp>
         <p:nvSpPr>
-          <p:cNvPr id="700" name="r"/>
+          <p:cNvPr id="713" name="r"/>
           <p:cNvSpPr/>
           <p:nvPr/>
         </p:nvSpPr>
@@ -22147,7 +25187,7 @@
       </p:sp>
       <p:sp>
         <p:nvSpPr>
-          <p:cNvPr id="701" name="ps"/>
+          <p:cNvPr id="714" name="ps"/>
           <p:cNvSpPr/>
           <p:nvPr/>
         </p:nvSpPr>
@@ -22181,7 +25221,7 @@
       </p:sp>
       <p:sp>
         <p:nvSpPr>
-          <p:cNvPr id="702" name="ps"/>
+          <p:cNvPr id="715" name="ps"/>
           <p:cNvSpPr/>
           <p:nvPr/>
         </p:nvSpPr>
@@ -22216,7 +25256,7 @@
       </p:sp>
       <p:sp>
         <p:nvSpPr>
-          <p:cNvPr id="703" name="ps"/>
+          <p:cNvPr id="716" name="ps"/>
           <p:cNvSpPr/>
           <p:nvPr/>
         </p:nvSpPr>
@@ -22243,7 +25283,7 @@
       </p:sp>
       <p:sp>
         <p:nvSpPr>
-          <p:cNvPr id="704" name="ps"/>
+          <p:cNvPr id="717" name="ps"/>
           <p:cNvSpPr/>
           <p:nvPr/>
         </p:nvSpPr>
@@ -22270,7 +25310,7 @@
       </p:sp>
       <p:sp>
         <p:nvSpPr>
-          <p:cNvPr id="705" name="ps"/>
+          <p:cNvPr id="718" name="ps"/>
           <p:cNvSpPr/>
           <p:nvPr/>
         </p:nvSpPr>
@@ -22297,7 +25337,7 @@
       </p:sp>
       <p:sp>
         <p:nvSpPr>
-          <p:cNvPr id="706" name="r"/>
+          <p:cNvPr id="719" name="r"/>
           <p:cNvSpPr/>
           <p:nvPr/>
         </p:nvSpPr>
@@ -22326,7 +25366,7 @@
       </p:sp>
       <p:sp>
         <p:nvSpPr>
-          <p:cNvPr id="707" name="t"/>
+          <p:cNvPr id="720" name="t"/>
           <p:cNvSpPr txBox="1"/>
           <p:nvPr/>
         </p:nvSpPr>
@@ -22361,7 +25401,7 @@
       </p:sp>
       <p:sp>
         <p:nvSpPr>
-          <p:cNvPr id="708" name="t"/>
+          <p:cNvPr id="721" name="t"/>
           <p:cNvSpPr txBox="1"/>
           <p:nvPr/>
         </p:nvSpPr>
@@ -22396,7 +25436,7 @@
       </p:sp>
       <p:sp>
         <p:nvSpPr>
-          <p:cNvPr id="709" name="r"/>
+          <p:cNvPr id="722" name="r"/>
           <p:cNvSpPr/>
           <p:nvPr/>
         </p:nvSpPr>
@@ -22425,7 +25465,7 @@
       </p:sp>
       <p:sp>
         <p:nvSpPr>
-          <p:cNvPr id="710" name="r"/>
+          <p:cNvPr id="723" name="r"/>
           <p:cNvSpPr/>
           <p:nvPr/>
         </p:nvSpPr>
@@ -22452,7 +25492,7 @@
       </p:sp>
       <p:sp>
         <p:nvSpPr>
-          <p:cNvPr id="711" name="t"/>
+          <p:cNvPr id="724" name="t"/>
           <p:cNvSpPr txBox="1"/>
           <p:nvPr/>
         </p:nvSpPr>
@@ -22487,7 +25527,7 @@
       </p:sp>
       <p:sp>
         <p:nvSpPr>
-          <p:cNvPr id="712" name="t"/>
+          <p:cNvPr id="725" name="t"/>
           <p:cNvSpPr txBox="1"/>
           <p:nvPr/>
         </p:nvSpPr>
@@ -22522,7 +25562,7 @@
       </p:sp>
       <p:sp>
         <p:nvSpPr>
-          <p:cNvPr id="713" name="r"/>
+          <p:cNvPr id="726" name="r"/>
           <p:cNvSpPr/>
           <p:nvPr/>
         </p:nvSpPr>
@@ -22551,7 +25591,7 @@
       </p:sp>
       <p:sp>
         <p:nvSpPr>
-          <p:cNvPr id="714" name="r"/>
+          <p:cNvPr id="727" name="r"/>
           <p:cNvSpPr/>
           <p:nvPr/>
         </p:nvSpPr>
@@ -22578,7 +25618,7 @@
       </p:sp>
       <p:sp>
         <p:nvSpPr>
-          <p:cNvPr id="715" name="t"/>
+          <p:cNvPr id="728" name="t"/>
           <p:cNvSpPr txBox="1"/>
           <p:nvPr/>
         </p:nvSpPr>
@@ -22613,7 +25653,7 @@
       </p:sp>
       <p:sp>
         <p:nvSpPr>
-          <p:cNvPr id="716" name="t"/>
+          <p:cNvPr id="729" name="t"/>
           <p:cNvSpPr txBox="1"/>
           <p:nvPr/>
         </p:nvSpPr>
@@ -22648,7 +25688,7 @@
       </p:sp>
       <p:sp>
         <p:nvSpPr>
-          <p:cNvPr id="717" name="r"/>
+          <p:cNvPr id="730" name="r"/>
           <p:cNvSpPr/>
           <p:nvPr/>
         </p:nvSpPr>
@@ -22677,7 +25717,7 @@
       </p:sp>
       <p:sp>
         <p:nvSpPr>
-          <p:cNvPr id="718" name="r"/>
+          <p:cNvPr id="731" name="r"/>
           <p:cNvSpPr/>
           <p:nvPr/>
         </p:nvSpPr>
@@ -22704,7 +25744,7 @@
       </p:sp>
       <p:sp>
         <p:nvSpPr>
-          <p:cNvPr id="719" name="t"/>
+          <p:cNvPr id="732" name="t"/>
           <p:cNvSpPr txBox="1"/>
           <p:nvPr/>
         </p:nvSpPr>
@@ -22739,7 +25779,7 @@
       </p:sp>
       <p:sp>
         <p:nvSpPr>
-          <p:cNvPr id="720" name="t"/>
+          <p:cNvPr id="733" name="t"/>
           <p:cNvSpPr txBox="1"/>
           <p:nvPr/>
         </p:nvSpPr>
@@ -22774,7 +25814,7 @@
       </p:sp>
       <p:sp>
         <p:nvSpPr>
-          <p:cNvPr id="721" name="s"/>
+          <p:cNvPr id="734" name="s"/>
           <p:cNvSpPr/>
           <p:nvPr/>
         </p:nvSpPr>
@@ -22810,7 +25850,7 @@
       </p:sp>
       <p:sp>
         <p:nvSpPr>
-          <p:cNvPr id="722" name="r"/>
+          <p:cNvPr id="735" name="r"/>
           <p:cNvSpPr/>
           <p:nvPr/>
         </p:nvSpPr>
@@ -22839,7 +25879,7 @@
       </p:sp>
       <p:sp>
         <p:nvSpPr>
-          <p:cNvPr id="723" name="r"/>
+          <p:cNvPr id="736" name="r"/>
           <p:cNvSpPr/>
           <p:nvPr/>
         </p:nvSpPr>
@@ -22866,7 +25906,7 @@
       </p:sp>
       <p:sp>
         <p:nvSpPr>
-          <p:cNvPr id="724" name="c"/>
+          <p:cNvPr id="737" name="c"/>
           <p:cNvSpPr/>
           <p:nvPr/>
         </p:nvSpPr>
@@ -22893,7 +25933,7 @@
       </p:sp>
       <p:sp>
         <p:nvSpPr>
-          <p:cNvPr id="725" name="c"/>
+          <p:cNvPr id="738" name="c"/>
           <p:cNvSpPr/>
           <p:nvPr/>
         </p:nvSpPr>
@@ -22920,7 +25960,7 @@
       </p:sp>
       <p:sp>
         <p:nvSpPr>
-          <p:cNvPr id="726" name="c"/>
+          <p:cNvPr id="739" name="c"/>
           <p:cNvSpPr/>
           <p:nvPr/>
         </p:nvSpPr>
@@ -22947,7 +25987,7 @@
       </p:sp>
       <p:sp>
         <p:nvSpPr>
-          <p:cNvPr id="727" name="t"/>
+          <p:cNvPr id="740" name="t"/>
           <p:cNvSpPr txBox="1"/>
           <p:nvPr/>
         </p:nvSpPr>
@@ -22982,7 +26022,7 @@
       </p:sp>
       <p:sp>
         <p:nvSpPr>
-          <p:cNvPr id="728" name="s"/>
+          <p:cNvPr id="741" name="s"/>
           <p:cNvSpPr/>
           <p:nvPr/>
         </p:nvSpPr>
@@ -23011,7 +26051,7 @@
       </p:sp>
       <p:sp>
         <p:nvSpPr>
-          <p:cNvPr id="729" name="t"/>
+          <p:cNvPr id="742" name="t"/>
           <p:cNvSpPr txBox="1"/>
           <p:nvPr/>
         </p:nvSpPr>
@@ -23046,7 +26086,7 @@
       </p:sp>
       <p:sp>
         <p:nvSpPr>
-          <p:cNvPr id="730" name="t"/>
+          <p:cNvPr id="743" name="t"/>
           <p:cNvSpPr txBox="1"/>
           <p:nvPr/>
         </p:nvSpPr>
@@ -23081,7 +26121,7 @@
       </p:sp>
       <p:sp>
         <p:nvSpPr>
-          <p:cNvPr id="731" name="s"/>
+          <p:cNvPr id="744" name="s"/>
           <p:cNvSpPr/>
           <p:nvPr/>
         </p:nvSpPr>
@@ -23110,7 +26150,7 @@
       </p:sp>
       <p:sp>
         <p:nvSpPr>
-          <p:cNvPr id="732" name="t"/>
+          <p:cNvPr id="745" name="t"/>
           <p:cNvSpPr txBox="1"/>
           <p:nvPr/>
         </p:nvSpPr>
@@ -23145,7 +26185,7 @@
       </p:sp>
       <p:sp>
         <p:nvSpPr>
-          <p:cNvPr id="733" name="t"/>
+          <p:cNvPr id="746" name="t"/>
           <p:cNvSpPr txBox="1"/>
           <p:nvPr/>
         </p:nvSpPr>
@@ -23180,7 +26220,7 @@
       </p:sp>
       <p:sp>
         <p:nvSpPr>
-          <p:cNvPr id="734" name="s"/>
+          <p:cNvPr id="747" name="s"/>
           <p:cNvSpPr/>
           <p:nvPr/>
         </p:nvSpPr>
@@ -23209,7 +26249,7 @@
       </p:sp>
       <p:sp>
         <p:nvSpPr>
-          <p:cNvPr id="735" name="t"/>
+          <p:cNvPr id="748" name="t"/>
           <p:cNvSpPr txBox="1"/>
           <p:nvPr/>
         </p:nvSpPr>
@@ -23244,7 +26284,7 @@
       </p:sp>
       <p:sp>
         <p:nvSpPr>
-          <p:cNvPr id="736" name="t"/>
+          <p:cNvPr id="749" name="t"/>
           <p:cNvSpPr txBox="1"/>
           <p:nvPr/>
         </p:nvSpPr>
@@ -23279,7 +26319,7 @@
       </p:sp>
       <p:sp>
         <p:nvSpPr>
-          <p:cNvPr id="737" name="r"/>
+          <p:cNvPr id="750" name="r"/>
           <p:cNvSpPr/>
           <p:nvPr/>
         </p:nvSpPr>
@@ -23306,7 +26346,7 @@
       </p:sp>
       <p:sp>
         <p:nvSpPr>
-          <p:cNvPr id="738" name="r"/>
+          <p:cNvPr id="751" name="r"/>
           <p:cNvSpPr/>
           <p:nvPr/>
         </p:nvSpPr>
@@ -23333,7 +26373,7 @@
       </p:sp>
       <p:sp>
         <p:nvSpPr>
-          <p:cNvPr id="739" name="r"/>
+          <p:cNvPr id="752" name="r"/>
           <p:cNvSpPr/>
           <p:nvPr/>
         </p:nvSpPr>
@@ -23360,7 +26400,7 @@
       </p:sp>
       <p:sp>
         <p:nvSpPr>
-          <p:cNvPr id="740" name="r"/>
+          <p:cNvPr id="753" name="r"/>
           <p:cNvSpPr/>
           <p:nvPr/>
         </p:nvSpPr>
@@ -23387,7 +26427,7 @@
       </p:sp>
       <p:sp>
         <p:nvSpPr>
-          <p:cNvPr id="741" name="r"/>
+          <p:cNvPr id="754" name="r"/>
           <p:cNvSpPr/>
           <p:nvPr/>
         </p:nvSpPr>
@@ -23414,7 +26454,7 @@
       </p:sp>
       <p:sp>
         <p:nvSpPr>
-          <p:cNvPr id="742" name="r"/>
+          <p:cNvPr id="755" name="r"/>
           <p:cNvSpPr/>
           <p:nvPr/>
         </p:nvSpPr>
@@ -23441,7 +26481,7 @@
       </p:sp>
       <p:sp>
         <p:nvSpPr>
-          <p:cNvPr id="743" name="r"/>
+          <p:cNvPr id="756" name="r"/>
           <p:cNvSpPr/>
           <p:nvPr/>
         </p:nvSpPr>
@@ -23468,7 +26508,7 @@
       </p:sp>
       <p:sp>
         <p:nvSpPr>
-          <p:cNvPr id="744" name="r"/>
+          <p:cNvPr id="757" name="r"/>
           <p:cNvSpPr/>
           <p:nvPr/>
         </p:nvSpPr>
@@ -23495,7 +26535,7 @@
       </p:sp>
       <p:sp>
         <p:nvSpPr>
-          <p:cNvPr id="745" name="c"/>
+          <p:cNvPr id="758" name="c"/>
           <p:cNvSpPr/>
           <p:nvPr/>
         </p:nvSpPr>
@@ -23522,7 +26562,7 @@
       </p:sp>
       <p:sp>
         <p:nvSpPr>
-          <p:cNvPr id="746" name="t"/>
+          <p:cNvPr id="759" name="t"/>
           <p:cNvSpPr txBox="1"/>
           <p:nvPr/>
         </p:nvSpPr>
@@ -23557,7 +26597,7 @@
       </p:sp>
       <p:sp>
         <p:nvSpPr>
-          <p:cNvPr id="747" name="t"/>
+          <p:cNvPr id="760" name="t"/>
           <p:cNvSpPr txBox="1"/>
           <p:nvPr/>
         </p:nvSpPr>
@@ -23592,7 +26632,7 @@
       </p:sp>
       <p:sp>
         <p:nvSpPr>
-          <p:cNvPr id="748" name="t"/>
+          <p:cNvPr id="761" name="t"/>
           <p:cNvSpPr txBox="1"/>
           <p:nvPr/>
         </p:nvSpPr>
@@ -23627,7 +26667,7 @@
       </p:sp>
       <p:sp>
         <p:nvSpPr>
-          <p:cNvPr id="749" name="ps"/>
+          <p:cNvPr id="762" name="ps"/>
           <p:cNvSpPr/>
           <p:nvPr/>
         </p:nvSpPr>
@@ -23661,7 +26701,7 @@
       </p:sp>
       <p:sp>
         <p:nvSpPr>
-          <p:cNvPr id="750" name="ps"/>
+          <p:cNvPr id="763" name="ps"/>
           <p:cNvSpPr/>
           <p:nvPr/>
         </p:nvSpPr>
@@ -23688,7 +26728,7 @@
       </p:sp>
       <p:sp>
         <p:nvSpPr>
-          <p:cNvPr id="751" name="ps"/>
+          <p:cNvPr id="764" name="ps"/>
           <p:cNvSpPr/>
           <p:nvPr/>
         </p:nvSpPr>
@@ -23715,7 +26755,7 @@
       </p:sp>
       <p:sp>
         <p:nvSpPr>
-          <p:cNvPr id="752" name="c"/>
+          <p:cNvPr id="765" name="c"/>
           <p:cNvSpPr/>
           <p:nvPr/>
         </p:nvSpPr>
@@ -23742,7 +26782,7 @@
       </p:sp>
       <p:sp>
         <p:nvSpPr>
-          <p:cNvPr id="753" name="t"/>
+          <p:cNvPr id="766" name="t"/>
           <p:cNvSpPr txBox="1"/>
           <p:nvPr/>
         </p:nvSpPr>
@@ -23777,7 +26817,7 @@
       </p:sp>
       <p:sp>
         <p:nvSpPr>
-          <p:cNvPr id="754" name="t"/>
+          <p:cNvPr id="767" name="t"/>
           <p:cNvSpPr txBox="1"/>
           <p:nvPr/>
         </p:nvSpPr>
@@ -23812,7 +26852,7 @@
       </p:sp>
       <p:sp>
         <p:nvSpPr>
-          <p:cNvPr id="755" name="t"/>
+          <p:cNvPr id="768" name="t"/>
           <p:cNvSpPr txBox="1"/>
           <p:nvPr/>
         </p:nvSpPr>
@@ -23847,7 +26887,7 @@
       </p:sp>
       <p:sp>
         <p:nvSpPr>
-          <p:cNvPr id="756" name="c"/>
+          <p:cNvPr id="769" name="c"/>
           <p:cNvSpPr/>
           <p:nvPr/>
         </p:nvSpPr>
@@ -23874,7 +26914,7 @@
       </p:sp>
       <p:sp>
         <p:nvSpPr>
-          <p:cNvPr id="757" name="t"/>
+          <p:cNvPr id="770" name="t"/>
           <p:cNvSpPr txBox="1"/>
           <p:nvPr/>
         </p:nvSpPr>
@@ -23909,7 +26949,7 @@
       </p:sp>
       <p:sp>
         <p:nvSpPr>
-          <p:cNvPr id="758" name="t"/>
+          <p:cNvPr id="771" name="t"/>
           <p:cNvSpPr txBox="1"/>
           <p:nvPr/>
         </p:nvSpPr>
@@ -23944,7 +26984,7 @@
       </p:sp>
       <p:sp>
         <p:nvSpPr>
-          <p:cNvPr id="759" name="t"/>
+          <p:cNvPr id="772" name="t"/>
           <p:cNvSpPr txBox="1"/>
           <p:nvPr/>
         </p:nvSpPr>
@@ -23979,7 +27019,7 @@
       </p:sp>
       <p:sp>
         <p:nvSpPr>
-          <p:cNvPr id="760" name="t"/>
+          <p:cNvPr id="773" name="t"/>
           <p:cNvSpPr txBox="1"/>
           <p:nvPr/>
         </p:nvSpPr>
@@ -24014,7 +27054,7 @@
       </p:sp>
       <p:sp>
         <p:nvSpPr>
-          <p:cNvPr id="761" name="r"/>
+          <p:cNvPr id="774" name="r"/>
           <p:cNvSpPr/>
           <p:nvPr/>
         </p:nvSpPr>
@@ -24041,7 +27081,7 @@
       </p:sp>
       <p:sp>
         <p:nvSpPr>
-          <p:cNvPr id="762" name="ps"/>
+          <p:cNvPr id="775" name="ps"/>
           <p:cNvSpPr/>
           <p:nvPr/>
         </p:nvSpPr>
@@ -24075,7 +27115,7 @@
       </p:sp>
       <p:sp>
         <p:nvSpPr>
-          <p:cNvPr id="763" name="t"/>
+          <p:cNvPr id="776" name="t"/>
           <p:cNvSpPr txBox="1"/>
           <p:nvPr/>
         </p:nvSpPr>
@@ -24110,7 +27150,7 @@
       </p:sp>
       <p:sp>
         <p:nvSpPr>
-          <p:cNvPr id="764" name="s"/>
+          <p:cNvPr id="777" name="s"/>
           <p:cNvSpPr/>
           <p:nvPr/>
         </p:nvSpPr>
@@ -24146,7 +27186,7 @@
       </p:sp>
       <p:sp>
         <p:nvSpPr>
-          <p:cNvPr id="765" name="r"/>
+          <p:cNvPr id="778" name="r"/>
           <p:cNvSpPr/>
           <p:nvPr/>
         </p:nvSpPr>
@@ -24173,7 +27213,7 @@
       </p:sp>
       <p:sp>
         <p:nvSpPr>
-          <p:cNvPr id="766" name="t"/>
+          <p:cNvPr id="779" name="t"/>
           <p:cNvSpPr txBox="1"/>
           <p:nvPr/>
         </p:nvSpPr>
@@ -24208,7 +27248,7 @@
       </p:sp>
       <p:sp>
         <p:nvSpPr>
-          <p:cNvPr id="767" name="t"/>
+          <p:cNvPr id="780" name="t"/>
           <p:cNvSpPr txBox="1"/>
           <p:nvPr/>
         </p:nvSpPr>
@@ -24243,7 +27283,7 @@
       </p:sp>
       <p:sp>
         <p:nvSpPr>
-          <p:cNvPr id="768" name="r"/>
+          <p:cNvPr id="781" name="r"/>
           <p:cNvSpPr/>
           <p:nvPr/>
         </p:nvSpPr>
@@ -24270,7 +27310,7 @@
       </p:sp>
       <p:sp>
         <p:nvSpPr>
-          <p:cNvPr id="769" name="ps"/>
+          <p:cNvPr id="782" name="ps"/>
           <p:cNvSpPr/>
           <p:nvPr/>
         </p:nvSpPr>
@@ -24297,7 +27337,7 @@
       </p:sp>
       <p:sp>
         <p:nvSpPr>
-          <p:cNvPr id="770" name="t"/>
+          <p:cNvPr id="783" name="t"/>
           <p:cNvSpPr txBox="1"/>
           <p:nvPr/>
         </p:nvSpPr>
@@ -24332,7 +27372,7 @@
       </p:sp>
       <p:sp>
         <p:nvSpPr>
-          <p:cNvPr id="771" name="t"/>
+          <p:cNvPr id="784" name="t"/>
           <p:cNvSpPr txBox="1"/>
           <p:nvPr/>
         </p:nvSpPr>
@@ -24367,7 +27407,7 @@
       </p:sp>
       <p:sp>
         <p:nvSpPr>
-          <p:cNvPr id="772" name="t"/>
+          <p:cNvPr id="785" name="t"/>
           <p:cNvSpPr txBox="1"/>
           <p:nvPr/>
         </p:nvSpPr>
@@ -24402,7 +27442,7 @@
       </p:sp>
       <p:sp>
         <p:nvSpPr>
-          <p:cNvPr id="773" name="r"/>
+          <p:cNvPr id="786" name="r"/>
           <p:cNvSpPr/>
           <p:nvPr/>
         </p:nvSpPr>
@@ -24429,7 +27469,7 @@
       </p:sp>
       <p:sp>
         <p:nvSpPr>
-          <p:cNvPr id="774" name="ps"/>
+          <p:cNvPr id="787" name="ps"/>
           <p:cNvSpPr/>
           <p:nvPr/>
         </p:nvSpPr>
@@ -24456,7 +27496,7 @@
       </p:sp>
       <p:sp>
         <p:nvSpPr>
-          <p:cNvPr id="775" name="t"/>
+          <p:cNvPr id="788" name="t"/>
           <p:cNvSpPr txBox="1"/>
           <p:nvPr/>
         </p:nvSpPr>
@@ -24491,7 +27531,7 @@
       </p:sp>
       <p:sp>
         <p:nvSpPr>
-          <p:cNvPr id="776" name="t"/>
+          <p:cNvPr id="789" name="t"/>
           <p:cNvSpPr txBox="1"/>
           <p:nvPr/>
         </p:nvSpPr>
@@ -24526,7 +27566,7 @@
       </p:sp>
       <p:sp>
         <p:nvSpPr>
-          <p:cNvPr id="777" name="t"/>
+          <p:cNvPr id="790" name="t"/>
           <p:cNvSpPr txBox="1"/>
           <p:nvPr/>
         </p:nvSpPr>
@@ -24561,7 +27601,7 @@
       </p:sp>
       <p:sp>
         <p:nvSpPr>
-          <p:cNvPr id="778" name="r"/>
+          <p:cNvPr id="791" name="r"/>
           <p:cNvSpPr/>
           <p:nvPr/>
         </p:nvSpPr>
@@ -24588,7 +27628,7 @@
       </p:sp>
       <p:sp>
         <p:nvSpPr>
-          <p:cNvPr id="779" name="ps"/>
+          <p:cNvPr id="792" name="ps"/>
           <p:cNvSpPr/>
           <p:nvPr/>
         </p:nvSpPr>
@@ -24615,7 +27655,7 @@
       </p:sp>
       <p:sp>
         <p:nvSpPr>
-          <p:cNvPr id="780" name="t"/>
+          <p:cNvPr id="793" name="t"/>
           <p:cNvSpPr txBox="1"/>
           <p:nvPr/>
         </p:nvSpPr>
@@ -24650,7 +27690,7 @@
       </p:sp>
       <p:sp>
         <p:nvSpPr>
-          <p:cNvPr id="781" name="t"/>
+          <p:cNvPr id="794" name="t"/>
           <p:cNvSpPr txBox="1"/>
           <p:nvPr/>
         </p:nvSpPr>
@@ -24685,7 +27725,7 @@
       </p:sp>
       <p:sp>
         <p:nvSpPr>
-          <p:cNvPr id="782" name="t"/>
+          <p:cNvPr id="795" name="t"/>
           <p:cNvSpPr txBox="1"/>
           <p:nvPr/>
         </p:nvSpPr>
@@ -24720,7 +27760,7 @@
       </p:sp>
       <p:sp>
         <p:nvSpPr>
-          <p:cNvPr id="783" name="r"/>
+          <p:cNvPr id="796" name="r"/>
           <p:cNvSpPr/>
           <p:nvPr/>
         </p:nvSpPr>
@@ -24747,7 +27787,7 @@
       </p:sp>
       <p:sp>
         <p:nvSpPr>
-          <p:cNvPr id="784" name="ps"/>
+          <p:cNvPr id="797" name="ps"/>
           <p:cNvSpPr/>
           <p:nvPr/>
         </p:nvSpPr>
@@ -24774,7 +27814,7 @@
       </p:sp>
       <p:sp>
         <p:nvSpPr>
-          <p:cNvPr id="785" name="t"/>
+          <p:cNvPr id="798" name="t"/>
           <p:cNvSpPr txBox="1"/>
           <p:nvPr/>
         </p:nvSpPr>
@@ -24809,7 +27849,7 @@
       </p:sp>
       <p:sp>
         <p:nvSpPr>
-          <p:cNvPr id="786" name="t"/>
+          <p:cNvPr id="799" name="t"/>
           <p:cNvSpPr txBox="1"/>
           <p:nvPr/>
         </p:nvSpPr>
@@ -24844,7 +27884,7 @@
       </p:sp>
       <p:sp>
         <p:nvSpPr>
-          <p:cNvPr id="787" name="t"/>
+          <p:cNvPr id="800" name="t"/>
           <p:cNvSpPr txBox="1"/>
           <p:nvPr/>
         </p:nvSpPr>
@@ -24879,7 +27919,7 @@
       </p:sp>
       <p:sp>
         <p:nvSpPr>
-          <p:cNvPr id="788" name="s"/>
+          <p:cNvPr id="801" name="s"/>
           <p:cNvSpPr/>
           <p:nvPr/>
         </p:nvSpPr>
@@ -24928,7 +27968,7 @@
       </p:sp>
       <p:sp>
         <p:nvSpPr>
-          <p:cNvPr id="789" name="s"/>
+          <p:cNvPr id="802" name="s"/>
           <p:cNvSpPr/>
           <p:nvPr/>
         </p:nvSpPr>
@@ -24977,7 +28017,7 @@
       </p:sp>
       <p:sp>
         <p:nvSpPr>
-          <p:cNvPr id="790" name="s"/>
+          <p:cNvPr id="803" name="s"/>
           <p:cNvSpPr/>
           <p:nvPr/>
         </p:nvSpPr>
@@ -25026,7 +28066,7 @@
       </p:sp>
       <p:sp>
         <p:nvSpPr>
-          <p:cNvPr id="791" name="s"/>
+          <p:cNvPr id="804" name="s"/>
           <p:cNvSpPr/>
           <p:nvPr/>
         </p:nvSpPr>
@@ -25075,7 +28115,7 @@
       </p:sp>
       <p:sp>
         <p:nvSpPr>
-          <p:cNvPr id="792" name="s"/>
+          <p:cNvPr id="805" name="s"/>
           <p:cNvSpPr/>
           <p:nvPr/>
         </p:nvSpPr>
@@ -25124,7 +28164,7 @@
       </p:sp>
       <p:sp>
         <p:nvSpPr>
-          <p:cNvPr id="793" name="s"/>
+          <p:cNvPr id="806" name="s"/>
           <p:cNvSpPr/>
           <p:nvPr/>
         </p:nvSpPr>
@@ -25173,7 +28213,7 @@
       </p:sp>
       <p:sp>
         <p:nvSpPr>
-          <p:cNvPr id="794" name="t"/>
+          <p:cNvPr id="807" name="t"/>
           <p:cNvSpPr txBox="1"/>
           <p:nvPr/>
         </p:nvSpPr>

--- a/CylDist_Platform_Presentation.pptx
+++ b/CylDist_Platform_Presentation.pptx
@@ -2,7 +2,7 @@
 <file path=ppt/presentation.xml><?xml version="1.0" encoding="utf-8"?>
 <p:presentation xmlns:a="http://schemas.openxmlformats.org/drawingml/2006/main" xmlns:r="http://schemas.openxmlformats.org/officeDocument/2006/relationships" xmlns:p="http://schemas.openxmlformats.org/presentationml/2006/main">
   <p:sldMasterIdLst>
-    <p:sldMasterId id="2147483648" r:id="rId12"/>
+    <p:sldMasterId id="2147483648" r:id="rId13"/>
   </p:sldMasterIdLst>
   <p:sldIdLst>
     <p:sldId id="256" r:id="rId1"/>
@@ -16,6 +16,7 @@
     <p:sldId id="264" r:id="rId9"/>
     <p:sldId id="265" r:id="rId10"/>
     <p:sldId id="266" r:id="rId11"/>
+    <p:sldId id="267" r:id="rId12"/>
   </p:sldIdLst>
   <p:sldSz cx="12192000" cy="6858000" type="screen16x9"/>
   <p:notesSz cx="6858000" cy="12192000"/>
@@ -6518,6 +6519,3255 @@
 </p:sld>
 </file>
 
+<file path=ppt/slides/slide12.xml><?xml version="1.0" encoding="utf-8"?>
+<p:sld xmlns:a="http://schemas.openxmlformats.org/drawingml/2006/main" xmlns:r="http://schemas.openxmlformats.org/officeDocument/2006/relationships" xmlns:p="http://schemas.openxmlformats.org/presentationml/2006/main">
+  <p:cSld>
+    <p:spTree>
+      <p:nvGrpSpPr>
+        <p:cNvPr id="1" name=""/>
+        <p:cNvGrpSpPr/>
+        <p:nvPr/>
+      </p:nvGrpSpPr>
+      <p:grpSpPr>
+        <a:xfrm>
+          <a:off x="0" y="0"/>
+          <a:ext cx="0" cy="0"/>
+          <a:chOff x="0" y="0"/>
+          <a:chExt cx="0" cy="0"/>
+        </a:xfrm>
+      </p:grpSpPr>
+      <p:sp>
+        <p:nvSpPr>
+          <p:cNvPr id="966" name="r"/>
+          <p:cNvSpPr/>
+          <p:nvPr/>
+        </p:nvSpPr>
+        <p:spPr>
+          <a:xfrm>
+            <a:off x="0" y="0"/>
+            <a:ext cx="12192000" cy="6858000"/>
+          </a:xfrm>
+          <a:prstGeom prst="rect">
+            <a:avLst/>
+          </a:prstGeom>
+          <a:solidFill>
+            <a:srgbClr val="F8FAFC"/>
+          </a:solidFill>
+          <a:ln>
+            <a:noFill/>
+          </a:ln>
+        </p:spPr>
+        <p:txBody>
+          <a:bodyPr/>
+          <a:lstStyle/>
+          <a:p/>
+        </p:txBody>
+      </p:sp>
+      <p:sp>
+        <p:nvSpPr>
+          <p:cNvPr id="967" name="r"/>
+          <p:cNvSpPr/>
+          <p:nvPr/>
+        </p:nvSpPr>
+        <p:spPr>
+          <a:xfrm>
+            <a:off x="0" y="0"/>
+            <a:ext cx="12192000" cy="868680"/>
+          </a:xfrm>
+          <a:prstGeom prst="rect">
+            <a:avLst/>
+          </a:prstGeom>
+          <a:solidFill>
+            <a:srgbClr val="0B1739"/>
+          </a:solidFill>
+          <a:ln>
+            <a:noFill/>
+          </a:ln>
+        </p:spPr>
+        <p:txBody>
+          <a:bodyPr/>
+          <a:lstStyle/>
+          <a:p/>
+        </p:txBody>
+      </p:sp>
+      <p:sp>
+        <p:nvSpPr>
+          <p:cNvPr id="968" name="r"/>
+          <p:cNvSpPr/>
+          <p:nvPr/>
+        </p:nvSpPr>
+        <p:spPr>
+          <a:xfrm>
+            <a:off x="0" y="868680"/>
+            <a:ext cx="12192000" cy="36576"/>
+          </a:xfrm>
+          <a:prstGeom prst="rect">
+            <a:avLst/>
+          </a:prstGeom>
+          <a:solidFill>
+            <a:srgbClr val="F97316"/>
+          </a:solidFill>
+          <a:ln>
+            <a:noFill/>
+          </a:ln>
+        </p:spPr>
+        <p:txBody>
+          <a:bodyPr/>
+          <a:lstStyle/>
+          <a:p/>
+        </p:txBody>
+      </p:sp>
+      <p:sp>
+        <p:nvSpPr>
+          <p:cNvPr id="969" name="t"/>
+          <p:cNvSpPr txBox="1"/>
+          <p:nvPr/>
+        </p:nvSpPr>
+        <p:spPr>
+          <a:xfrm>
+            <a:off x="365760" y="164592"/>
+            <a:ext cx="1828800" cy="640080"/>
+          </a:xfrm>
+          <a:prstGeom prst="rect">
+            <a:avLst/>
+          </a:prstGeom>
+          <a:noFill/>
+        </p:spPr>
+        <p:txBody>
+          <a:bodyPr wrap="square" anchor="t" rtlCol="0"/>
+          <a:lstStyle/>
+          <a:p>
+            <a:pPr algn="l">
+              <a:buNone/>
+            </a:pPr>
+            <a:r>
+              <a:rPr lang="en-US" sz="3600" b="1" dirty="0">
+                <a:solidFill>
+                  <a:srgbClr val="F97316"/>
+                </a:solidFill>
+                <a:latin typeface="Calibri"/>
+              </a:rPr>
+              <a:t>12</a:t>
+            </a:r>
+          </a:p>
+        </p:txBody>
+      </p:sp>
+      <p:sp>
+        <p:nvSpPr>
+          <p:cNvPr id="970" name="t"/>
+          <p:cNvSpPr txBox="1"/>
+          <p:nvPr/>
+        </p:nvSpPr>
+        <p:spPr>
+          <a:xfrm>
+            <a:off x="1188720" y="164592"/>
+            <a:ext cx="10058400" cy="292608"/>
+          </a:xfrm>
+          <a:prstGeom prst="rect">
+            <a:avLst/>
+          </a:prstGeom>
+          <a:noFill/>
+        </p:spPr>
+        <p:txBody>
+          <a:bodyPr wrap="square" anchor="t" rtlCol="0"/>
+          <a:lstStyle/>
+          <a:p>
+            <a:pPr algn="l">
+              <a:buNone/>
+            </a:pPr>
+            <a:r>
+              <a:rPr lang="en-US" sz="1000" b="1" dirty="0">
+                <a:solidFill>
+                  <a:srgbClr val="FBBF24"/>
+                </a:solidFill>
+                <a:latin typeface="Calibri"/>
+              </a:rPr>
+              <a:t>DEEP DIVE  |  PLATFORM ARCHITECTURE</a:t>
+            </a:r>
+          </a:p>
+        </p:txBody>
+      </p:sp>
+      <p:sp>
+        <p:nvSpPr>
+          <p:cNvPr id="971" name="t"/>
+          <p:cNvSpPr txBox="1"/>
+          <p:nvPr/>
+        </p:nvSpPr>
+        <p:spPr>
+          <a:xfrm>
+            <a:off x="1188720" y="457200"/>
+            <a:ext cx="10515600" cy="411480"/>
+          </a:xfrm>
+          <a:prstGeom prst="rect">
+            <a:avLst/>
+          </a:prstGeom>
+          <a:noFill/>
+        </p:spPr>
+        <p:txBody>
+          <a:bodyPr wrap="square" anchor="t" rtlCol="0"/>
+          <a:lstStyle/>
+          <a:p>
+            <a:pPr algn="l">
+              <a:buNone/>
+            </a:pPr>
+            <a:r>
+              <a:rPr lang="en-US" sz="1700" b="1" dirty="0">
+                <a:solidFill>
+                  <a:srgbClr val="FFFFFF"/>
+                </a:solidFill>
+                <a:latin typeface="Calibri"/>
+              </a:rPr>
+              <a:t>System Architecture &amp; Design</a:t>
+            </a:r>
+          </a:p>
+        </p:txBody>
+      </p:sp>
+      <p:sp>
+        <p:nvSpPr>
+          <p:cNvPr id="972" name="t"/>
+          <p:cNvSpPr txBox="1"/>
+          <p:nvPr/>
+        </p:nvSpPr>
+        <p:spPr>
+          <a:xfrm>
+            <a:off x="457200" y="960120"/>
+            <a:ext cx="11430000" cy="274320"/>
+          </a:xfrm>
+          <a:prstGeom prst="rect">
+            <a:avLst/>
+          </a:prstGeom>
+          <a:noFill/>
+        </p:spPr>
+        <p:txBody>
+          <a:bodyPr wrap="square" anchor="t" rtlCol="0"/>
+          <a:lstStyle/>
+          <a:p>
+            <a:pPr algn="l">
+              <a:buNone/>
+            </a:pPr>
+            <a:r>
+              <a:rPr lang="en-US" sz="1000" dirty="0">
+                <a:solidFill>
+                  <a:srgbClr val="475569"/>
+                </a:solidFill>
+                <a:latin typeface="Calibri"/>
+              </a:rPr>
+              <a:t>Three-tier architecture:  Client Layer  -&gt;  API Gateway  -&gt;  Data + External Services</a:t>
+            </a:r>
+          </a:p>
+        </p:txBody>
+      </p:sp>
+      <p:sp>
+        <p:nvSpPr>
+          <p:cNvPr id="973" name="s"/>
+          <p:cNvSpPr/>
+          <p:nvPr/>
+        </p:nvSpPr>
+        <p:spPr>
+          <a:xfrm>
+            <a:off x="365760" y="1280160"/>
+            <a:ext cx="11430000" cy="914400"/>
+          </a:xfrm>
+          <a:prstGeom prst="roundRect">
+            <a:avLst>
+              <a:gd name="adj" fmla="val 8000"/>
+            </a:avLst>
+          </a:prstGeom>
+          <a:solidFill>
+            <a:srgbClr val="FFFFFF"/>
+          </a:solidFill>
+          <a:ln>
+            <a:noFill/>
+          </a:ln>
+          <a:effectLst>
+            <a:outerShdw blurRad="50800" dist="38100" dir="2700000" rotWithShape="0">
+              <a:srgbClr val="000000">
+                <a:alpha val="35000"/>
+              </a:srgbClr>
+            </a:outerShdw>
+          </a:effectLst>
+        </p:spPr>
+        <p:txBody>
+          <a:bodyPr wrap="square" anchor="ctr" rtlCol="0" lIns="91440" tIns="91440" rIns="91440" bIns="91440"/>
+          <a:lstStyle/>
+          <a:p/>
+        </p:txBody>
+      </p:sp>
+      <p:sp>
+        <p:nvSpPr>
+          <p:cNvPr id="974" name="r"/>
+          <p:cNvSpPr/>
+          <p:nvPr/>
+        </p:nvSpPr>
+        <p:spPr>
+          <a:xfrm>
+            <a:off x="365760" y="1280160"/>
+            <a:ext cx="11430000" cy="54864"/>
+          </a:xfrm>
+          <a:prstGeom prst="rect">
+            <a:avLst/>
+          </a:prstGeom>
+          <a:solidFill>
+            <a:srgbClr val="3B82F6"/>
+          </a:solidFill>
+          <a:ln>
+            <a:noFill/>
+          </a:ln>
+        </p:spPr>
+        <p:txBody>
+          <a:bodyPr/>
+          <a:lstStyle/>
+          <a:p/>
+        </p:txBody>
+      </p:sp>
+      <p:sp>
+        <p:nvSpPr>
+          <p:cNvPr id="975" name="t"/>
+          <p:cNvSpPr txBox="1"/>
+          <p:nvPr/>
+        </p:nvSpPr>
+        <p:spPr>
+          <a:xfrm>
+            <a:off x="548640" y="1353312"/>
+            <a:ext cx="6400800" cy="274320"/>
+          </a:xfrm>
+          <a:prstGeom prst="rect">
+            <a:avLst/>
+          </a:prstGeom>
+          <a:noFill/>
+        </p:spPr>
+        <p:txBody>
+          <a:bodyPr wrap="square" anchor="t" rtlCol="0"/>
+          <a:lstStyle/>
+          <a:p>
+            <a:pPr algn="l">
+              <a:buNone/>
+            </a:pPr>
+            <a:r>
+              <a:rPr lang="en-US" sz="1000" b="1" dirty="0">
+                <a:solidFill>
+                  <a:srgbClr val="3B82F6"/>
+                </a:solidFill>
+                <a:latin typeface="Calibri"/>
+              </a:rPr>
+              <a:t>[ TIER 1 ]  CLIENT LAYER  -  React 19</a:t>
+            </a:r>
+          </a:p>
+        </p:txBody>
+      </p:sp>
+      <p:sp>
+        <p:nvSpPr>
+          <p:cNvPr id="976" name="s"/>
+          <p:cNvSpPr/>
+          <p:nvPr/>
+        </p:nvSpPr>
+        <p:spPr>
+          <a:xfrm>
+            <a:off x="548640" y="1645920"/>
+            <a:ext cx="3611880" cy="365760"/>
+          </a:xfrm>
+          <a:prstGeom prst="roundRect">
+            <a:avLst>
+              <a:gd name="adj" fmla="val 6000"/>
+            </a:avLst>
+          </a:prstGeom>
+          <a:solidFill>
+            <a:srgbClr val="3B82F6"/>
+          </a:solidFill>
+          <a:ln>
+            <a:noFill/>
+          </a:ln>
+          <a:effectLst>
+            <a:outerShdw blurRad="50800" dist="38100" dir="2700000" rotWithShape="0">
+              <a:srgbClr val="000000">
+                <a:alpha val="35000"/>
+              </a:srgbClr>
+            </a:outerShdw>
+          </a:effectLst>
+        </p:spPr>
+        <p:txBody>
+          <a:bodyPr wrap="square" anchor="ctr" rtlCol="0" lIns="91440" tIns="91440" rIns="91440" bIns="91440"/>
+          <a:lstStyle/>
+          <a:p>
+            <a:pPr algn="ctr">
+              <a:buNone/>
+            </a:pPr>
+            <a:r>
+              <a:rPr lang="en-US" sz="1100" b="1" dirty="0">
+                <a:solidFill>
+                  <a:srgbClr val="FFFFFF"/>
+                </a:solidFill>
+                <a:latin typeface="Calibri"/>
+              </a:rPr>
+              <a:t>CUSTOMER APP</a:t>
+            </a:r>
+          </a:p>
+        </p:txBody>
+      </p:sp>
+      <p:sp>
+        <p:nvSpPr>
+          <p:cNvPr id="977" name="t"/>
+          <p:cNvSpPr txBox="1"/>
+          <p:nvPr/>
+        </p:nvSpPr>
+        <p:spPr>
+          <a:xfrm>
+            <a:off x="548640" y="2011680"/>
+            <a:ext cx="3611880" cy="164592"/>
+          </a:xfrm>
+          <a:prstGeom prst="rect">
+            <a:avLst/>
+          </a:prstGeom>
+          <a:noFill/>
+        </p:spPr>
+        <p:txBody>
+          <a:bodyPr wrap="square" anchor="t" rtlCol="0"/>
+          <a:lstStyle/>
+          <a:p>
+            <a:pPr algn="ctr">
+              <a:buNone/>
+            </a:pPr>
+            <a:r>
+              <a:rPr lang="en-US" sz="800" dirty="0">
+                <a:solidFill>
+                  <a:srgbClr val="475569"/>
+                </a:solidFill>
+                <a:latin typeface="Calibri"/>
+              </a:rPr>
+              <a:t>Book  -  Track  -  Chat  -  Rate</a:t>
+            </a:r>
+          </a:p>
+        </p:txBody>
+      </p:sp>
+      <p:sp>
+        <p:nvSpPr>
+          <p:cNvPr id="978" name="s"/>
+          <p:cNvSpPr/>
+          <p:nvPr/>
+        </p:nvSpPr>
+        <p:spPr>
+          <a:xfrm>
+            <a:off x="4343400" y="1645920"/>
+            <a:ext cx="3611880" cy="365760"/>
+          </a:xfrm>
+          <a:prstGeom prst="roundRect">
+            <a:avLst>
+              <a:gd name="adj" fmla="val 6000"/>
+            </a:avLst>
+          </a:prstGeom>
+          <a:solidFill>
+            <a:srgbClr val="F97316"/>
+          </a:solidFill>
+          <a:ln>
+            <a:noFill/>
+          </a:ln>
+          <a:effectLst>
+            <a:outerShdw blurRad="50800" dist="38100" dir="2700000" rotWithShape="0">
+              <a:srgbClr val="000000">
+                <a:alpha val="35000"/>
+              </a:srgbClr>
+            </a:outerShdw>
+          </a:effectLst>
+        </p:spPr>
+        <p:txBody>
+          <a:bodyPr wrap="square" anchor="ctr" rtlCol="0" lIns="91440" tIns="91440" rIns="91440" bIns="91440"/>
+          <a:lstStyle/>
+          <a:p>
+            <a:pPr algn="ctr">
+              <a:buNone/>
+            </a:pPr>
+            <a:r>
+              <a:rPr lang="en-US" sz="1100" b="1" dirty="0">
+                <a:solidFill>
+                  <a:srgbClr val="FFFFFF"/>
+                </a:solidFill>
+                <a:latin typeface="Calibri"/>
+              </a:rPr>
+              <a:t>ADMIN PANEL</a:t>
+            </a:r>
+          </a:p>
+        </p:txBody>
+      </p:sp>
+      <p:sp>
+        <p:nvSpPr>
+          <p:cNvPr id="979" name="t"/>
+          <p:cNvSpPr txBox="1"/>
+          <p:nvPr/>
+        </p:nvSpPr>
+        <p:spPr>
+          <a:xfrm>
+            <a:off x="4343400" y="2011680"/>
+            <a:ext cx="3611880" cy="164592"/>
+          </a:xfrm>
+          <a:prstGeom prst="rect">
+            <a:avLst/>
+          </a:prstGeom>
+          <a:noFill/>
+        </p:spPr>
+        <p:txBody>
+          <a:bodyPr wrap="square" anchor="t" rtlCol="0"/>
+          <a:lstStyle/>
+          <a:p>
+            <a:pPr algn="ctr">
+              <a:buNone/>
+            </a:pPr>
+            <a:r>
+              <a:rPr lang="en-US" sz="800" dirty="0">
+                <a:solidFill>
+                  <a:srgbClr val="475569"/>
+                </a:solidFill>
+                <a:latin typeface="Calibri"/>
+              </a:rPr>
+              <a:t>Dispatch  -  Crisis  -  Analytics</a:t>
+            </a:r>
+          </a:p>
+        </p:txBody>
+      </p:sp>
+      <p:sp>
+        <p:nvSpPr>
+          <p:cNvPr id="980" name="s"/>
+          <p:cNvSpPr/>
+          <p:nvPr/>
+        </p:nvSpPr>
+        <p:spPr>
+          <a:xfrm>
+            <a:off x="8138160" y="1645920"/>
+            <a:ext cx="3611880" cy="365760"/>
+          </a:xfrm>
+          <a:prstGeom prst="roundRect">
+            <a:avLst>
+              <a:gd name="adj" fmla="val 6000"/>
+            </a:avLst>
+          </a:prstGeom>
+          <a:solidFill>
+            <a:srgbClr val="10B981"/>
+          </a:solidFill>
+          <a:ln>
+            <a:noFill/>
+          </a:ln>
+          <a:effectLst>
+            <a:outerShdw blurRad="50800" dist="38100" dir="2700000" rotWithShape="0">
+              <a:srgbClr val="000000">
+                <a:alpha val="35000"/>
+              </a:srgbClr>
+            </a:outerShdw>
+          </a:effectLst>
+        </p:spPr>
+        <p:txBody>
+          <a:bodyPr wrap="square" anchor="ctr" rtlCol="0" lIns="91440" tIns="91440" rIns="91440" bIns="91440"/>
+          <a:lstStyle/>
+          <a:p>
+            <a:pPr algn="ctr">
+              <a:buNone/>
+            </a:pPr>
+            <a:r>
+              <a:rPr lang="en-US" sz="1100" b="1" dirty="0">
+                <a:solidFill>
+                  <a:srgbClr val="FFFFFF"/>
+                </a:solidFill>
+                <a:latin typeface="Calibri"/>
+              </a:rPr>
+              <a:t>AGENT APP</a:t>
+            </a:r>
+          </a:p>
+        </p:txBody>
+      </p:sp>
+      <p:sp>
+        <p:nvSpPr>
+          <p:cNvPr id="981" name="t"/>
+          <p:cNvSpPr txBox="1"/>
+          <p:nvPr/>
+        </p:nvSpPr>
+        <p:spPr>
+          <a:xfrm>
+            <a:off x="8138160" y="2011680"/>
+            <a:ext cx="3611880" cy="164592"/>
+          </a:xfrm>
+          <a:prstGeom prst="rect">
+            <a:avLst/>
+          </a:prstGeom>
+          <a:noFill/>
+        </p:spPr>
+        <p:txBody>
+          <a:bodyPr wrap="square" anchor="t" rtlCol="0"/>
+          <a:lstStyle/>
+          <a:p>
+            <a:pPr algn="ctr">
+              <a:buNone/>
+            </a:pPr>
+            <a:r>
+              <a:rPr lang="en-US" sz="800" dirty="0">
+                <a:solidFill>
+                  <a:srgbClr val="475569"/>
+                </a:solidFill>
+                <a:latin typeface="Calibri"/>
+              </a:rPr>
+              <a:t>GPS  -  Photo Proof  -  Chat</a:t>
+            </a:r>
+          </a:p>
+        </p:txBody>
+      </p:sp>
+      <p:sp>
+        <p:nvSpPr>
+          <p:cNvPr id="982" name="t"/>
+          <p:cNvSpPr txBox="1"/>
+          <p:nvPr/>
+        </p:nvSpPr>
+        <p:spPr>
+          <a:xfrm>
+            <a:off x="2286000" y="2240280"/>
+            <a:ext cx="1828800" cy="182880"/>
+          </a:xfrm>
+          <a:prstGeom prst="rect">
+            <a:avLst/>
+          </a:prstGeom>
+          <a:noFill/>
+        </p:spPr>
+        <p:txBody>
+          <a:bodyPr wrap="square" anchor="t" rtlCol="0"/>
+          <a:lstStyle/>
+          <a:p>
+            <a:pPr algn="ctr">
+              <a:buNone/>
+            </a:pPr>
+            <a:r>
+              <a:rPr lang="en-US" sz="800" b="1" dirty="0">
+                <a:solidFill>
+                  <a:srgbClr val="94A3B8"/>
+                </a:solidFill>
+                <a:latin typeface="Calibri"/>
+              </a:rPr>
+              <a:t>HTTP REST</a:t>
+            </a:r>
+          </a:p>
+        </p:txBody>
+      </p:sp>
+      <p:cxnSp>
+        <p:nvCxnSpPr>
+          <p:cNvPr id="983" name="ln"/>
+          <p:cNvCxnSpPr/>
+          <p:nvPr/>
+        </p:nvCxnSpPr>
+        <p:spPr>
+          <a:xfrm flipH="0" flipV="0">
+            <a:off x="3200400" y="2194560"/>
+            <a:ext cx="1" cy="228600"/>
+          </a:xfrm>
+          <a:prstGeom prst="line">
+            <a:avLst/>
+          </a:prstGeom>
+          <a:ln w="15000">
+            <a:solidFill>
+              <a:srgbClr val="94A3B8"/>
+            </a:solidFill>
+          </a:ln>
+        </p:spPr>
+      </p:cxnSp>
+      <p:sp>
+        <p:nvSpPr>
+          <p:cNvPr id="984" name="t"/>
+          <p:cNvSpPr txBox="1"/>
+          <p:nvPr/>
+        </p:nvSpPr>
+        <p:spPr>
+          <a:xfrm>
+            <a:off x="7772400" y="2240280"/>
+            <a:ext cx="1828800" cy="182880"/>
+          </a:xfrm>
+          <a:prstGeom prst="rect">
+            <a:avLst/>
+          </a:prstGeom>
+          <a:noFill/>
+        </p:spPr>
+        <p:txBody>
+          <a:bodyPr wrap="square" anchor="t" rtlCol="0"/>
+          <a:lstStyle/>
+          <a:p>
+            <a:pPr algn="ctr">
+              <a:buNone/>
+            </a:pPr>
+            <a:r>
+              <a:rPr lang="en-US" sz="800" b="1" dirty="0">
+                <a:solidFill>
+                  <a:srgbClr val="94A3B8"/>
+                </a:solidFill>
+                <a:latin typeface="Calibri"/>
+              </a:rPr>
+              <a:t>WebSocket (Socket.IO)</a:t>
+            </a:r>
+          </a:p>
+        </p:txBody>
+      </p:sp>
+      <p:cxnSp>
+        <p:nvCxnSpPr>
+          <p:cNvPr id="985" name="ln"/>
+          <p:cNvCxnSpPr/>
+          <p:nvPr/>
+        </p:nvCxnSpPr>
+        <p:spPr>
+          <a:xfrm flipH="0" flipV="0">
+            <a:off x="8686800" y="2194560"/>
+            <a:ext cx="1" cy="228600"/>
+          </a:xfrm>
+          <a:prstGeom prst="line">
+            <a:avLst/>
+          </a:prstGeom>
+          <a:ln w="15000">
+            <a:solidFill>
+              <a:srgbClr val="94A3B8"/>
+            </a:solidFill>
+          </a:ln>
+        </p:spPr>
+      </p:cxnSp>
+      <p:sp>
+        <p:nvSpPr>
+          <p:cNvPr id="986" name="s"/>
+          <p:cNvSpPr/>
+          <p:nvPr/>
+        </p:nvSpPr>
+        <p:spPr>
+          <a:xfrm>
+            <a:off x="365760" y="2423160"/>
+            <a:ext cx="11430000" cy="1280160"/>
+          </a:xfrm>
+          <a:prstGeom prst="roundRect">
+            <a:avLst>
+              <a:gd name="adj" fmla="val 8000"/>
+            </a:avLst>
+          </a:prstGeom>
+          <a:solidFill>
+            <a:srgbClr val="0B1739"/>
+          </a:solidFill>
+          <a:ln>
+            <a:noFill/>
+          </a:ln>
+          <a:effectLst>
+            <a:outerShdw blurRad="50800" dist="38100" dir="2700000" rotWithShape="0">
+              <a:srgbClr val="000000">
+                <a:alpha val="35000"/>
+              </a:srgbClr>
+            </a:outerShdw>
+          </a:effectLst>
+        </p:spPr>
+        <p:txBody>
+          <a:bodyPr wrap="square" anchor="ctr" rtlCol="0" lIns="91440" tIns="91440" rIns="91440" bIns="91440"/>
+          <a:lstStyle/>
+          <a:p/>
+        </p:txBody>
+      </p:sp>
+      <p:sp>
+        <p:nvSpPr>
+          <p:cNvPr id="987" name="r"/>
+          <p:cNvSpPr/>
+          <p:nvPr/>
+        </p:nvSpPr>
+        <p:spPr>
+          <a:xfrm>
+            <a:off x="365760" y="2423160"/>
+            <a:ext cx="11430000" cy="54864"/>
+          </a:xfrm>
+          <a:prstGeom prst="rect">
+            <a:avLst/>
+          </a:prstGeom>
+          <a:solidFill>
+            <a:srgbClr val="F97316"/>
+          </a:solidFill>
+          <a:ln>
+            <a:noFill/>
+          </a:ln>
+        </p:spPr>
+        <p:txBody>
+          <a:bodyPr/>
+          <a:lstStyle/>
+          <a:p/>
+        </p:txBody>
+      </p:sp>
+      <p:sp>
+        <p:nvSpPr>
+          <p:cNvPr id="988" name="t"/>
+          <p:cNvSpPr txBox="1"/>
+          <p:nvPr/>
+        </p:nvSpPr>
+        <p:spPr>
+          <a:xfrm>
+            <a:off x="548640" y="2496312"/>
+            <a:ext cx="7315200" cy="274320"/>
+          </a:xfrm>
+          <a:prstGeom prst="rect">
+            <a:avLst/>
+          </a:prstGeom>
+          <a:noFill/>
+        </p:spPr>
+        <p:txBody>
+          <a:bodyPr wrap="square" anchor="t" rtlCol="0"/>
+          <a:lstStyle/>
+          <a:p>
+            <a:pPr algn="l">
+              <a:buNone/>
+            </a:pPr>
+            <a:r>
+              <a:rPr lang="en-US" sz="1000" b="1" dirty="0">
+                <a:solidFill>
+                  <a:srgbClr val="FBBF24"/>
+                </a:solidFill>
+                <a:latin typeface="Calibri"/>
+              </a:rPr>
+              <a:t>[ TIER 2 ]  API GATEWAY  -  Node.js + Express + Socket.IO</a:t>
+            </a:r>
+          </a:p>
+        </p:txBody>
+      </p:sp>
+      <p:sp>
+        <p:nvSpPr>
+          <p:cNvPr id="989" name="s"/>
+          <p:cNvSpPr/>
+          <p:nvPr/>
+        </p:nvSpPr>
+        <p:spPr>
+          <a:xfrm>
+            <a:off x="548640" y="2788920"/>
+            <a:ext cx="1188720" cy="292608"/>
+          </a:xfrm>
+          <a:prstGeom prst="roundRect">
+            <a:avLst>
+              <a:gd name="adj" fmla="val 20000"/>
+            </a:avLst>
+          </a:prstGeom>
+          <a:solidFill>
+            <a:srgbClr val="3B82F6"/>
+          </a:solidFill>
+          <a:ln>
+            <a:noFill/>
+          </a:ln>
+        </p:spPr>
+        <p:txBody>
+          <a:bodyPr wrap="square" anchor="ctr" rtlCol="0" lIns="91440" tIns="91440" rIns="91440" bIns="91440"/>
+          <a:lstStyle/>
+          <a:p>
+            <a:pPr algn="ctr">
+              <a:buNone/>
+            </a:pPr>
+            <a:r>
+              <a:rPr lang="en-US" sz="900" b="1" dirty="0">
+                <a:solidFill>
+                  <a:srgbClr val="FFFFFF"/>
+                </a:solidFill>
+                <a:latin typeface="Calibri"/>
+              </a:rPr>
+              <a:t>Auth</a:t>
+            </a:r>
+          </a:p>
+        </p:txBody>
+      </p:sp>
+      <p:sp>
+        <p:nvSpPr>
+          <p:cNvPr id="990" name="s"/>
+          <p:cNvSpPr/>
+          <p:nvPr/>
+        </p:nvSpPr>
+        <p:spPr>
+          <a:xfrm>
+            <a:off x="1792224" y="2788920"/>
+            <a:ext cx="1188720" cy="292608"/>
+          </a:xfrm>
+          <a:prstGeom prst="roundRect">
+            <a:avLst>
+              <a:gd name="adj" fmla="val 20000"/>
+            </a:avLst>
+          </a:prstGeom>
+          <a:solidFill>
+            <a:srgbClr val="F97316"/>
+          </a:solidFill>
+          <a:ln>
+            <a:noFill/>
+          </a:ln>
+        </p:spPr>
+        <p:txBody>
+          <a:bodyPr wrap="square" anchor="ctr" rtlCol="0" lIns="91440" tIns="91440" rIns="91440" bIns="91440"/>
+          <a:lstStyle/>
+          <a:p>
+            <a:pPr algn="ctr">
+              <a:buNone/>
+            </a:pPr>
+            <a:r>
+              <a:rPr lang="en-US" sz="900" b="1" dirty="0">
+                <a:solidFill>
+                  <a:srgbClr val="FFFFFF"/>
+                </a:solidFill>
+                <a:latin typeface="Calibri"/>
+              </a:rPr>
+              <a:t>Orders</a:t>
+            </a:r>
+          </a:p>
+        </p:txBody>
+      </p:sp>
+      <p:sp>
+        <p:nvSpPr>
+          <p:cNvPr id="991" name="s"/>
+          <p:cNvSpPr/>
+          <p:nvPr/>
+        </p:nvSpPr>
+        <p:spPr>
+          <a:xfrm>
+            <a:off x="3035808" y="2788920"/>
+            <a:ext cx="1188720" cy="292608"/>
+          </a:xfrm>
+          <a:prstGeom prst="roundRect">
+            <a:avLst>
+              <a:gd name="adj" fmla="val 20000"/>
+            </a:avLst>
+          </a:prstGeom>
+          <a:solidFill>
+            <a:srgbClr val="8B5CF6"/>
+          </a:solidFill>
+          <a:ln>
+            <a:noFill/>
+          </a:ln>
+        </p:spPr>
+        <p:txBody>
+          <a:bodyPr wrap="square" anchor="ctr" rtlCol="0" lIns="91440" tIns="91440" rIns="91440" bIns="91440"/>
+          <a:lstStyle/>
+          <a:p>
+            <a:pPr algn="ctr">
+              <a:buNone/>
+            </a:pPr>
+            <a:r>
+              <a:rPr lang="en-US" sz="900" b="1" dirty="0">
+                <a:solidFill>
+                  <a:srgbClr val="FFFFFF"/>
+                </a:solidFill>
+                <a:latin typeface="Calibri"/>
+              </a:rPr>
+              <a:t>Dispatch</a:t>
+            </a:r>
+          </a:p>
+        </p:txBody>
+      </p:sp>
+      <p:sp>
+        <p:nvSpPr>
+          <p:cNvPr id="992" name="s"/>
+          <p:cNvSpPr/>
+          <p:nvPr/>
+        </p:nvSpPr>
+        <p:spPr>
+          <a:xfrm>
+            <a:off x="4279392" y="2788920"/>
+            <a:ext cx="1188720" cy="292608"/>
+          </a:xfrm>
+          <a:prstGeom prst="roundRect">
+            <a:avLst>
+              <a:gd name="adj" fmla="val 20000"/>
+            </a:avLst>
+          </a:prstGeom>
+          <a:solidFill>
+            <a:srgbClr val="EF4444"/>
+          </a:solidFill>
+          <a:ln>
+            <a:noFill/>
+          </a:ln>
+        </p:spPr>
+        <p:txBody>
+          <a:bodyPr wrap="square" anchor="ctr" rtlCol="0" lIns="91440" tIns="91440" rIns="91440" bIns="91440"/>
+          <a:lstStyle/>
+          <a:p>
+            <a:pPr algn="ctr">
+              <a:buNone/>
+            </a:pPr>
+            <a:r>
+              <a:rPr lang="en-US" sz="900" b="1" dirty="0">
+                <a:solidFill>
+                  <a:srgbClr val="FFFFFF"/>
+                </a:solidFill>
+                <a:latin typeface="Calibri"/>
+              </a:rPr>
+              <a:t>Crisis</a:t>
+            </a:r>
+          </a:p>
+        </p:txBody>
+      </p:sp>
+      <p:sp>
+        <p:nvSpPr>
+          <p:cNvPr id="993" name="s"/>
+          <p:cNvSpPr/>
+          <p:nvPr/>
+        </p:nvSpPr>
+        <p:spPr>
+          <a:xfrm>
+            <a:off x="5522976" y="2788920"/>
+            <a:ext cx="1188720" cy="292608"/>
+          </a:xfrm>
+          <a:prstGeom prst="roundRect">
+            <a:avLst>
+              <a:gd name="adj" fmla="val 20000"/>
+            </a:avLst>
+          </a:prstGeom>
+          <a:solidFill>
+            <a:srgbClr val="14B8A6"/>
+          </a:solidFill>
+          <a:ln>
+            <a:noFill/>
+          </a:ln>
+        </p:spPr>
+        <p:txBody>
+          <a:bodyPr wrap="square" anchor="ctr" rtlCol="0" lIns="91440" tIns="91440" rIns="91440" bIns="91440"/>
+          <a:lstStyle/>
+          <a:p>
+            <a:pPr algn="ctr">
+              <a:buNone/>
+            </a:pPr>
+            <a:r>
+              <a:rPr lang="en-US" sz="900" b="1" dirty="0">
+                <a:solidFill>
+                  <a:srgbClr val="FFFFFF"/>
+                </a:solidFill>
+                <a:latin typeface="Calibri"/>
+              </a:rPr>
+              <a:t>Chat</a:t>
+            </a:r>
+          </a:p>
+        </p:txBody>
+      </p:sp>
+      <p:sp>
+        <p:nvSpPr>
+          <p:cNvPr id="994" name="s"/>
+          <p:cNvSpPr/>
+          <p:nvPr/>
+        </p:nvSpPr>
+        <p:spPr>
+          <a:xfrm>
+            <a:off x="6766560" y="2788920"/>
+            <a:ext cx="1188720" cy="292608"/>
+          </a:xfrm>
+          <a:prstGeom prst="roundRect">
+            <a:avLst>
+              <a:gd name="adj" fmla="val 20000"/>
+            </a:avLst>
+          </a:prstGeom>
+          <a:solidFill>
+            <a:srgbClr val="10B981"/>
+          </a:solidFill>
+          <a:ln>
+            <a:noFill/>
+          </a:ln>
+        </p:spPr>
+        <p:txBody>
+          <a:bodyPr wrap="square" anchor="ctr" rtlCol="0" lIns="91440" tIns="91440" rIns="91440" bIns="91440"/>
+          <a:lstStyle/>
+          <a:p>
+            <a:pPr algn="ctr">
+              <a:buNone/>
+            </a:pPr>
+            <a:r>
+              <a:rPr lang="en-US" sz="900" b="1" dirty="0">
+                <a:solidFill>
+                  <a:srgbClr val="FFFFFF"/>
+                </a:solidFill>
+                <a:latin typeface="Calibri"/>
+              </a:rPr>
+              <a:t>Inventory</a:t>
+            </a:r>
+          </a:p>
+        </p:txBody>
+      </p:sp>
+      <p:sp>
+        <p:nvSpPr>
+          <p:cNvPr id="995" name="s"/>
+          <p:cNvSpPr/>
+          <p:nvPr/>
+        </p:nvSpPr>
+        <p:spPr>
+          <a:xfrm>
+            <a:off x="8010144" y="2788920"/>
+            <a:ext cx="1188720" cy="292608"/>
+          </a:xfrm>
+          <a:prstGeom prst="roundRect">
+            <a:avLst>
+              <a:gd name="adj" fmla="val 20000"/>
+            </a:avLst>
+          </a:prstGeom>
+          <a:solidFill>
+            <a:srgbClr val="FBBF24"/>
+          </a:solidFill>
+          <a:ln>
+            <a:noFill/>
+          </a:ln>
+        </p:spPr>
+        <p:txBody>
+          <a:bodyPr wrap="square" anchor="ctr" rtlCol="0" lIns="91440" tIns="91440" rIns="91440" bIns="91440"/>
+          <a:lstStyle/>
+          <a:p>
+            <a:pPr algn="ctr">
+              <a:buNone/>
+            </a:pPr>
+            <a:r>
+              <a:rPr lang="en-US" sz="900" b="1" dirty="0">
+                <a:solidFill>
+                  <a:srgbClr val="FFFFFF"/>
+                </a:solidFill>
+                <a:latin typeface="Calibri"/>
+              </a:rPr>
+              <a:t>Delivery</a:t>
+            </a:r>
+          </a:p>
+        </p:txBody>
+      </p:sp>
+      <p:sp>
+        <p:nvSpPr>
+          <p:cNvPr id="996" name="s"/>
+          <p:cNvSpPr/>
+          <p:nvPr/>
+        </p:nvSpPr>
+        <p:spPr>
+          <a:xfrm>
+            <a:off x="9253728" y="2788920"/>
+            <a:ext cx="1188720" cy="292608"/>
+          </a:xfrm>
+          <a:prstGeom prst="roundRect">
+            <a:avLst>
+              <a:gd name="adj" fmla="val 20000"/>
+            </a:avLst>
+          </a:prstGeom>
+          <a:solidFill>
+            <a:srgbClr val="EA580C"/>
+          </a:solidFill>
+          <a:ln>
+            <a:noFill/>
+          </a:ln>
+        </p:spPr>
+        <p:txBody>
+          <a:bodyPr wrap="square" anchor="ctr" rtlCol="0" lIns="91440" tIns="91440" rIns="91440" bIns="91440"/>
+          <a:lstStyle/>
+          <a:p>
+            <a:pPr algn="ctr">
+              <a:buNone/>
+            </a:pPr>
+            <a:r>
+              <a:rPr lang="en-US" sz="900" b="1" dirty="0">
+                <a:solidFill>
+                  <a:srgbClr val="FFFFFF"/>
+                </a:solidFill>
+                <a:latin typeface="Calibri"/>
+              </a:rPr>
+              <a:t>Notify</a:t>
+            </a:r>
+          </a:p>
+        </p:txBody>
+      </p:sp>
+      <p:sp>
+        <p:nvSpPr>
+          <p:cNvPr id="997" name="s"/>
+          <p:cNvSpPr/>
+          <p:nvPr/>
+        </p:nvSpPr>
+        <p:spPr>
+          <a:xfrm>
+            <a:off x="10497312" y="2788920"/>
+            <a:ext cx="1188720" cy="292608"/>
+          </a:xfrm>
+          <a:prstGeom prst="roundRect">
+            <a:avLst>
+              <a:gd name="adj" fmla="val 20000"/>
+            </a:avLst>
+          </a:prstGeom>
+          <a:solidFill>
+            <a:srgbClr val="8B5CF6"/>
+          </a:solidFill>
+          <a:ln>
+            <a:noFill/>
+          </a:ln>
+        </p:spPr>
+        <p:txBody>
+          <a:bodyPr wrap="square" anchor="ctr" rtlCol="0" lIns="91440" tIns="91440" rIns="91440" bIns="91440"/>
+          <a:lstStyle/>
+          <a:p>
+            <a:pPr algn="ctr">
+              <a:buNone/>
+            </a:pPr>
+            <a:r>
+              <a:rPr lang="en-US" sz="900" b="1" dirty="0">
+                <a:solidFill>
+                  <a:srgbClr val="FFFFFF"/>
+                </a:solidFill>
+                <a:latin typeface="Calibri"/>
+              </a:rPr>
+              <a:t>Support</a:t>
+            </a:r>
+          </a:p>
+        </p:txBody>
+      </p:sp>
+      <p:sp>
+        <p:nvSpPr>
+          <p:cNvPr id="998" name="t"/>
+          <p:cNvSpPr txBox="1"/>
+          <p:nvPr/>
+        </p:nvSpPr>
+        <p:spPr>
+          <a:xfrm>
+            <a:off x="548640" y="3172968"/>
+            <a:ext cx="3657600" cy="201168"/>
+          </a:xfrm>
+          <a:prstGeom prst="rect">
+            <a:avLst/>
+          </a:prstGeom>
+          <a:noFill/>
+        </p:spPr>
+        <p:txBody>
+          <a:bodyPr wrap="square" anchor="t" rtlCol="0"/>
+          <a:lstStyle/>
+          <a:p>
+            <a:pPr algn="l">
+              <a:buNone/>
+            </a:pPr>
+            <a:r>
+              <a:rPr lang="en-US" sz="800" b="1" dirty="0">
+                <a:solidFill>
+                  <a:srgbClr val="FBBF24"/>
+                </a:solidFill>
+                <a:latin typeface="Calibri"/>
+              </a:rPr>
+              <a:t>MIDDLEWARE CHAIN:</a:t>
+            </a:r>
+          </a:p>
+        </p:txBody>
+      </p:sp>
+      <p:sp>
+        <p:nvSpPr>
+          <p:cNvPr id="999" name="r"/>
+          <p:cNvSpPr/>
+          <p:nvPr/>
+        </p:nvSpPr>
+        <p:spPr>
+          <a:xfrm>
+            <a:off x="548640" y="3383280"/>
+            <a:ext cx="11064240" cy="246888"/>
+          </a:xfrm>
+          <a:prstGeom prst="roundRect">
+            <a:avLst>
+              <a:gd name="adj" fmla="val 4000"/>
+            </a:avLst>
+          </a:prstGeom>
+          <a:solidFill>
+            <a:srgbClr val="060E26"/>
+          </a:solidFill>
+          <a:ln>
+            <a:noFill/>
+          </a:ln>
+        </p:spPr>
+        <p:txBody>
+          <a:bodyPr/>
+          <a:lstStyle/>
+          <a:p/>
+        </p:txBody>
+      </p:sp>
+      <p:sp>
+        <p:nvSpPr>
+          <p:cNvPr id="1000" name="t"/>
+          <p:cNvSpPr txBox="1"/>
+          <p:nvPr/>
+        </p:nvSpPr>
+        <p:spPr>
+          <a:xfrm>
+            <a:off x="640080" y="3410712"/>
+            <a:ext cx="10972800" cy="201168"/>
+          </a:xfrm>
+          <a:prstGeom prst="rect">
+            <a:avLst/>
+          </a:prstGeom>
+          <a:noFill/>
+        </p:spPr>
+        <p:txBody>
+          <a:bodyPr wrap="square" anchor="t" rtlCol="0"/>
+          <a:lstStyle/>
+          <a:p>
+            <a:pPr algn="l">
+              <a:buNone/>
+            </a:pPr>
+            <a:r>
+              <a:rPr lang="en-US" sz="800" dirty="0">
+                <a:solidFill>
+                  <a:srgbClr val="94A3B8"/>
+                </a:solidFill>
+                <a:latin typeface="Calibri"/>
+              </a:rPr>
+              <a:t>Helmet  |  CORS  |  Rate Limiter (100/15min)  |  JWT Auth (15m+7d)  |  RBAC  |  Mongo Sanitize  |  XSS Clean  |  HPP</a:t>
+            </a:r>
+          </a:p>
+        </p:txBody>
+      </p:sp>
+      <p:cxnSp>
+        <p:nvCxnSpPr>
+          <p:cNvPr id="1001" name="ln"/>
+          <p:cNvCxnSpPr/>
+          <p:nvPr/>
+        </p:nvCxnSpPr>
+        <p:spPr>
+          <a:xfrm flipH="0" flipV="0">
+            <a:off x="2743200" y="3703320"/>
+            <a:ext cx="1" cy="182880"/>
+          </a:xfrm>
+          <a:prstGeom prst="line">
+            <a:avLst/>
+          </a:prstGeom>
+          <a:ln w="15000">
+            <a:solidFill>
+              <a:srgbClr val="94A3B8"/>
+            </a:solidFill>
+          </a:ln>
+        </p:spPr>
+      </p:cxnSp>
+      <p:cxnSp>
+        <p:nvCxnSpPr>
+          <p:cNvPr id="1002" name="ln"/>
+          <p:cNvCxnSpPr/>
+          <p:nvPr/>
+        </p:nvCxnSpPr>
+        <p:spPr>
+          <a:xfrm flipH="0" flipV="0">
+            <a:off x="6126480" y="3703320"/>
+            <a:ext cx="1" cy="182880"/>
+          </a:xfrm>
+          <a:prstGeom prst="line">
+            <a:avLst/>
+          </a:prstGeom>
+          <a:ln w="15000">
+            <a:solidFill>
+              <a:srgbClr val="94A3B8"/>
+            </a:solidFill>
+          </a:ln>
+        </p:spPr>
+      </p:cxnSp>
+      <p:cxnSp>
+        <p:nvCxnSpPr>
+          <p:cNvPr id="1003" name="ln"/>
+          <p:cNvCxnSpPr/>
+          <p:nvPr/>
+        </p:nvCxnSpPr>
+        <p:spPr>
+          <a:xfrm flipH="0" flipV="0">
+            <a:off x="9144000" y="3703320"/>
+            <a:ext cx="1" cy="182880"/>
+          </a:xfrm>
+          <a:prstGeom prst="line">
+            <a:avLst/>
+          </a:prstGeom>
+          <a:ln w="15000">
+            <a:solidFill>
+              <a:srgbClr val="94A3B8"/>
+            </a:solidFill>
+          </a:ln>
+        </p:spPr>
+      </p:cxnSp>
+      <p:sp>
+        <p:nvSpPr>
+          <p:cNvPr id="1004" name="s"/>
+          <p:cNvSpPr/>
+          <p:nvPr/>
+        </p:nvSpPr>
+        <p:spPr>
+          <a:xfrm>
+            <a:off x="365760" y="3931920"/>
+            <a:ext cx="11430000" cy="914400"/>
+          </a:xfrm>
+          <a:prstGeom prst="roundRect">
+            <a:avLst>
+              <a:gd name="adj" fmla="val 8000"/>
+            </a:avLst>
+          </a:prstGeom>
+          <a:solidFill>
+            <a:srgbClr val="FFFFFF"/>
+          </a:solidFill>
+          <a:ln>
+            <a:noFill/>
+          </a:ln>
+          <a:effectLst>
+            <a:outerShdw blurRad="50800" dist="38100" dir="2700000" rotWithShape="0">
+              <a:srgbClr val="000000">
+                <a:alpha val="35000"/>
+              </a:srgbClr>
+            </a:outerShdw>
+          </a:effectLst>
+        </p:spPr>
+        <p:txBody>
+          <a:bodyPr wrap="square" anchor="ctr" rtlCol="0" lIns="91440" tIns="91440" rIns="91440" bIns="91440"/>
+          <a:lstStyle/>
+          <a:p/>
+        </p:txBody>
+      </p:sp>
+      <p:sp>
+        <p:nvSpPr>
+          <p:cNvPr id="1005" name="r"/>
+          <p:cNvSpPr/>
+          <p:nvPr/>
+        </p:nvSpPr>
+        <p:spPr>
+          <a:xfrm>
+            <a:off x="365760" y="3931920"/>
+            <a:ext cx="11430000" cy="54864"/>
+          </a:xfrm>
+          <a:prstGeom prst="rect">
+            <a:avLst/>
+          </a:prstGeom>
+          <a:solidFill>
+            <a:srgbClr val="10B981"/>
+          </a:solidFill>
+          <a:ln>
+            <a:noFill/>
+          </a:ln>
+        </p:spPr>
+        <p:txBody>
+          <a:bodyPr/>
+          <a:lstStyle/>
+          <a:p/>
+        </p:txBody>
+      </p:sp>
+      <p:sp>
+        <p:nvSpPr>
+          <p:cNvPr id="1006" name="t"/>
+          <p:cNvSpPr txBox="1"/>
+          <p:nvPr/>
+        </p:nvSpPr>
+        <p:spPr>
+          <a:xfrm>
+            <a:off x="548640" y="4005072"/>
+            <a:ext cx="7315200" cy="274320"/>
+          </a:xfrm>
+          <a:prstGeom prst="rect">
+            <a:avLst/>
+          </a:prstGeom>
+          <a:noFill/>
+        </p:spPr>
+        <p:txBody>
+          <a:bodyPr wrap="square" anchor="t" rtlCol="0"/>
+          <a:lstStyle/>
+          <a:p>
+            <a:pPr algn="l">
+              <a:buNone/>
+            </a:pPr>
+            <a:r>
+              <a:rPr lang="en-US" sz="1000" b="1" dirty="0">
+                <a:solidFill>
+                  <a:srgbClr val="10B981"/>
+                </a:solidFill>
+                <a:latin typeface="Calibri"/>
+              </a:rPr>
+              <a:t>[ TIER 3 ]  DATA &amp; EXTERNAL SERVICES</a:t>
+            </a:r>
+          </a:p>
+        </p:txBody>
+      </p:sp>
+      <p:sp>
+        <p:nvSpPr>
+          <p:cNvPr id="1007" name="s"/>
+          <p:cNvSpPr/>
+          <p:nvPr/>
+        </p:nvSpPr>
+        <p:spPr>
+          <a:xfrm>
+            <a:off x="548640" y="4297680"/>
+            <a:ext cx="3611880" cy="320040"/>
+          </a:xfrm>
+          <a:prstGeom prst="roundRect">
+            <a:avLst>
+              <a:gd name="adj" fmla="val 6000"/>
+            </a:avLst>
+          </a:prstGeom>
+          <a:solidFill>
+            <a:srgbClr val="10B981"/>
+          </a:solidFill>
+          <a:ln>
+            <a:noFill/>
+          </a:ln>
+          <a:effectLst>
+            <a:outerShdw blurRad="50800" dist="38100" dir="2700000" rotWithShape="0">
+              <a:srgbClr val="000000">
+                <a:alpha val="35000"/>
+              </a:srgbClr>
+            </a:outerShdw>
+          </a:effectLst>
+        </p:spPr>
+        <p:txBody>
+          <a:bodyPr wrap="square" anchor="ctr" rtlCol="0" lIns="91440" tIns="91440" rIns="91440" bIns="91440"/>
+          <a:lstStyle/>
+          <a:p>
+            <a:pPr algn="ctr">
+              <a:buNone/>
+            </a:pPr>
+            <a:r>
+              <a:rPr lang="en-US" sz="1100" b="1" dirty="0">
+                <a:solidFill>
+                  <a:srgbClr val="FFFFFF"/>
+                </a:solidFill>
+                <a:latin typeface="Calibri"/>
+              </a:rPr>
+              <a:t>MongoDB</a:t>
+            </a:r>
+          </a:p>
+        </p:txBody>
+      </p:sp>
+      <p:sp>
+        <p:nvSpPr>
+          <p:cNvPr id="1008" name="t"/>
+          <p:cNvSpPr txBox="1"/>
+          <p:nvPr/>
+        </p:nvSpPr>
+        <p:spPr>
+          <a:xfrm>
+            <a:off x="548640" y="4645152"/>
+            <a:ext cx="3611880" cy="182880"/>
+          </a:xfrm>
+          <a:prstGeom prst="rect">
+            <a:avLst/>
+          </a:prstGeom>
+          <a:noFill/>
+        </p:spPr>
+        <p:txBody>
+          <a:bodyPr wrap="square" anchor="t" rtlCol="0"/>
+          <a:lstStyle/>
+          <a:p>
+            <a:pPr algn="ctr">
+              <a:buNone/>
+            </a:pPr>
+            <a:r>
+              <a:rPr lang="en-US" sz="800" dirty="0">
+                <a:solidFill>
+                  <a:srgbClr val="475569"/>
+                </a:solidFill>
+                <a:latin typeface="Calibri"/>
+              </a:rPr>
+              <a:t>Primary DB - Users, Orders, Inventory, Chat, Routes</a:t>
+            </a:r>
+          </a:p>
+        </p:txBody>
+      </p:sp>
+      <p:sp>
+        <p:nvSpPr>
+          <p:cNvPr id="1009" name="s"/>
+          <p:cNvSpPr/>
+          <p:nvPr/>
+        </p:nvSpPr>
+        <p:spPr>
+          <a:xfrm>
+            <a:off x="4343400" y="4297680"/>
+            <a:ext cx="3611880" cy="320040"/>
+          </a:xfrm>
+          <a:prstGeom prst="roundRect">
+            <a:avLst>
+              <a:gd name="adj" fmla="val 6000"/>
+            </a:avLst>
+          </a:prstGeom>
+          <a:solidFill>
+            <a:srgbClr val="EF4444"/>
+          </a:solidFill>
+          <a:ln>
+            <a:noFill/>
+          </a:ln>
+          <a:effectLst>
+            <a:outerShdw blurRad="50800" dist="38100" dir="2700000" rotWithShape="0">
+              <a:srgbClr val="000000">
+                <a:alpha val="35000"/>
+              </a:srgbClr>
+            </a:outerShdw>
+          </a:effectLst>
+        </p:spPr>
+        <p:txBody>
+          <a:bodyPr wrap="square" anchor="ctr" rtlCol="0" lIns="91440" tIns="91440" rIns="91440" bIns="91440"/>
+          <a:lstStyle/>
+          <a:p>
+            <a:pPr algn="ctr">
+              <a:buNone/>
+            </a:pPr>
+            <a:r>
+              <a:rPr lang="en-US" sz="1100" b="1" dirty="0">
+                <a:solidFill>
+                  <a:srgbClr val="FFFFFF"/>
+                </a:solidFill>
+                <a:latin typeface="Calibri"/>
+              </a:rPr>
+              <a:t>Redis</a:t>
+            </a:r>
+          </a:p>
+        </p:txBody>
+      </p:sp>
+      <p:sp>
+        <p:nvSpPr>
+          <p:cNvPr id="1010" name="t"/>
+          <p:cNvSpPr txBox="1"/>
+          <p:nvPr/>
+        </p:nvSpPr>
+        <p:spPr>
+          <a:xfrm>
+            <a:off x="4343400" y="4645152"/>
+            <a:ext cx="3611880" cy="182880"/>
+          </a:xfrm>
+          <a:prstGeom prst="rect">
+            <a:avLst/>
+          </a:prstGeom>
+          <a:noFill/>
+        </p:spPr>
+        <p:txBody>
+          <a:bodyPr wrap="square" anchor="t" rtlCol="0"/>
+          <a:lstStyle/>
+          <a:p>
+            <a:pPr algn="ctr">
+              <a:buNone/>
+            </a:pPr>
+            <a:r>
+              <a:rPr lang="en-US" sz="800" dirty="0">
+                <a:solidFill>
+                  <a:srgbClr val="475569"/>
+                </a:solidFill>
+                <a:latin typeface="Calibri"/>
+              </a:rPr>
+              <a:t>Cache, GPS Location, Sessions, Rate Limits, OTP</a:t>
+            </a:r>
+          </a:p>
+        </p:txBody>
+      </p:sp>
+      <p:sp>
+        <p:nvSpPr>
+          <p:cNvPr id="1011" name="s"/>
+          <p:cNvSpPr/>
+          <p:nvPr/>
+        </p:nvSpPr>
+        <p:spPr>
+          <a:xfrm>
+            <a:off x="8138160" y="4297680"/>
+            <a:ext cx="3611880" cy="320040"/>
+          </a:xfrm>
+          <a:prstGeom prst="roundRect">
+            <a:avLst>
+              <a:gd name="adj" fmla="val 6000"/>
+            </a:avLst>
+          </a:prstGeom>
+          <a:solidFill>
+            <a:srgbClr val="8B5CF6"/>
+          </a:solidFill>
+          <a:ln>
+            <a:noFill/>
+          </a:ln>
+          <a:effectLst>
+            <a:outerShdw blurRad="50800" dist="38100" dir="2700000" rotWithShape="0">
+              <a:srgbClr val="000000">
+                <a:alpha val="35000"/>
+              </a:srgbClr>
+            </a:outerShdw>
+          </a:effectLst>
+        </p:spPr>
+        <p:txBody>
+          <a:bodyPr wrap="square" anchor="ctr" rtlCol="0" lIns="91440" tIns="91440" rIns="91440" bIns="91440"/>
+          <a:lstStyle/>
+          <a:p>
+            <a:pPr algn="ctr">
+              <a:buNone/>
+            </a:pPr>
+            <a:r>
+              <a:rPr lang="en-US" sz="1100" b="1" dirty="0">
+                <a:solidFill>
+                  <a:srgbClr val="FFFFFF"/>
+                </a:solidFill>
+                <a:latin typeface="Calibri"/>
+              </a:rPr>
+              <a:t>External APIs</a:t>
+            </a:r>
+          </a:p>
+        </p:txBody>
+      </p:sp>
+      <p:sp>
+        <p:nvSpPr>
+          <p:cNvPr id="1012" name="t"/>
+          <p:cNvSpPr txBox="1"/>
+          <p:nvPr/>
+        </p:nvSpPr>
+        <p:spPr>
+          <a:xfrm>
+            <a:off x="8138160" y="4645152"/>
+            <a:ext cx="3611880" cy="182880"/>
+          </a:xfrm>
+          <a:prstGeom prst="rect">
+            <a:avLst/>
+          </a:prstGeom>
+          <a:noFill/>
+        </p:spPr>
+        <p:txBody>
+          <a:bodyPr wrap="square" anchor="t" rtlCol="0"/>
+          <a:lstStyle/>
+          <a:p>
+            <a:pPr algn="ctr">
+              <a:buNone/>
+            </a:pPr>
+            <a:r>
+              <a:rPr lang="en-US" sz="800" dirty="0">
+                <a:solidFill>
+                  <a:srgbClr val="475569"/>
+                </a:solidFill>
+                <a:latin typeface="Calibri"/>
+              </a:rPr>
+              <a:t>Ola Maps, Razorpay, AWS S3, Gmail SMTP, Fast2SMS</a:t>
+            </a:r>
+          </a:p>
+        </p:txBody>
+      </p:sp>
+      <p:sp>
+        <p:nvSpPr>
+          <p:cNvPr id="1013" name="s"/>
+          <p:cNvSpPr/>
+          <p:nvPr/>
+        </p:nvSpPr>
+        <p:spPr>
+          <a:xfrm>
+            <a:off x="365760" y="5029200"/>
+            <a:ext cx="3703320" cy="1554480"/>
+          </a:xfrm>
+          <a:prstGeom prst="roundRect">
+            <a:avLst>
+              <a:gd name="adj" fmla="val 6000"/>
+            </a:avLst>
+          </a:prstGeom>
+          <a:solidFill>
+            <a:srgbClr val="060E26"/>
+          </a:solidFill>
+          <a:ln>
+            <a:noFill/>
+          </a:ln>
+          <a:effectLst>
+            <a:outerShdw blurRad="50800" dist="38100" dir="2700000" rotWithShape="0">
+              <a:srgbClr val="000000">
+                <a:alpha val="35000"/>
+              </a:srgbClr>
+            </a:outerShdw>
+          </a:effectLst>
+        </p:spPr>
+        <p:txBody>
+          <a:bodyPr wrap="square" anchor="ctr" rtlCol="0" lIns="91440" tIns="91440" rIns="91440" bIns="91440"/>
+          <a:lstStyle/>
+          <a:p/>
+        </p:txBody>
+      </p:sp>
+      <p:sp>
+        <p:nvSpPr>
+          <p:cNvPr id="1014" name="r"/>
+          <p:cNvSpPr/>
+          <p:nvPr/>
+        </p:nvSpPr>
+        <p:spPr>
+          <a:xfrm>
+            <a:off x="365760" y="5029200"/>
+            <a:ext cx="3703320" cy="54864"/>
+          </a:xfrm>
+          <a:prstGeom prst="rect">
+            <a:avLst/>
+          </a:prstGeom>
+          <a:solidFill>
+            <a:srgbClr val="FBBF24"/>
+          </a:solidFill>
+          <a:ln>
+            <a:noFill/>
+          </a:ln>
+        </p:spPr>
+        <p:txBody>
+          <a:bodyPr/>
+          <a:lstStyle/>
+          <a:p/>
+        </p:txBody>
+      </p:sp>
+      <p:sp>
+        <p:nvSpPr>
+          <p:cNvPr id="1015" name="t"/>
+          <p:cNvSpPr txBox="1"/>
+          <p:nvPr/>
+        </p:nvSpPr>
+        <p:spPr>
+          <a:xfrm>
+            <a:off x="502920" y="5120640"/>
+            <a:ext cx="3657600" cy="274320"/>
+          </a:xfrm>
+          <a:prstGeom prst="rect">
+            <a:avLst/>
+          </a:prstGeom>
+          <a:noFill/>
+        </p:spPr>
+        <p:txBody>
+          <a:bodyPr wrap="square" anchor="t" rtlCol="0"/>
+          <a:lstStyle/>
+          <a:p>
+            <a:pPr algn="l">
+              <a:buNone/>
+            </a:pPr>
+            <a:r>
+              <a:rPr lang="en-US" sz="1100" b="1" dirty="0">
+                <a:solidFill>
+                  <a:srgbClr val="FBBF24"/>
+                </a:solidFill>
+                <a:latin typeface="Calibri"/>
+              </a:rPr>
+              <a:t>[*]  PERFORMANCE METRICS</a:t>
+            </a:r>
+          </a:p>
+        </p:txBody>
+      </p:sp>
+      <p:sp>
+        <p:nvSpPr>
+          <p:cNvPr id="1016" name="t"/>
+          <p:cNvSpPr txBox="1"/>
+          <p:nvPr/>
+        </p:nvSpPr>
+        <p:spPr>
+          <a:xfrm>
+            <a:off x="502920" y="5440680"/>
+            <a:ext cx="2194560" cy="201168"/>
+          </a:xfrm>
+          <a:prstGeom prst="rect">
+            <a:avLst/>
+          </a:prstGeom>
+          <a:noFill/>
+        </p:spPr>
+        <p:txBody>
+          <a:bodyPr wrap="square" anchor="t" rtlCol="0"/>
+          <a:lstStyle/>
+          <a:p>
+            <a:pPr algn="l">
+              <a:buNone/>
+            </a:pPr>
+            <a:r>
+              <a:rPr lang="en-US" sz="800" dirty="0">
+                <a:solidFill>
+                  <a:srgbClr val="94A3B8"/>
+                </a:solidFill>
+                <a:latin typeface="Calibri"/>
+              </a:rPr>
+              <a:t>Auto-Dispatch (9 ord)</a:t>
+            </a:r>
+          </a:p>
+        </p:txBody>
+      </p:sp>
+      <p:sp>
+        <p:nvSpPr>
+          <p:cNvPr id="1017" name="t"/>
+          <p:cNvSpPr txBox="1"/>
+          <p:nvPr/>
+        </p:nvSpPr>
+        <p:spPr>
+          <a:xfrm>
+            <a:off x="2697480" y="5440680"/>
+            <a:ext cx="1280160" cy="201168"/>
+          </a:xfrm>
+          <a:prstGeom prst="rect">
+            <a:avLst/>
+          </a:prstGeom>
+          <a:noFill/>
+        </p:spPr>
+        <p:txBody>
+          <a:bodyPr wrap="square" anchor="t" rtlCol="0"/>
+          <a:lstStyle/>
+          <a:p>
+            <a:pPr algn="l">
+              <a:buNone/>
+            </a:pPr>
+            <a:r>
+              <a:rPr lang="en-US" sz="800" b="1" dirty="0">
+                <a:solidFill>
+                  <a:srgbClr val="FBBF24"/>
+                </a:solidFill>
+                <a:latin typeface="Calibri"/>
+              </a:rPr>
+              <a:t>55-90 ms</a:t>
+            </a:r>
+          </a:p>
+        </p:txBody>
+      </p:sp>
+      <p:sp>
+        <p:nvSpPr>
+          <p:cNvPr id="1018" name="t"/>
+          <p:cNvSpPr txBox="1"/>
+          <p:nvPr/>
+        </p:nvSpPr>
+        <p:spPr>
+          <a:xfrm>
+            <a:off x="502920" y="5660136"/>
+            <a:ext cx="2194560" cy="201168"/>
+          </a:xfrm>
+          <a:prstGeom prst="rect">
+            <a:avLst/>
+          </a:prstGeom>
+          <a:noFill/>
+        </p:spPr>
+        <p:txBody>
+          <a:bodyPr wrap="square" anchor="t" rtlCol="0"/>
+          <a:lstStyle/>
+          <a:p>
+            <a:pPr algn="l">
+              <a:buNone/>
+            </a:pPr>
+            <a:r>
+              <a:rPr lang="en-US" sz="800" dirty="0">
+                <a:solidFill>
+                  <a:srgbClr val="94A3B8"/>
+                </a:solidFill>
+                <a:latin typeface="Calibri"/>
+              </a:rPr>
+              <a:t>Redis ops / sec</a:t>
+            </a:r>
+          </a:p>
+        </p:txBody>
+      </p:sp>
+      <p:sp>
+        <p:nvSpPr>
+          <p:cNvPr id="1019" name="t"/>
+          <p:cNvSpPr txBox="1"/>
+          <p:nvPr/>
+        </p:nvSpPr>
+        <p:spPr>
+          <a:xfrm>
+            <a:off x="2697480" y="5660136"/>
+            <a:ext cx="1280160" cy="201168"/>
+          </a:xfrm>
+          <a:prstGeom prst="rect">
+            <a:avLst/>
+          </a:prstGeom>
+          <a:noFill/>
+        </p:spPr>
+        <p:txBody>
+          <a:bodyPr wrap="square" anchor="t" rtlCol="0"/>
+          <a:lstStyle/>
+          <a:p>
+            <a:pPr algn="l">
+              <a:buNone/>
+            </a:pPr>
+            <a:r>
+              <a:rPr lang="en-US" sz="800" b="1" dirty="0">
+                <a:solidFill>
+                  <a:srgbClr val="FBBF24"/>
+                </a:solidFill>
+                <a:latin typeface="Calibri"/>
+              </a:rPr>
+              <a:t>6,289 reads</a:t>
+            </a:r>
+          </a:p>
+        </p:txBody>
+      </p:sp>
+      <p:sp>
+        <p:nvSpPr>
+          <p:cNvPr id="1020" name="t"/>
+          <p:cNvSpPr txBox="1"/>
+          <p:nvPr/>
+        </p:nvSpPr>
+        <p:spPr>
+          <a:xfrm>
+            <a:off x="502920" y="5879592"/>
+            <a:ext cx="2194560" cy="201168"/>
+          </a:xfrm>
+          <a:prstGeom prst="rect">
+            <a:avLst/>
+          </a:prstGeom>
+          <a:noFill/>
+        </p:spPr>
+        <p:txBody>
+          <a:bodyPr wrap="square" anchor="t" rtlCol="0"/>
+          <a:lstStyle/>
+          <a:p>
+            <a:pPr algn="l">
+              <a:buNone/>
+            </a:pPr>
+            <a:r>
+              <a:rPr lang="en-US" sz="800" dirty="0">
+                <a:solidFill>
+                  <a:srgbClr val="94A3B8"/>
+                </a:solidFill>
+                <a:latin typeface="Calibri"/>
+              </a:rPr>
+              <a:t>API (cached)</a:t>
+            </a:r>
+          </a:p>
+        </p:txBody>
+      </p:sp>
+      <p:sp>
+        <p:nvSpPr>
+          <p:cNvPr id="1021" name="t"/>
+          <p:cNvSpPr txBox="1"/>
+          <p:nvPr/>
+        </p:nvSpPr>
+        <p:spPr>
+          <a:xfrm>
+            <a:off x="2697480" y="5879592"/>
+            <a:ext cx="1280160" cy="201168"/>
+          </a:xfrm>
+          <a:prstGeom prst="rect">
+            <a:avLst/>
+          </a:prstGeom>
+          <a:noFill/>
+        </p:spPr>
+        <p:txBody>
+          <a:bodyPr wrap="square" anchor="t" rtlCol="0"/>
+          <a:lstStyle/>
+          <a:p>
+            <a:pPr algn="l">
+              <a:buNone/>
+            </a:pPr>
+            <a:r>
+              <a:rPr lang="en-US" sz="800" b="1" dirty="0">
+                <a:solidFill>
+                  <a:srgbClr val="FBBF24"/>
+                </a:solidFill>
+                <a:latin typeface="Calibri"/>
+              </a:rPr>
+              <a:t>&lt; 5 ms</a:t>
+            </a:r>
+          </a:p>
+        </p:txBody>
+      </p:sp>
+      <p:sp>
+        <p:nvSpPr>
+          <p:cNvPr id="1022" name="t"/>
+          <p:cNvSpPr txBox="1"/>
+          <p:nvPr/>
+        </p:nvSpPr>
+        <p:spPr>
+          <a:xfrm>
+            <a:off x="502920" y="6099048"/>
+            <a:ext cx="2194560" cy="201168"/>
+          </a:xfrm>
+          <a:prstGeom prst="rect">
+            <a:avLst/>
+          </a:prstGeom>
+          <a:noFill/>
+        </p:spPr>
+        <p:txBody>
+          <a:bodyPr wrap="square" anchor="t" rtlCol="0"/>
+          <a:lstStyle/>
+          <a:p>
+            <a:pPr algn="l">
+              <a:buNone/>
+            </a:pPr>
+            <a:r>
+              <a:rPr lang="en-US" sz="800" dirty="0">
+                <a:solidFill>
+                  <a:srgbClr val="94A3B8"/>
+                </a:solidFill>
+                <a:latin typeface="Calibri"/>
+              </a:rPr>
+              <a:t>GPS broadcast</a:t>
+            </a:r>
+          </a:p>
+        </p:txBody>
+      </p:sp>
+      <p:sp>
+        <p:nvSpPr>
+          <p:cNvPr id="1023" name="t"/>
+          <p:cNvSpPr txBox="1"/>
+          <p:nvPr/>
+        </p:nvSpPr>
+        <p:spPr>
+          <a:xfrm>
+            <a:off x="2697480" y="6099048"/>
+            <a:ext cx="1280160" cy="201168"/>
+          </a:xfrm>
+          <a:prstGeom prst="rect">
+            <a:avLst/>
+          </a:prstGeom>
+          <a:noFill/>
+        </p:spPr>
+        <p:txBody>
+          <a:bodyPr wrap="square" anchor="t" rtlCol="0"/>
+          <a:lstStyle/>
+          <a:p>
+            <a:pPr algn="l">
+              <a:buNone/>
+            </a:pPr>
+            <a:r>
+              <a:rPr lang="en-US" sz="800" b="1" dirty="0">
+                <a:solidFill>
+                  <a:srgbClr val="FBBF24"/>
+                </a:solidFill>
+                <a:latin typeface="Calibri"/>
+              </a:rPr>
+              <a:t>every 5 s</a:t>
+            </a:r>
+          </a:p>
+        </p:txBody>
+      </p:sp>
+      <p:sp>
+        <p:nvSpPr>
+          <p:cNvPr id="1024" name="t"/>
+          <p:cNvSpPr txBox="1"/>
+          <p:nvPr/>
+        </p:nvSpPr>
+        <p:spPr>
+          <a:xfrm>
+            <a:off x="502920" y="6318504"/>
+            <a:ext cx="2194560" cy="201168"/>
+          </a:xfrm>
+          <a:prstGeom prst="rect">
+            <a:avLst/>
+          </a:prstGeom>
+          <a:noFill/>
+        </p:spPr>
+        <p:txBody>
+          <a:bodyPr wrap="square" anchor="t" rtlCol="0"/>
+          <a:lstStyle/>
+          <a:p>
+            <a:pPr algn="l">
+              <a:buNone/>
+            </a:pPr>
+            <a:r>
+              <a:rPr lang="en-US" sz="800" dirty="0">
+                <a:solidFill>
+                  <a:srgbClr val="94A3B8"/>
+                </a:solidFill>
+                <a:latin typeface="Calibri"/>
+              </a:rPr>
+              <a:t>Concurrent sockets</a:t>
+            </a:r>
+          </a:p>
+        </p:txBody>
+      </p:sp>
+      <p:sp>
+        <p:nvSpPr>
+          <p:cNvPr id="1025" name="t"/>
+          <p:cNvSpPr txBox="1"/>
+          <p:nvPr/>
+        </p:nvSpPr>
+        <p:spPr>
+          <a:xfrm>
+            <a:off x="2697480" y="6318504"/>
+            <a:ext cx="1280160" cy="201168"/>
+          </a:xfrm>
+          <a:prstGeom prst="rect">
+            <a:avLst/>
+          </a:prstGeom>
+          <a:noFill/>
+        </p:spPr>
+        <p:txBody>
+          <a:bodyPr wrap="square" anchor="t" rtlCol="0"/>
+          <a:lstStyle/>
+          <a:p>
+            <a:pPr algn="l">
+              <a:buNone/>
+            </a:pPr>
+            <a:r>
+              <a:rPr lang="en-US" sz="800" b="1" dirty="0">
+                <a:solidFill>
+                  <a:srgbClr val="FBBF24"/>
+                </a:solidFill>
+                <a:latin typeface="Calibri"/>
+              </a:rPr>
+              <a:t>1000+</a:t>
+            </a:r>
+          </a:p>
+        </p:txBody>
+      </p:sp>
+      <p:sp>
+        <p:nvSpPr>
+          <p:cNvPr id="1026" name="s"/>
+          <p:cNvSpPr/>
+          <p:nvPr/>
+        </p:nvSpPr>
+        <p:spPr>
+          <a:xfrm>
+            <a:off x="4251960" y="5029200"/>
+            <a:ext cx="3703320" cy="1554480"/>
+          </a:xfrm>
+          <a:prstGeom prst="roundRect">
+            <a:avLst>
+              <a:gd name="adj" fmla="val 6000"/>
+            </a:avLst>
+          </a:prstGeom>
+          <a:solidFill>
+            <a:srgbClr val="0B1739"/>
+          </a:solidFill>
+          <a:ln>
+            <a:noFill/>
+          </a:ln>
+          <a:effectLst>
+            <a:outerShdw blurRad="50800" dist="38100" dir="2700000" rotWithShape="0">
+              <a:srgbClr val="000000">
+                <a:alpha val="35000"/>
+              </a:srgbClr>
+            </a:outerShdw>
+          </a:effectLst>
+        </p:spPr>
+        <p:txBody>
+          <a:bodyPr wrap="square" anchor="ctr" rtlCol="0" lIns="91440" tIns="91440" rIns="91440" bIns="91440"/>
+          <a:lstStyle/>
+          <a:p/>
+        </p:txBody>
+      </p:sp>
+      <p:sp>
+        <p:nvSpPr>
+          <p:cNvPr id="1027" name="r"/>
+          <p:cNvSpPr/>
+          <p:nvPr/>
+        </p:nvSpPr>
+        <p:spPr>
+          <a:xfrm>
+            <a:off x="4251960" y="5029200"/>
+            <a:ext cx="3703320" cy="54864"/>
+          </a:xfrm>
+          <a:prstGeom prst="rect">
+            <a:avLst/>
+          </a:prstGeom>
+          <a:solidFill>
+            <a:srgbClr val="F97316"/>
+          </a:solidFill>
+          <a:ln>
+            <a:noFill/>
+          </a:ln>
+        </p:spPr>
+        <p:txBody>
+          <a:bodyPr/>
+          <a:lstStyle/>
+          <a:p/>
+        </p:txBody>
+      </p:sp>
+      <p:sp>
+        <p:nvSpPr>
+          <p:cNvPr id="1028" name="t"/>
+          <p:cNvSpPr txBox="1"/>
+          <p:nvPr/>
+        </p:nvSpPr>
+        <p:spPr>
+          <a:xfrm>
+            <a:off x="4389120" y="5120640"/>
+            <a:ext cx="3657600" cy="274320"/>
+          </a:xfrm>
+          <a:prstGeom prst="rect">
+            <a:avLst/>
+          </a:prstGeom>
+          <a:noFill/>
+        </p:spPr>
+        <p:txBody>
+          <a:bodyPr wrap="square" anchor="t" rtlCol="0"/>
+          <a:lstStyle/>
+          <a:p>
+            <a:pPr algn="l">
+              <a:buNone/>
+            </a:pPr>
+            <a:r>
+              <a:rPr lang="en-US" sz="1100" b="1" dirty="0">
+                <a:solidFill>
+                  <a:srgbClr val="F97316"/>
+                </a:solidFill>
+                <a:latin typeface="Calibri"/>
+              </a:rPr>
+              <a:t>[*]  CORE ALGORITHMS</a:t>
+            </a:r>
+          </a:p>
+        </p:txBody>
+      </p:sp>
+      <p:sp>
+        <p:nvSpPr>
+          <p:cNvPr id="1029" name="t"/>
+          <p:cNvSpPr txBox="1"/>
+          <p:nvPr/>
+        </p:nvSpPr>
+        <p:spPr>
+          <a:xfrm>
+            <a:off x="4389120" y="5440680"/>
+            <a:ext cx="1463040" cy="201168"/>
+          </a:xfrm>
+          <a:prstGeom prst="rect">
+            <a:avLst/>
+          </a:prstGeom>
+          <a:noFill/>
+        </p:spPr>
+        <p:txBody>
+          <a:bodyPr wrap="square" anchor="t" rtlCol="0"/>
+          <a:lstStyle/>
+          <a:p>
+            <a:pPr algn="l">
+              <a:buNone/>
+            </a:pPr>
+            <a:r>
+              <a:rPr lang="en-US" sz="800" b="1" dirty="0">
+                <a:solidFill>
+                  <a:srgbClr val="F97316"/>
+                </a:solidFill>
+                <a:latin typeface="Calibri"/>
+              </a:rPr>
+              <a:t>K-Means++</a:t>
+            </a:r>
+          </a:p>
+        </p:txBody>
+      </p:sp>
+      <p:sp>
+        <p:nvSpPr>
+          <p:cNvPr id="1030" name="t"/>
+          <p:cNvSpPr txBox="1"/>
+          <p:nvPr/>
+        </p:nvSpPr>
+        <p:spPr>
+          <a:xfrm>
+            <a:off x="5852160" y="5440680"/>
+            <a:ext cx="2011680" cy="201168"/>
+          </a:xfrm>
+          <a:prstGeom prst="rect">
+            <a:avLst/>
+          </a:prstGeom>
+          <a:noFill/>
+        </p:spPr>
+        <p:txBody>
+          <a:bodyPr wrap="square" anchor="t" rtlCol="0"/>
+          <a:lstStyle/>
+          <a:p>
+            <a:pPr algn="l">
+              <a:buNone/>
+            </a:pPr>
+            <a:r>
+              <a:rPr lang="en-US" sz="800" dirty="0">
+                <a:solidFill>
+                  <a:srgbClr val="C8D2E0"/>
+                </a:solidFill>
+                <a:latin typeface="Calibri"/>
+              </a:rPr>
+              <a:t>Order clustering by GPS</a:t>
+            </a:r>
+          </a:p>
+        </p:txBody>
+      </p:sp>
+      <p:sp>
+        <p:nvSpPr>
+          <p:cNvPr id="1031" name="t"/>
+          <p:cNvSpPr txBox="1"/>
+          <p:nvPr/>
+        </p:nvSpPr>
+        <p:spPr>
+          <a:xfrm>
+            <a:off x="4389120" y="5660136"/>
+            <a:ext cx="1463040" cy="201168"/>
+          </a:xfrm>
+          <a:prstGeom prst="rect">
+            <a:avLst/>
+          </a:prstGeom>
+          <a:noFill/>
+        </p:spPr>
+        <p:txBody>
+          <a:bodyPr wrap="square" anchor="t" rtlCol="0"/>
+          <a:lstStyle/>
+          <a:p>
+            <a:pPr algn="l">
+              <a:buNone/>
+            </a:pPr>
+            <a:r>
+              <a:rPr lang="en-US" sz="800" b="1" dirty="0">
+                <a:solidFill>
+                  <a:srgbClr val="F97316"/>
+                </a:solidFill>
+                <a:latin typeface="Calibri"/>
+              </a:rPr>
+              <a:t>Greedy Nearest</a:t>
+            </a:r>
+          </a:p>
+        </p:txBody>
+      </p:sp>
+      <p:sp>
+        <p:nvSpPr>
+          <p:cNvPr id="1032" name="t"/>
+          <p:cNvSpPr txBox="1"/>
+          <p:nvPr/>
+        </p:nvSpPr>
+        <p:spPr>
+          <a:xfrm>
+            <a:off x="5852160" y="5660136"/>
+            <a:ext cx="2011680" cy="201168"/>
+          </a:xfrm>
+          <a:prstGeom prst="rect">
+            <a:avLst/>
+          </a:prstGeom>
+          <a:noFill/>
+        </p:spPr>
+        <p:txBody>
+          <a:bodyPr wrap="square" anchor="t" rtlCol="0"/>
+          <a:lstStyle/>
+          <a:p>
+            <a:pPr algn="l">
+              <a:buNone/>
+            </a:pPr>
+            <a:r>
+              <a:rPr lang="en-US" sz="800" dirty="0">
+                <a:solidFill>
+                  <a:srgbClr val="C8D2E0"/>
+                </a:solidFill>
+                <a:latin typeface="Calibri"/>
+              </a:rPr>
+              <a:t>Agent &lt;-&gt; cluster pairing</a:t>
+            </a:r>
+          </a:p>
+        </p:txBody>
+      </p:sp>
+      <p:sp>
+        <p:nvSpPr>
+          <p:cNvPr id="1033" name="t"/>
+          <p:cNvSpPr txBox="1"/>
+          <p:nvPr/>
+        </p:nvSpPr>
+        <p:spPr>
+          <a:xfrm>
+            <a:off x="4389120" y="5879592"/>
+            <a:ext cx="1463040" cy="201168"/>
+          </a:xfrm>
+          <a:prstGeom prst="rect">
+            <a:avLst/>
+          </a:prstGeom>
+          <a:noFill/>
+        </p:spPr>
+        <p:txBody>
+          <a:bodyPr wrap="square" anchor="t" rtlCol="0"/>
+          <a:lstStyle/>
+          <a:p>
+            <a:pPr algn="l">
+              <a:buNone/>
+            </a:pPr>
+            <a:r>
+              <a:rPr lang="en-US" sz="800" b="1" dirty="0">
+                <a:solidFill>
+                  <a:srgbClr val="F97316"/>
+                </a:solidFill>
+                <a:latin typeface="Calibri"/>
+              </a:rPr>
+              <a:t>Priority-Weighted</a:t>
+            </a:r>
+          </a:p>
+        </p:txBody>
+      </p:sp>
+      <p:sp>
+        <p:nvSpPr>
+          <p:cNvPr id="1034" name="t"/>
+          <p:cNvSpPr txBox="1"/>
+          <p:nvPr/>
+        </p:nvSpPr>
+        <p:spPr>
+          <a:xfrm>
+            <a:off x="5852160" y="5879592"/>
+            <a:ext cx="2011680" cy="201168"/>
+          </a:xfrm>
+          <a:prstGeom prst="rect">
+            <a:avLst/>
+          </a:prstGeom>
+          <a:noFill/>
+        </p:spPr>
+        <p:txBody>
+          <a:bodyPr wrap="square" anchor="t" rtlCol="0"/>
+          <a:lstStyle/>
+          <a:p>
+            <a:pPr algn="l">
+              <a:buNone/>
+            </a:pPr>
+            <a:r>
+              <a:rPr lang="en-US" sz="800" dirty="0">
+                <a:solidFill>
+                  <a:srgbClr val="C8D2E0"/>
+                </a:solidFill>
+                <a:latin typeface="Calibri"/>
+              </a:rPr>
+              <a:t>Route sequencing</a:t>
+            </a:r>
+          </a:p>
+        </p:txBody>
+      </p:sp>
+      <p:sp>
+        <p:nvSpPr>
+          <p:cNvPr id="1035" name="t"/>
+          <p:cNvSpPr txBox="1"/>
+          <p:nvPr/>
+        </p:nvSpPr>
+        <p:spPr>
+          <a:xfrm>
+            <a:off x="4389120" y="6099048"/>
+            <a:ext cx="1463040" cy="201168"/>
+          </a:xfrm>
+          <a:prstGeom prst="rect">
+            <a:avLst/>
+          </a:prstGeom>
+          <a:noFill/>
+        </p:spPr>
+        <p:txBody>
+          <a:bodyPr wrap="square" anchor="t" rtlCol="0"/>
+          <a:lstStyle/>
+          <a:p>
+            <a:pPr algn="l">
+              <a:buNone/>
+            </a:pPr>
+            <a:r>
+              <a:rPr lang="en-US" sz="800" b="1" dirty="0">
+                <a:solidFill>
+                  <a:srgbClr val="F97316"/>
+                </a:solidFill>
+                <a:latin typeface="Calibri"/>
+              </a:rPr>
+              <a:t>Heuristic P-Score</a:t>
+            </a:r>
+          </a:p>
+        </p:txBody>
+      </p:sp>
+      <p:sp>
+        <p:nvSpPr>
+          <p:cNvPr id="1036" name="t"/>
+          <p:cNvSpPr txBox="1"/>
+          <p:nvPr/>
+        </p:nvSpPr>
+        <p:spPr>
+          <a:xfrm>
+            <a:off x="5852160" y="6099048"/>
+            <a:ext cx="2011680" cy="201168"/>
+          </a:xfrm>
+          <a:prstGeom prst="rect">
+            <a:avLst/>
+          </a:prstGeom>
+          <a:noFill/>
+        </p:spPr>
+        <p:txBody>
+          <a:bodyPr wrap="square" anchor="t" rtlCol="0"/>
+          <a:lstStyle/>
+          <a:p>
+            <a:pPr algn="l">
+              <a:buNone/>
+            </a:pPr>
+            <a:r>
+              <a:rPr lang="en-US" sz="800" dirty="0">
+                <a:solidFill>
+                  <a:srgbClr val="C8D2E0"/>
+                </a:solidFill>
+                <a:latin typeface="Calibri"/>
+              </a:rPr>
+              <a:t>Crisis-mode allocation</a:t>
+            </a:r>
+          </a:p>
+        </p:txBody>
+      </p:sp>
+      <p:sp>
+        <p:nvSpPr>
+          <p:cNvPr id="1037" name="t"/>
+          <p:cNvSpPr txBox="1"/>
+          <p:nvPr/>
+        </p:nvSpPr>
+        <p:spPr>
+          <a:xfrm>
+            <a:off x="4389120" y="6318504"/>
+            <a:ext cx="1463040" cy="201168"/>
+          </a:xfrm>
+          <a:prstGeom prst="rect">
+            <a:avLst/>
+          </a:prstGeom>
+          <a:noFill/>
+        </p:spPr>
+        <p:txBody>
+          <a:bodyPr wrap="square" anchor="t" rtlCol="0"/>
+          <a:lstStyle/>
+          <a:p>
+            <a:pPr algn="l">
+              <a:buNone/>
+            </a:pPr>
+            <a:r>
+              <a:rPr lang="en-US" sz="800" b="1" dirty="0">
+                <a:solidFill>
+                  <a:srgbClr val="F97316"/>
+                </a:solidFill>
+                <a:latin typeface="Calibri"/>
+              </a:rPr>
+              <a:t>Max-Heap Ranking</a:t>
+            </a:r>
+          </a:p>
+        </p:txBody>
+      </p:sp>
+      <p:sp>
+        <p:nvSpPr>
+          <p:cNvPr id="1038" name="t"/>
+          <p:cNvSpPr txBox="1"/>
+          <p:nvPr/>
+        </p:nvSpPr>
+        <p:spPr>
+          <a:xfrm>
+            <a:off x="5852160" y="6318504"/>
+            <a:ext cx="2011680" cy="201168"/>
+          </a:xfrm>
+          <a:prstGeom prst="rect">
+            <a:avLst/>
+          </a:prstGeom>
+          <a:noFill/>
+        </p:spPr>
+        <p:txBody>
+          <a:bodyPr wrap="square" anchor="t" rtlCol="0"/>
+          <a:lstStyle/>
+          <a:p>
+            <a:pPr algn="l">
+              <a:buNone/>
+            </a:pPr>
+            <a:r>
+              <a:rPr lang="en-US" sz="800" dirty="0">
+                <a:solidFill>
+                  <a:srgbClr val="C8D2E0"/>
+                </a:solidFill>
+                <a:latin typeface="Calibri"/>
+              </a:rPr>
+              <a:t>Descending P order</a:t>
+            </a:r>
+          </a:p>
+        </p:txBody>
+      </p:sp>
+      <p:sp>
+        <p:nvSpPr>
+          <p:cNvPr id="1039" name="s"/>
+          <p:cNvSpPr/>
+          <p:nvPr/>
+        </p:nvSpPr>
+        <p:spPr>
+          <a:xfrm>
+            <a:off x="8138160" y="5029200"/>
+            <a:ext cx="3657600" cy="1554480"/>
+          </a:xfrm>
+          <a:prstGeom prst="roundRect">
+            <a:avLst>
+              <a:gd name="adj" fmla="val 6000"/>
+            </a:avLst>
+          </a:prstGeom>
+          <a:solidFill>
+            <a:srgbClr val="17264C"/>
+          </a:solidFill>
+          <a:ln>
+            <a:noFill/>
+          </a:ln>
+          <a:effectLst>
+            <a:outerShdw blurRad="50800" dist="38100" dir="2700000" rotWithShape="0">
+              <a:srgbClr val="000000">
+                <a:alpha val="35000"/>
+              </a:srgbClr>
+            </a:outerShdw>
+          </a:effectLst>
+        </p:spPr>
+        <p:txBody>
+          <a:bodyPr wrap="square" anchor="ctr" rtlCol="0" lIns="91440" tIns="91440" rIns="91440" bIns="91440"/>
+          <a:lstStyle/>
+          <a:p/>
+        </p:txBody>
+      </p:sp>
+      <p:sp>
+        <p:nvSpPr>
+          <p:cNvPr id="1040" name="r"/>
+          <p:cNvSpPr/>
+          <p:nvPr/>
+        </p:nvSpPr>
+        <p:spPr>
+          <a:xfrm>
+            <a:off x="8138160" y="5029200"/>
+            <a:ext cx="3657600" cy="54864"/>
+          </a:xfrm>
+          <a:prstGeom prst="rect">
+            <a:avLst/>
+          </a:prstGeom>
+          <a:solidFill>
+            <a:srgbClr val="10B981"/>
+          </a:solidFill>
+          <a:ln>
+            <a:noFill/>
+          </a:ln>
+        </p:spPr>
+        <p:txBody>
+          <a:bodyPr/>
+          <a:lstStyle/>
+          <a:p/>
+        </p:txBody>
+      </p:sp>
+      <p:sp>
+        <p:nvSpPr>
+          <p:cNvPr id="1041" name="t"/>
+          <p:cNvSpPr txBox="1"/>
+          <p:nvPr/>
+        </p:nvSpPr>
+        <p:spPr>
+          <a:xfrm>
+            <a:off x="8275320" y="5120640"/>
+            <a:ext cx="3657600" cy="274320"/>
+          </a:xfrm>
+          <a:prstGeom prst="rect">
+            <a:avLst/>
+          </a:prstGeom>
+          <a:noFill/>
+        </p:spPr>
+        <p:txBody>
+          <a:bodyPr wrap="square" anchor="t" rtlCol="0"/>
+          <a:lstStyle/>
+          <a:p>
+            <a:pPr algn="l">
+              <a:buNone/>
+            </a:pPr>
+            <a:r>
+              <a:rPr lang="en-US" sz="1100" b="1" dirty="0">
+                <a:solidFill>
+                  <a:srgbClr val="10B981"/>
+                </a:solidFill>
+                <a:latin typeface="Calibri"/>
+              </a:rPr>
+              <a:t>[*]  ORDER LIFECYCLE</a:t>
+            </a:r>
+          </a:p>
+        </p:txBody>
+      </p:sp>
+      <p:sp>
+        <p:nvSpPr>
+          <p:cNvPr id="1042" name="c"/>
+          <p:cNvSpPr/>
+          <p:nvPr/>
+        </p:nvSpPr>
+        <p:spPr>
+          <a:xfrm>
+            <a:off x="8321040" y="5440680"/>
+            <a:ext cx="201168" cy="201168"/>
+          </a:xfrm>
+          <a:prstGeom prst="ellipse">
+            <a:avLst/>
+          </a:prstGeom>
+          <a:solidFill>
+            <a:srgbClr val="3B82F6"/>
+          </a:solidFill>
+          <a:ln>
+            <a:noFill/>
+          </a:ln>
+        </p:spPr>
+        <p:txBody>
+          <a:bodyPr/>
+          <a:lstStyle/>
+          <a:p/>
+        </p:txBody>
+      </p:sp>
+      <p:sp>
+        <p:nvSpPr>
+          <p:cNvPr id="1043" name="t"/>
+          <p:cNvSpPr txBox="1"/>
+          <p:nvPr/>
+        </p:nvSpPr>
+        <p:spPr>
+          <a:xfrm>
+            <a:off x="8321040" y="5468112"/>
+            <a:ext cx="201168" cy="201168"/>
+          </a:xfrm>
+          <a:prstGeom prst="rect">
+            <a:avLst/>
+          </a:prstGeom>
+          <a:noFill/>
+        </p:spPr>
+        <p:txBody>
+          <a:bodyPr wrap="square" anchor="t" rtlCol="0"/>
+          <a:lstStyle/>
+          <a:p>
+            <a:pPr algn="ctr">
+              <a:buNone/>
+            </a:pPr>
+            <a:r>
+              <a:rPr lang="en-US" sz="900" b="1" dirty="0">
+                <a:solidFill>
+                  <a:srgbClr val="FFFFFF"/>
+                </a:solidFill>
+                <a:latin typeface="Calibri"/>
+              </a:rPr>
+              <a:t>1</a:t>
+            </a:r>
+          </a:p>
+        </p:txBody>
+      </p:sp>
+      <p:sp>
+        <p:nvSpPr>
+          <p:cNvPr id="1044" name="t"/>
+          <p:cNvSpPr txBox="1"/>
+          <p:nvPr/>
+        </p:nvSpPr>
+        <p:spPr>
+          <a:xfrm>
+            <a:off x="8641080" y="5468112"/>
+            <a:ext cx="2286000" cy="201168"/>
+          </a:xfrm>
+          <a:prstGeom prst="rect">
+            <a:avLst/>
+          </a:prstGeom>
+          <a:noFill/>
+        </p:spPr>
+        <p:txBody>
+          <a:bodyPr wrap="square" anchor="t" rtlCol="0"/>
+          <a:lstStyle/>
+          <a:p>
+            <a:pPr algn="l">
+              <a:buNone/>
+            </a:pPr>
+            <a:r>
+              <a:rPr lang="en-US" sz="900" b="1" dirty="0">
+                <a:solidFill>
+                  <a:srgbClr val="FFFFFF"/>
+                </a:solidFill>
+                <a:latin typeface="Calibri"/>
+              </a:rPr>
+              <a:t>CREATED</a:t>
+            </a:r>
+          </a:p>
+        </p:txBody>
+      </p:sp>
+      <p:cxnSp>
+        <p:nvCxnSpPr>
+          <p:cNvPr id="1045" name="ln"/>
+          <p:cNvCxnSpPr/>
+          <p:nvPr/>
+        </p:nvCxnSpPr>
+        <p:spPr>
+          <a:xfrm flipH="0" flipV="0">
+            <a:off x="8421624" y="5641848"/>
+            <a:ext cx="1" cy="73152"/>
+          </a:xfrm>
+          <a:prstGeom prst="line">
+            <a:avLst/>
+          </a:prstGeom>
+          <a:ln w="15000">
+            <a:solidFill>
+              <a:srgbClr val="3B82F6"/>
+            </a:solidFill>
+          </a:ln>
+        </p:spPr>
+      </p:cxnSp>
+      <p:sp>
+        <p:nvSpPr>
+          <p:cNvPr id="1046" name="c"/>
+          <p:cNvSpPr/>
+          <p:nvPr/>
+        </p:nvSpPr>
+        <p:spPr>
+          <a:xfrm>
+            <a:off x="8321040" y="5715000"/>
+            <a:ext cx="201168" cy="201168"/>
+          </a:xfrm>
+          <a:prstGeom prst="ellipse">
+            <a:avLst/>
+          </a:prstGeom>
+          <a:solidFill>
+            <a:srgbClr val="F97316"/>
+          </a:solidFill>
+          <a:ln>
+            <a:noFill/>
+          </a:ln>
+        </p:spPr>
+        <p:txBody>
+          <a:bodyPr/>
+          <a:lstStyle/>
+          <a:p/>
+        </p:txBody>
+      </p:sp>
+      <p:sp>
+        <p:nvSpPr>
+          <p:cNvPr id="1047" name="t"/>
+          <p:cNvSpPr txBox="1"/>
+          <p:nvPr/>
+        </p:nvSpPr>
+        <p:spPr>
+          <a:xfrm>
+            <a:off x="8321040" y="5742432"/>
+            <a:ext cx="201168" cy="201168"/>
+          </a:xfrm>
+          <a:prstGeom prst="rect">
+            <a:avLst/>
+          </a:prstGeom>
+          <a:noFill/>
+        </p:spPr>
+        <p:txBody>
+          <a:bodyPr wrap="square" anchor="t" rtlCol="0"/>
+          <a:lstStyle/>
+          <a:p>
+            <a:pPr algn="ctr">
+              <a:buNone/>
+            </a:pPr>
+            <a:r>
+              <a:rPr lang="en-US" sz="900" b="1" dirty="0">
+                <a:solidFill>
+                  <a:srgbClr val="FFFFFF"/>
+                </a:solidFill>
+                <a:latin typeface="Calibri"/>
+              </a:rPr>
+              <a:t>2</a:t>
+            </a:r>
+          </a:p>
+        </p:txBody>
+      </p:sp>
+      <p:sp>
+        <p:nvSpPr>
+          <p:cNvPr id="1048" name="t"/>
+          <p:cNvSpPr txBox="1"/>
+          <p:nvPr/>
+        </p:nvSpPr>
+        <p:spPr>
+          <a:xfrm>
+            <a:off x="8641080" y="5742432"/>
+            <a:ext cx="2286000" cy="201168"/>
+          </a:xfrm>
+          <a:prstGeom prst="rect">
+            <a:avLst/>
+          </a:prstGeom>
+          <a:noFill/>
+        </p:spPr>
+        <p:txBody>
+          <a:bodyPr wrap="square" anchor="t" rtlCol="0"/>
+          <a:lstStyle/>
+          <a:p>
+            <a:pPr algn="l">
+              <a:buNone/>
+            </a:pPr>
+            <a:r>
+              <a:rPr lang="en-US" sz="900" b="1" dirty="0">
+                <a:solidFill>
+                  <a:srgbClr val="FFFFFF"/>
+                </a:solidFill>
+                <a:latin typeface="Calibri"/>
+              </a:rPr>
+              <a:t>ASSIGNED</a:t>
+            </a:r>
+          </a:p>
+        </p:txBody>
+      </p:sp>
+      <p:cxnSp>
+        <p:nvCxnSpPr>
+          <p:cNvPr id="1049" name="ln"/>
+          <p:cNvCxnSpPr/>
+          <p:nvPr/>
+        </p:nvCxnSpPr>
+        <p:spPr>
+          <a:xfrm flipH="0" flipV="0">
+            <a:off x="8421624" y="5916168"/>
+            <a:ext cx="1" cy="73152"/>
+          </a:xfrm>
+          <a:prstGeom prst="line">
+            <a:avLst/>
+          </a:prstGeom>
+          <a:ln w="15000">
+            <a:solidFill>
+              <a:srgbClr val="F97316"/>
+            </a:solidFill>
+          </a:ln>
+        </p:spPr>
+      </p:cxnSp>
+      <p:sp>
+        <p:nvSpPr>
+          <p:cNvPr id="1050" name="c"/>
+          <p:cNvSpPr/>
+          <p:nvPr/>
+        </p:nvSpPr>
+        <p:spPr>
+          <a:xfrm>
+            <a:off x="8321040" y="5989320"/>
+            <a:ext cx="201168" cy="201168"/>
+          </a:xfrm>
+          <a:prstGeom prst="ellipse">
+            <a:avLst/>
+          </a:prstGeom>
+          <a:solidFill>
+            <a:srgbClr val="8B5CF6"/>
+          </a:solidFill>
+          <a:ln>
+            <a:noFill/>
+          </a:ln>
+        </p:spPr>
+        <p:txBody>
+          <a:bodyPr/>
+          <a:lstStyle/>
+          <a:p/>
+        </p:txBody>
+      </p:sp>
+      <p:sp>
+        <p:nvSpPr>
+          <p:cNvPr id="1051" name="t"/>
+          <p:cNvSpPr txBox="1"/>
+          <p:nvPr/>
+        </p:nvSpPr>
+        <p:spPr>
+          <a:xfrm>
+            <a:off x="8321040" y="6016752"/>
+            <a:ext cx="201168" cy="201168"/>
+          </a:xfrm>
+          <a:prstGeom prst="rect">
+            <a:avLst/>
+          </a:prstGeom>
+          <a:noFill/>
+        </p:spPr>
+        <p:txBody>
+          <a:bodyPr wrap="square" anchor="t" rtlCol="0"/>
+          <a:lstStyle/>
+          <a:p>
+            <a:pPr algn="ctr">
+              <a:buNone/>
+            </a:pPr>
+            <a:r>
+              <a:rPr lang="en-US" sz="900" b="1" dirty="0">
+                <a:solidFill>
+                  <a:srgbClr val="FFFFFF"/>
+                </a:solidFill>
+                <a:latin typeface="Calibri"/>
+              </a:rPr>
+              <a:t>3</a:t>
+            </a:r>
+          </a:p>
+        </p:txBody>
+      </p:sp>
+      <p:sp>
+        <p:nvSpPr>
+          <p:cNvPr id="1052" name="t"/>
+          <p:cNvSpPr txBox="1"/>
+          <p:nvPr/>
+        </p:nvSpPr>
+        <p:spPr>
+          <a:xfrm>
+            <a:off x="8641080" y="6016752"/>
+            <a:ext cx="2286000" cy="201168"/>
+          </a:xfrm>
+          <a:prstGeom prst="rect">
+            <a:avLst/>
+          </a:prstGeom>
+          <a:noFill/>
+        </p:spPr>
+        <p:txBody>
+          <a:bodyPr wrap="square" anchor="t" rtlCol="0"/>
+          <a:lstStyle/>
+          <a:p>
+            <a:pPr algn="l">
+              <a:buNone/>
+            </a:pPr>
+            <a:r>
+              <a:rPr lang="en-US" sz="900" b="1" dirty="0">
+                <a:solidFill>
+                  <a:srgbClr val="FFFFFF"/>
+                </a:solidFill>
+                <a:latin typeface="Calibri"/>
+              </a:rPr>
+              <a:t>OUT FOR DELIVERY</a:t>
+            </a:r>
+          </a:p>
+        </p:txBody>
+      </p:sp>
+      <p:cxnSp>
+        <p:nvCxnSpPr>
+          <p:cNvPr id="1053" name="ln"/>
+          <p:cNvCxnSpPr/>
+          <p:nvPr/>
+        </p:nvCxnSpPr>
+        <p:spPr>
+          <a:xfrm flipH="0" flipV="0">
+            <a:off x="8421624" y="6190488"/>
+            <a:ext cx="1" cy="73152"/>
+          </a:xfrm>
+          <a:prstGeom prst="line">
+            <a:avLst/>
+          </a:prstGeom>
+          <a:ln w="15000">
+            <a:solidFill>
+              <a:srgbClr val="8B5CF6"/>
+            </a:solidFill>
+          </a:ln>
+        </p:spPr>
+      </p:cxnSp>
+      <p:sp>
+        <p:nvSpPr>
+          <p:cNvPr id="1054" name="c"/>
+          <p:cNvSpPr/>
+          <p:nvPr/>
+        </p:nvSpPr>
+        <p:spPr>
+          <a:xfrm>
+            <a:off x="8321040" y="6263640"/>
+            <a:ext cx="201168" cy="201168"/>
+          </a:xfrm>
+          <a:prstGeom prst="ellipse">
+            <a:avLst/>
+          </a:prstGeom>
+          <a:solidFill>
+            <a:srgbClr val="10B981"/>
+          </a:solidFill>
+          <a:ln>
+            <a:noFill/>
+          </a:ln>
+        </p:spPr>
+        <p:txBody>
+          <a:bodyPr/>
+          <a:lstStyle/>
+          <a:p/>
+        </p:txBody>
+      </p:sp>
+      <p:sp>
+        <p:nvSpPr>
+          <p:cNvPr id="1055" name="t"/>
+          <p:cNvSpPr txBox="1"/>
+          <p:nvPr/>
+        </p:nvSpPr>
+        <p:spPr>
+          <a:xfrm>
+            <a:off x="8321040" y="6291072"/>
+            <a:ext cx="201168" cy="201168"/>
+          </a:xfrm>
+          <a:prstGeom prst="rect">
+            <a:avLst/>
+          </a:prstGeom>
+          <a:noFill/>
+        </p:spPr>
+        <p:txBody>
+          <a:bodyPr wrap="square" anchor="t" rtlCol="0"/>
+          <a:lstStyle/>
+          <a:p>
+            <a:pPr algn="ctr">
+              <a:buNone/>
+            </a:pPr>
+            <a:r>
+              <a:rPr lang="en-US" sz="900" b="1" dirty="0">
+                <a:solidFill>
+                  <a:srgbClr val="FFFFFF"/>
+                </a:solidFill>
+                <a:latin typeface="Calibri"/>
+              </a:rPr>
+              <a:t>4</a:t>
+            </a:r>
+          </a:p>
+        </p:txBody>
+      </p:sp>
+      <p:sp>
+        <p:nvSpPr>
+          <p:cNvPr id="1056" name="t"/>
+          <p:cNvSpPr txBox="1"/>
+          <p:nvPr/>
+        </p:nvSpPr>
+        <p:spPr>
+          <a:xfrm>
+            <a:off x="8641080" y="6291072"/>
+            <a:ext cx="2286000" cy="201168"/>
+          </a:xfrm>
+          <a:prstGeom prst="rect">
+            <a:avLst/>
+          </a:prstGeom>
+          <a:noFill/>
+        </p:spPr>
+        <p:txBody>
+          <a:bodyPr wrap="square" anchor="t" rtlCol="0"/>
+          <a:lstStyle/>
+          <a:p>
+            <a:pPr algn="l">
+              <a:buNone/>
+            </a:pPr>
+            <a:r>
+              <a:rPr lang="en-US" sz="900" b="1" dirty="0">
+                <a:solidFill>
+                  <a:srgbClr val="FFFFFF"/>
+                </a:solidFill>
+                <a:latin typeface="Calibri"/>
+              </a:rPr>
+              <a:t>DELIVERED</a:t>
+            </a:r>
+          </a:p>
+        </p:txBody>
+      </p:sp>
+      <p:sp>
+        <p:nvSpPr>
+          <p:cNvPr id="1057" name="t"/>
+          <p:cNvSpPr txBox="1"/>
+          <p:nvPr/>
+        </p:nvSpPr>
+        <p:spPr>
+          <a:xfrm>
+            <a:off x="8275320" y="6400800"/>
+            <a:ext cx="3474720" cy="164592"/>
+          </a:xfrm>
+          <a:prstGeom prst="rect">
+            <a:avLst/>
+          </a:prstGeom>
+          <a:noFill/>
+        </p:spPr>
+        <p:txBody>
+          <a:bodyPr wrap="square" anchor="t" rtlCol="0"/>
+          <a:lstStyle/>
+          <a:p>
+            <a:pPr algn="l">
+              <a:buNone/>
+            </a:pPr>
+            <a:r>
+              <a:rPr lang="en-US" sz="700" b="1" dirty="0">
+                <a:solidFill>
+                  <a:srgbClr val="FBBF24"/>
+                </a:solidFill>
+                <a:latin typeface="Calibri"/>
+              </a:rPr>
+              <a:t>OTP + Photo proof verification at delivery</a:t>
+            </a:r>
+          </a:p>
+        </p:txBody>
+      </p:sp>
+      <p:sp>
+        <p:nvSpPr>
+          <p:cNvPr id="1058" name="t"/>
+          <p:cNvSpPr txBox="1"/>
+          <p:nvPr/>
+        </p:nvSpPr>
+        <p:spPr>
+          <a:xfrm>
+            <a:off x="365760" y="6629400"/>
+            <a:ext cx="10058400" cy="182880"/>
+          </a:xfrm>
+          <a:prstGeom prst="rect">
+            <a:avLst/>
+          </a:prstGeom>
+          <a:noFill/>
+        </p:spPr>
+        <p:txBody>
+          <a:bodyPr wrap="square" anchor="t" rtlCol="0"/>
+          <a:lstStyle/>
+          <a:p>
+            <a:pPr algn="l">
+              <a:buNone/>
+            </a:pPr>
+            <a:r>
+              <a:rPr lang="en-US" sz="800" b="1" dirty="0">
+                <a:solidFill>
+                  <a:srgbClr val="94A3B8"/>
+                </a:solidFill>
+                <a:latin typeface="Calibri"/>
+              </a:rPr>
+              <a:t>Production-grade backend  -  Docker + K8s ready  -  REST + WebSocket  -  Multi-database (MongoDB + Redis)</a:t>
+            </a:r>
+          </a:p>
+        </p:txBody>
+      </p:sp>
+      <p:sp>
+        <p:nvSpPr>
+          <p:cNvPr id="1059" name="t"/>
+          <p:cNvSpPr txBox="1"/>
+          <p:nvPr/>
+        </p:nvSpPr>
+        <p:spPr>
+          <a:xfrm>
+            <a:off x="11521440" y="6629400"/>
+            <a:ext cx="457200" cy="182880"/>
+          </a:xfrm>
+          <a:prstGeom prst="rect">
+            <a:avLst/>
+          </a:prstGeom>
+          <a:noFill/>
+        </p:spPr>
+        <p:txBody>
+          <a:bodyPr wrap="square" anchor="t" rtlCol="0"/>
+          <a:lstStyle/>
+          <a:p>
+            <a:pPr algn="r">
+              <a:buNone/>
+            </a:pPr>
+            <a:r>
+              <a:rPr lang="en-US" sz="1200" b="1" dirty="0">
+                <a:solidFill>
+                  <a:srgbClr val="94A3B8"/>
+                </a:solidFill>
+                <a:latin typeface="Calibri"/>
+              </a:rPr>
+              <a:t>12</a:t>
+            </a:r>
+          </a:p>
+        </p:txBody>
+      </p:sp>
+    </p:spTree>
+  </p:cSld>
+  <p:transition spd="med">
+    <p:split orient="horz" dir="out"/>
+  </p:transition>
+  <p:clrMapOvr>
+    <a:masterClrMapping/>
+  </p:clrMapOvr>
+</p:sld>
+</file>
+
 <file path=ppt/slides/slide2.xml><?xml version="1.0" encoding="utf-8"?>
 <p:sld xmlns:a="http://schemas.openxmlformats.org/drawingml/2006/main" xmlns:r="http://schemas.openxmlformats.org/officeDocument/2006/relationships" xmlns:p="http://schemas.openxmlformats.org/presentationml/2006/main">
   <p:cSld>
